--- a/output/wordlabs-run-3day.pptx
+++ b/output/wordlabs-run-3day.pptx
@@ -5622,7 +5622,7 @@
                 <a:ea typeface="Trebuchet MS" pitchFamily="34" charset="-122"/>
                 <a:cs typeface="Trebuchet MS" pitchFamily="34" charset="-120"/>
               </a:rPr>
-              <a:t>0</a:t>
+              <a:t>1</a:t>
             </a:r>
             <a:pPr algn="ctr" indent="0" marL="0">
               <a:buNone/>
@@ -6040,7 +6040,7 @@
                 <a:ea typeface="Calibri" pitchFamily="34" charset="-122"/>
                 <a:cs typeface="Calibri" pitchFamily="34" charset="-120"/>
               </a:rPr>
-              <a:t>The young </a:t>
+              <a:t>The </a:t>
             </a:r>
             <a:pPr algn="l" indent="0" marL="0">
               <a:buNone/>
@@ -6057,7 +6057,7 @@
                 <a:ea typeface="Calibri" pitchFamily="34" charset="-122"/>
                 <a:cs typeface="Calibri" pitchFamily="34" charset="-120"/>
               </a:rPr>
-              <a:t>runner</a:t>
+              <a:t>runaway</a:t>
             </a:r>
             <a:pPr algn="l" indent="0" marL="0">
               <a:buNone/>
@@ -6071,7 +6071,7 @@
                 <a:ea typeface="Calibri" pitchFamily="34" charset="-122"/>
                 <a:cs typeface="Calibri" pitchFamily="34" charset="-120"/>
               </a:rPr>
-              <a:t> tried to </a:t>
+              <a:t> cart rolled down the hill, but the fastest </a:t>
             </a:r>
             <a:pPr algn="l" indent="0" marL="0">
               <a:buNone/>
@@ -6088,7 +6088,7 @@
                 <a:ea typeface="Calibri" pitchFamily="34" charset="-122"/>
                 <a:cs typeface="Calibri" pitchFamily="34" charset="-120"/>
               </a:rPr>
-              <a:t>outrun</a:t>
+              <a:t>runner</a:t>
             </a:r>
             <a:pPr algn="l" indent="0" marL="0">
               <a:buNone/>
@@ -6102,7 +6102,7 @@
                 <a:ea typeface="Calibri" pitchFamily="34" charset="-122"/>
                 <a:cs typeface="Calibri" pitchFamily="34" charset="-120"/>
               </a:rPr>
-              <a:t> the storm before it reached the campsite.</a:t>
+              <a:t> in the class caught up to it!</a:t>
             </a:r>
             <a:endParaRPr lang="en-US" sz="1800" dirty="0"/>
           </a:p>
@@ -6257,7 +6257,7 @@
                 <a:ea typeface="Trebuchet MS" pitchFamily="34" charset="-122"/>
                 <a:cs typeface="Trebuchet MS" pitchFamily="34" charset="-120"/>
               </a:rPr>
-              <a:t>runner</a:t>
+              <a:t>runaway</a:t>
             </a:r>
             <a:endParaRPr lang="en-US" sz="1400" dirty="0"/>
           </a:p>
@@ -6385,7 +6385,7 @@
                 <a:ea typeface="Trebuchet MS" pitchFamily="34" charset="-122"/>
                 <a:cs typeface="Trebuchet MS" pitchFamily="34" charset="-120"/>
               </a:rPr>
-              <a:t>outrun</a:t>
+              <a:t>runner</a:t>
             </a:r>
             <a:endParaRPr lang="en-US" sz="1400" dirty="0"/>
           </a:p>
@@ -6855,7 +6855,7 @@
                 <a:ea typeface="Trebuchet MS" pitchFamily="34" charset="-122"/>
                 <a:cs typeface="Trebuchet MS" pitchFamily="34" charset="-120"/>
               </a:rPr>
-              <a:t>runner</a:t>
+              <a:t>runaway</a:t>
             </a:r>
             <a:endParaRPr lang="en-US" sz="2800" dirty="0"/>
           </a:p>
@@ -7682,7 +7682,7 @@
                 <a:ea typeface="Trebuchet MS" pitchFamily="34" charset="-122"/>
                 <a:cs typeface="Trebuchet MS" pitchFamily="34" charset="-120"/>
               </a:rPr>
-              <a:t>runner</a:t>
+              <a:t>runaway</a:t>
             </a:r>
             <a:endParaRPr lang="en-US" sz="2800" dirty="0"/>
           </a:p>
@@ -7933,7 +7933,7 @@
                 <a:ea typeface="Trebuchet MS" pitchFamily="34" charset="-122"/>
                 <a:cs typeface="Trebuchet MS" pitchFamily="34" charset="-120"/>
               </a:rPr>
-              <a:t>er</a:t>
+              <a:t>away</a:t>
             </a:r>
             <a:endParaRPr lang="en-US" sz="1300" dirty="0"/>
           </a:p>
@@ -7972,7 +7972,7 @@
                 <a:ea typeface="Calibri" pitchFamily="34" charset="-122"/>
                 <a:cs typeface="Calibri" pitchFamily="34" charset="-120"/>
               </a:rPr>
-              <a:t>a person who does something</a:t>
+              <a:t>moving from a place</a:t>
             </a:r>
             <a:endParaRPr lang="en-US" sz="850" dirty="0"/>
           </a:p>
@@ -8667,7 +8667,7 @@
                 <a:ea typeface="Trebuchet MS" pitchFamily="34" charset="-122"/>
                 <a:cs typeface="Trebuchet MS" pitchFamily="34" charset="-120"/>
               </a:rPr>
-              <a:t>runner</a:t>
+              <a:t>runaway</a:t>
             </a:r>
             <a:endParaRPr lang="en-US" sz="2800" dirty="0"/>
           </a:p>
@@ -8918,7 +8918,7 @@
                 <a:ea typeface="Trebuchet MS" pitchFamily="34" charset="-122"/>
                 <a:cs typeface="Trebuchet MS" pitchFamily="34" charset="-120"/>
               </a:rPr>
-              <a:t>er</a:t>
+              <a:t>away</a:t>
             </a:r>
             <a:endParaRPr lang="en-US" sz="1300" dirty="0"/>
           </a:p>
@@ -8957,7 +8957,7 @@
                 <a:ea typeface="Calibri" pitchFamily="34" charset="-122"/>
                 <a:cs typeface="Calibri" pitchFamily="34" charset="-120"/>
               </a:rPr>
-              <a:t>a person who does something</a:t>
+              <a:t>moving from a place</a:t>
             </a:r>
             <a:endParaRPr lang="en-US" sz="850" dirty="0"/>
           </a:p>
@@ -9064,7 +9064,7 @@
         </p:nvSpPr>
         <p:spPr>
           <a:xfrm>
-            <a:off x="2999232" y="3364992"/>
+            <a:off x="2313432" y="3364992"/>
             <a:ext cx="1645920" cy="475488"/>
           </a:xfrm>
           <a:prstGeom prst="rect">
@@ -9091,7 +9091,7 @@
         </p:nvSpPr>
         <p:spPr>
           <a:xfrm>
-            <a:off x="2999232" y="3364992"/>
+            <a:off x="2313432" y="3364992"/>
             <a:ext cx="1645920" cy="475488"/>
           </a:xfrm>
           <a:prstGeom prst="rect">
@@ -9130,8 +9130,8 @@
         </p:nvSpPr>
         <p:spPr>
           <a:xfrm>
-            <a:off x="4645152" y="3364992"/>
-            <a:ext cx="1097280" cy="475488"/>
+            <a:off x="3959352" y="3364992"/>
+            <a:ext cx="411480" cy="475488"/>
           </a:xfrm>
           <a:prstGeom prst="rect">
             <a:avLst/>
@@ -9169,7 +9169,7 @@
         </p:nvSpPr>
         <p:spPr>
           <a:xfrm>
-            <a:off x="5742432" y="3364992"/>
+            <a:off x="4370832" y="3364992"/>
             <a:ext cx="1645920" cy="475488"/>
           </a:xfrm>
           <a:prstGeom prst="rect">
@@ -9196,7 +9196,7 @@
         </p:nvSpPr>
         <p:spPr>
           <a:xfrm>
-            <a:off x="5742432" y="3364992"/>
+            <a:off x="4370832" y="3364992"/>
             <a:ext cx="1645920" cy="475488"/>
           </a:xfrm>
           <a:prstGeom prst="rect">
@@ -9221,7 +9221,7 @@
                 <a:ea typeface="Trebuchet MS" pitchFamily="34" charset="-122"/>
                 <a:cs typeface="Trebuchet MS" pitchFamily="34" charset="-120"/>
               </a:rPr>
-              <a:t>ner</a:t>
+              <a:t>a</a:t>
             </a:r>
             <a:endParaRPr lang="en-US" sz="1400" dirty="0"/>
           </a:p>
@@ -9229,7 +9229,112 @@
       </p:sp>
       <p:sp>
         <p:nvSpPr>
-          <p:cNvPr id="30" name="Shape 28"/>
+          <p:cNvPr id="30" name="Text 28"/>
+          <p:cNvSpPr/>
+          <p:nvPr/>
+        </p:nvSpPr>
+        <p:spPr>
+          <a:xfrm>
+            <a:off x="6016752" y="3364992"/>
+            <a:ext cx="411480" cy="475488"/>
+          </a:xfrm>
+          <a:prstGeom prst="rect">
+            <a:avLst/>
+          </a:prstGeom>
+          <a:noFill/>
+          <a:ln/>
+        </p:spPr>
+        <p:txBody>
+          <a:bodyPr wrap="square" lIns="0" tIns="0" rIns="0" bIns="0" rtlCol="0" anchor="ctr"/>
+          <a:lstStyle/>
+          <a:p>
+            <a:pPr algn="ctr" indent="0" marL="0">
+              <a:buNone/>
+            </a:pPr>
+            <a:r>
+              <a:rPr lang="en-US" sz="1600" b="1" dirty="0">
+                <a:solidFill>
+                  <a:srgbClr val="0D9488"/>
+                </a:solidFill>
+                <a:latin typeface="Trebuchet MS" pitchFamily="34" charset="0"/>
+                <a:ea typeface="Trebuchet MS" pitchFamily="34" charset="-122"/>
+                <a:cs typeface="Trebuchet MS" pitchFamily="34" charset="-120"/>
+              </a:rPr>
+              <a:t>·</a:t>
+            </a:r>
+            <a:endParaRPr lang="en-US" sz="1600" dirty="0"/>
+          </a:p>
+        </p:txBody>
+      </p:sp>
+      <p:sp>
+        <p:nvSpPr>
+          <p:cNvPr id="31" name="Shape 29"/>
+          <p:cNvSpPr/>
+          <p:nvPr/>
+        </p:nvSpPr>
+        <p:spPr>
+          <a:xfrm>
+            <a:off x="6428232" y="3364992"/>
+            <a:ext cx="1645920" cy="475488"/>
+          </a:xfrm>
+          <a:prstGeom prst="rect">
+            <a:avLst>
+              <a:gd name="adj" fmla="val 9615"/>
+            </a:avLst>
+          </a:prstGeom>
+          <a:solidFill>
+            <a:srgbClr val="FFFFFF"/>
+          </a:solidFill>
+          <a:ln w="12700">
+            <a:solidFill>
+              <a:srgbClr val="0D9488"/>
+            </a:solidFill>
+            <a:prstDash val="solid"/>
+          </a:ln>
+        </p:spPr>
+      </p:sp>
+      <p:sp>
+        <p:nvSpPr>
+          <p:cNvPr id="32" name="Text 30"/>
+          <p:cNvSpPr/>
+          <p:nvPr/>
+        </p:nvSpPr>
+        <p:spPr>
+          <a:xfrm>
+            <a:off x="6428232" y="3364992"/>
+            <a:ext cx="1645920" cy="475488"/>
+          </a:xfrm>
+          <a:prstGeom prst="rect">
+            <a:avLst/>
+          </a:prstGeom>
+          <a:noFill/>
+          <a:ln/>
+        </p:spPr>
+        <p:txBody>
+          <a:bodyPr wrap="square" lIns="0" tIns="0" rIns="0" bIns="0" rtlCol="0" anchor="ctr"/>
+          <a:lstStyle/>
+          <a:p>
+            <a:pPr algn="ctr" indent="0" marL="0">
+              <a:buNone/>
+            </a:pPr>
+            <a:r>
+              <a:rPr lang="en-US" sz="1400" b="1" dirty="0">
+                <a:solidFill>
+                  <a:srgbClr val="0D9488"/>
+                </a:solidFill>
+                <a:latin typeface="Trebuchet MS" pitchFamily="34" charset="0"/>
+                <a:ea typeface="Trebuchet MS" pitchFamily="34" charset="-122"/>
+                <a:cs typeface="Trebuchet MS" pitchFamily="34" charset="-120"/>
+              </a:rPr>
+              <a:t>way</a:t>
+            </a:r>
+            <a:endParaRPr lang="en-US" sz="1400" dirty="0"/>
+          </a:p>
+        </p:txBody>
+      </p:sp>
+      <p:sp>
+        <p:nvSpPr>
+          <p:cNvPr id="33" name="Shape 31"/>
           <p:cNvSpPr/>
           <p:nvPr/>
         </p:nvSpPr>
@@ -9256,7 +9361,7 @@
       </p:sp>
       <p:sp>
         <p:nvSpPr>
-          <p:cNvPr id="31" name="Text 29"/>
+          <p:cNvPr id="34" name="Text 32"/>
           <p:cNvSpPr/>
           <p:nvPr/>
         </p:nvSpPr>
@@ -9295,7 +9400,7 @@
       </p:sp>
       <p:sp>
         <p:nvSpPr>
-          <p:cNvPr id="32" name="Shape 30"/>
+          <p:cNvPr id="35" name="Shape 33"/>
           <p:cNvSpPr/>
           <p:nvPr/>
         </p:nvSpPr>
@@ -9322,7 +9427,7 @@
       </p:sp>
       <p:sp>
         <p:nvSpPr>
-          <p:cNvPr id="33" name="Text 31"/>
+          <p:cNvPr id="36" name="Text 34"/>
           <p:cNvSpPr/>
           <p:nvPr/>
         </p:nvSpPr>
@@ -9784,7 +9889,7 @@
                 <a:ea typeface="Trebuchet MS" pitchFamily="34" charset="-122"/>
                 <a:cs typeface="Trebuchet MS" pitchFamily="34" charset="-120"/>
               </a:rPr>
-              <a:t>runner</a:t>
+              <a:t>runaway</a:t>
             </a:r>
             <a:endParaRPr lang="en-US" sz="2800" dirty="0"/>
           </a:p>
@@ -10035,7 +10140,7 @@
                 <a:ea typeface="Trebuchet MS" pitchFamily="34" charset="-122"/>
                 <a:cs typeface="Trebuchet MS" pitchFamily="34" charset="-120"/>
               </a:rPr>
-              <a:t>er</a:t>
+              <a:t>away</a:t>
             </a:r>
             <a:endParaRPr lang="en-US" sz="1300" dirty="0"/>
           </a:p>
@@ -10074,7 +10179,7 @@
                 <a:ea typeface="Calibri" pitchFamily="34" charset="-122"/>
                 <a:cs typeface="Calibri" pitchFamily="34" charset="-120"/>
               </a:rPr>
-              <a:t>a person who does something</a:t>
+              <a:t>moving from a place</a:t>
             </a:r>
             <a:endParaRPr lang="en-US" sz="850" dirty="0"/>
           </a:p>
@@ -10181,7 +10286,7 @@
         </p:nvSpPr>
         <p:spPr>
           <a:xfrm>
-            <a:off x="2999232" y="3364992"/>
+            <a:off x="2313432" y="3364992"/>
             <a:ext cx="1645920" cy="475488"/>
           </a:xfrm>
           <a:prstGeom prst="rect">
@@ -10208,7 +10313,7 @@
         </p:nvSpPr>
         <p:spPr>
           <a:xfrm>
-            <a:off x="2999232" y="3364992"/>
+            <a:off x="2313432" y="3364992"/>
             <a:ext cx="1645920" cy="475488"/>
           </a:xfrm>
           <a:prstGeom prst="rect">
@@ -10247,8 +10352,8 @@
         </p:nvSpPr>
         <p:spPr>
           <a:xfrm>
-            <a:off x="4645152" y="3364992"/>
-            <a:ext cx="1097280" cy="475488"/>
+            <a:off x="3959352" y="3364992"/>
+            <a:ext cx="411480" cy="475488"/>
           </a:xfrm>
           <a:prstGeom prst="rect">
             <a:avLst/>
@@ -10286,7 +10391,7 @@
         </p:nvSpPr>
         <p:spPr>
           <a:xfrm>
-            <a:off x="5742432" y="3364992"/>
+            <a:off x="4370832" y="3364992"/>
             <a:ext cx="1645920" cy="475488"/>
           </a:xfrm>
           <a:prstGeom prst="rect">
@@ -10313,7 +10418,7 @@
         </p:nvSpPr>
         <p:spPr>
           <a:xfrm>
-            <a:off x="5742432" y="3364992"/>
+            <a:off x="4370832" y="3364992"/>
             <a:ext cx="1645920" cy="475488"/>
           </a:xfrm>
           <a:prstGeom prst="rect">
@@ -10338,7 +10443,7 @@
                 <a:ea typeface="Trebuchet MS" pitchFamily="34" charset="-122"/>
                 <a:cs typeface="Trebuchet MS" pitchFamily="34" charset="-120"/>
               </a:rPr>
-              <a:t>ner</a:t>
+              <a:t>a</a:t>
             </a:r>
             <a:endParaRPr lang="en-US" sz="1400" dirty="0"/>
           </a:p>
@@ -10346,7 +10451,112 @@
       </p:sp>
       <p:sp>
         <p:nvSpPr>
-          <p:cNvPr id="30" name="Shape 28"/>
+          <p:cNvPr id="30" name="Text 28"/>
+          <p:cNvSpPr/>
+          <p:nvPr/>
+        </p:nvSpPr>
+        <p:spPr>
+          <a:xfrm>
+            <a:off x="6016752" y="3364992"/>
+            <a:ext cx="411480" cy="475488"/>
+          </a:xfrm>
+          <a:prstGeom prst="rect">
+            <a:avLst/>
+          </a:prstGeom>
+          <a:noFill/>
+          <a:ln/>
+        </p:spPr>
+        <p:txBody>
+          <a:bodyPr wrap="square" lIns="0" tIns="0" rIns="0" bIns="0" rtlCol="0" anchor="ctr"/>
+          <a:lstStyle/>
+          <a:p>
+            <a:pPr algn="ctr" indent="0" marL="0">
+              <a:buNone/>
+            </a:pPr>
+            <a:r>
+              <a:rPr lang="en-US" sz="1600" b="1" dirty="0">
+                <a:solidFill>
+                  <a:srgbClr val="0D9488"/>
+                </a:solidFill>
+                <a:latin typeface="Trebuchet MS" pitchFamily="34" charset="0"/>
+                <a:ea typeface="Trebuchet MS" pitchFamily="34" charset="-122"/>
+                <a:cs typeface="Trebuchet MS" pitchFamily="34" charset="-120"/>
+              </a:rPr>
+              <a:t>·</a:t>
+            </a:r>
+            <a:endParaRPr lang="en-US" sz="1600" dirty="0"/>
+          </a:p>
+        </p:txBody>
+      </p:sp>
+      <p:sp>
+        <p:nvSpPr>
+          <p:cNvPr id="31" name="Shape 29"/>
+          <p:cNvSpPr/>
+          <p:nvPr/>
+        </p:nvSpPr>
+        <p:spPr>
+          <a:xfrm>
+            <a:off x="6428232" y="3364992"/>
+            <a:ext cx="1645920" cy="475488"/>
+          </a:xfrm>
+          <a:prstGeom prst="rect">
+            <a:avLst>
+              <a:gd name="adj" fmla="val 9615"/>
+            </a:avLst>
+          </a:prstGeom>
+          <a:solidFill>
+            <a:srgbClr val="FFFFFF"/>
+          </a:solidFill>
+          <a:ln w="12700">
+            <a:solidFill>
+              <a:srgbClr val="0D9488"/>
+            </a:solidFill>
+            <a:prstDash val="solid"/>
+          </a:ln>
+        </p:spPr>
+      </p:sp>
+      <p:sp>
+        <p:nvSpPr>
+          <p:cNvPr id="32" name="Text 30"/>
+          <p:cNvSpPr/>
+          <p:nvPr/>
+        </p:nvSpPr>
+        <p:spPr>
+          <a:xfrm>
+            <a:off x="6428232" y="3364992"/>
+            <a:ext cx="1645920" cy="475488"/>
+          </a:xfrm>
+          <a:prstGeom prst="rect">
+            <a:avLst/>
+          </a:prstGeom>
+          <a:noFill/>
+          <a:ln/>
+        </p:spPr>
+        <p:txBody>
+          <a:bodyPr wrap="square" lIns="0" tIns="0" rIns="0" bIns="0" rtlCol="0" anchor="ctr"/>
+          <a:lstStyle/>
+          <a:p>
+            <a:pPr algn="ctr" indent="0" marL="0">
+              <a:buNone/>
+            </a:pPr>
+            <a:r>
+              <a:rPr lang="en-US" sz="1400" b="1" dirty="0">
+                <a:solidFill>
+                  <a:srgbClr val="0D9488"/>
+                </a:solidFill>
+                <a:latin typeface="Trebuchet MS" pitchFamily="34" charset="0"/>
+                <a:ea typeface="Trebuchet MS" pitchFamily="34" charset="-122"/>
+                <a:cs typeface="Trebuchet MS" pitchFamily="34" charset="-120"/>
+              </a:rPr>
+              <a:t>way</a:t>
+            </a:r>
+            <a:endParaRPr lang="en-US" sz="1400" dirty="0"/>
+          </a:p>
+        </p:txBody>
+      </p:sp>
+      <p:sp>
+        <p:nvSpPr>
+          <p:cNvPr id="33" name="Shape 31"/>
           <p:cNvSpPr/>
           <p:nvPr/>
         </p:nvSpPr>
@@ -10373,7 +10583,7 @@
       </p:sp>
       <p:sp>
         <p:nvSpPr>
-          <p:cNvPr id="31" name="Text 29"/>
+          <p:cNvPr id="34" name="Text 32"/>
           <p:cNvSpPr/>
           <p:nvPr/>
         </p:nvSpPr>
@@ -10412,7 +10622,7 @@
       </p:sp>
       <p:sp>
         <p:nvSpPr>
-          <p:cNvPr id="32" name="Shape 30"/>
+          <p:cNvPr id="35" name="Shape 33"/>
           <p:cNvSpPr/>
           <p:nvPr/>
         </p:nvSpPr>
@@ -10439,13 +10649,13 @@
       </p:sp>
       <p:sp>
         <p:nvSpPr>
-          <p:cNvPr id="33" name="Shape 31"/>
-          <p:cNvSpPr/>
-          <p:nvPr/>
-        </p:nvSpPr>
-        <p:spPr>
-          <a:xfrm>
-            <a:off x="2670048" y="4169664"/>
+          <p:cNvPr id="36" name="Shape 34"/>
+          <p:cNvSpPr/>
+          <p:nvPr/>
+        </p:nvSpPr>
+        <p:spPr>
+          <a:xfrm>
+            <a:off x="2254649" y="4169664"/>
             <a:ext cx="685800" cy="475488"/>
           </a:xfrm>
           <a:prstGeom prst="rect">
@@ -10466,13 +10676,13 @@
       </p:sp>
       <p:sp>
         <p:nvSpPr>
-          <p:cNvPr id="34" name="Text 32"/>
-          <p:cNvSpPr/>
-          <p:nvPr/>
-        </p:nvSpPr>
-        <p:spPr>
-          <a:xfrm>
-            <a:off x="2670048" y="4169664"/>
+          <p:cNvPr id="37" name="Text 35"/>
+          <p:cNvSpPr/>
+          <p:nvPr/>
+        </p:nvSpPr>
+        <p:spPr>
+          <a:xfrm>
+            <a:off x="2254649" y="4169664"/>
             <a:ext cx="685800" cy="475488"/>
           </a:xfrm>
           <a:prstGeom prst="rect">
@@ -10505,13 +10715,13 @@
       </p:sp>
       <p:sp>
         <p:nvSpPr>
-          <p:cNvPr id="35" name="Shape 33"/>
-          <p:cNvSpPr/>
-          <p:nvPr/>
-        </p:nvSpPr>
-        <p:spPr>
-          <a:xfrm>
-            <a:off x="4123944" y="4169664"/>
+          <p:cNvPr id="38" name="Shape 36"/>
+          <p:cNvSpPr/>
+          <p:nvPr/>
+        </p:nvSpPr>
+        <p:spPr>
+          <a:xfrm>
+            <a:off x="3293146" y="4169664"/>
             <a:ext cx="685800" cy="475488"/>
           </a:xfrm>
           <a:prstGeom prst="rect">
@@ -10532,13 +10742,13 @@
       </p:sp>
       <p:sp>
         <p:nvSpPr>
-          <p:cNvPr id="36" name="Text 34"/>
-          <p:cNvSpPr/>
-          <p:nvPr/>
-        </p:nvSpPr>
-        <p:spPr>
-          <a:xfrm>
-            <a:off x="4123944" y="4169664"/>
+          <p:cNvPr id="39" name="Text 37"/>
+          <p:cNvSpPr/>
+          <p:nvPr/>
+        </p:nvSpPr>
+        <p:spPr>
+          <a:xfrm>
+            <a:off x="3293146" y="4169664"/>
             <a:ext cx="685800" cy="475488"/>
           </a:xfrm>
           <a:prstGeom prst="rect">
@@ -10571,13 +10781,13 @@
       </p:sp>
       <p:sp>
         <p:nvSpPr>
-          <p:cNvPr id="37" name="Shape 35"/>
-          <p:cNvSpPr/>
-          <p:nvPr/>
-        </p:nvSpPr>
-        <p:spPr>
-          <a:xfrm>
-            <a:off x="5577840" y="4169664"/>
+          <p:cNvPr id="40" name="Shape 38"/>
+          <p:cNvSpPr/>
+          <p:nvPr/>
+        </p:nvSpPr>
+        <p:spPr>
+          <a:xfrm>
+            <a:off x="4331643" y="4169664"/>
             <a:ext cx="685800" cy="475488"/>
           </a:xfrm>
           <a:prstGeom prst="rect">
@@ -10598,13 +10808,13 @@
       </p:sp>
       <p:sp>
         <p:nvSpPr>
-          <p:cNvPr id="38" name="Text 36"/>
-          <p:cNvSpPr/>
-          <p:nvPr/>
-        </p:nvSpPr>
-        <p:spPr>
-          <a:xfrm>
-            <a:off x="5577840" y="4169664"/>
+          <p:cNvPr id="41" name="Text 39"/>
+          <p:cNvSpPr/>
+          <p:nvPr/>
+        </p:nvSpPr>
+        <p:spPr>
+          <a:xfrm>
+            <a:off x="4331643" y="4169664"/>
             <a:ext cx="685800" cy="475488"/>
           </a:xfrm>
           <a:prstGeom prst="rect">
@@ -10629,7 +10839,7 @@
                 <a:ea typeface="Trebuchet MS" pitchFamily="34" charset="-122"/>
                 <a:cs typeface="Trebuchet MS" pitchFamily="34" charset="-120"/>
               </a:rPr>
-              <a:t>nn</a:t>
+              <a:t>n</a:t>
             </a:r>
             <a:endParaRPr lang="en-US" sz="900" dirty="0"/>
           </a:p>
@@ -10637,13 +10847,13 @@
       </p:sp>
       <p:sp>
         <p:nvSpPr>
-          <p:cNvPr id="39" name="Shape 37"/>
-          <p:cNvSpPr/>
-          <p:nvPr/>
-        </p:nvSpPr>
-        <p:spPr>
-          <a:xfrm>
-            <a:off x="7031736" y="4169664"/>
+          <p:cNvPr id="42" name="Shape 40"/>
+          <p:cNvSpPr/>
+          <p:nvPr/>
+        </p:nvSpPr>
+        <p:spPr>
+          <a:xfrm>
+            <a:off x="5370141" y="4169664"/>
             <a:ext cx="685800" cy="475488"/>
           </a:xfrm>
           <a:prstGeom prst="rect">
@@ -10664,13 +10874,13 @@
       </p:sp>
       <p:sp>
         <p:nvSpPr>
-          <p:cNvPr id="40" name="Text 38"/>
-          <p:cNvSpPr/>
-          <p:nvPr/>
-        </p:nvSpPr>
-        <p:spPr>
-          <a:xfrm>
-            <a:off x="7031736" y="4169664"/>
+          <p:cNvPr id="43" name="Text 41"/>
+          <p:cNvSpPr/>
+          <p:nvPr/>
+        </p:nvSpPr>
+        <p:spPr>
+          <a:xfrm>
+            <a:off x="5370141" y="4169664"/>
             <a:ext cx="685800" cy="475488"/>
           </a:xfrm>
           <a:prstGeom prst="rect">
@@ -10695,7 +10905,139 @@
                 <a:ea typeface="Trebuchet MS" pitchFamily="34" charset="-122"/>
                 <a:cs typeface="Trebuchet MS" pitchFamily="34" charset="-120"/>
               </a:rPr>
-              <a:t>er</a:t>
+              <a:t>a</a:t>
+            </a:r>
+            <a:endParaRPr lang="en-US" sz="900" dirty="0"/>
+          </a:p>
+        </p:txBody>
+      </p:sp>
+      <p:sp>
+        <p:nvSpPr>
+          <p:cNvPr id="44" name="Shape 42"/>
+          <p:cNvSpPr/>
+          <p:nvPr/>
+        </p:nvSpPr>
+        <p:spPr>
+          <a:xfrm>
+            <a:off x="6408638" y="4169664"/>
+            <a:ext cx="685800" cy="475488"/>
+          </a:xfrm>
+          <a:prstGeom prst="rect">
+            <a:avLst>
+              <a:gd name="adj" fmla="val 7692"/>
+            </a:avLst>
+          </a:prstGeom>
+          <a:solidFill>
+            <a:srgbClr val="FFFFFF"/>
+          </a:solidFill>
+          <a:ln w="12700">
+            <a:solidFill>
+              <a:srgbClr val="DB2777"/>
+            </a:solidFill>
+            <a:prstDash val="solid"/>
+          </a:ln>
+        </p:spPr>
+      </p:sp>
+      <p:sp>
+        <p:nvSpPr>
+          <p:cNvPr id="45" name="Text 43"/>
+          <p:cNvSpPr/>
+          <p:nvPr/>
+        </p:nvSpPr>
+        <p:spPr>
+          <a:xfrm>
+            <a:off x="6408638" y="4169664"/>
+            <a:ext cx="685800" cy="475488"/>
+          </a:xfrm>
+          <a:prstGeom prst="rect">
+            <a:avLst/>
+          </a:prstGeom>
+          <a:noFill/>
+          <a:ln/>
+        </p:spPr>
+        <p:txBody>
+          <a:bodyPr wrap="square" lIns="0" tIns="0" rIns="0" bIns="0" rtlCol="0" anchor="ctr"/>
+          <a:lstStyle/>
+          <a:p>
+            <a:pPr algn="ctr" indent="0" marL="0">
+              <a:buNone/>
+            </a:pPr>
+            <a:r>
+              <a:rPr lang="en-US" sz="900" b="1" dirty="0">
+                <a:solidFill>
+                  <a:srgbClr val="9D174D"/>
+                </a:solidFill>
+                <a:latin typeface="Trebuchet MS" pitchFamily="34" charset="0"/>
+                <a:ea typeface="Trebuchet MS" pitchFamily="34" charset="-122"/>
+                <a:cs typeface="Trebuchet MS" pitchFamily="34" charset="-120"/>
+              </a:rPr>
+              <a:t>w</a:t>
+            </a:r>
+            <a:endParaRPr lang="en-US" sz="900" dirty="0"/>
+          </a:p>
+        </p:txBody>
+      </p:sp>
+      <p:sp>
+        <p:nvSpPr>
+          <p:cNvPr id="46" name="Shape 44"/>
+          <p:cNvSpPr/>
+          <p:nvPr/>
+        </p:nvSpPr>
+        <p:spPr>
+          <a:xfrm>
+            <a:off x="7447135" y="4169664"/>
+            <a:ext cx="685800" cy="475488"/>
+          </a:xfrm>
+          <a:prstGeom prst="rect">
+            <a:avLst>
+              <a:gd name="adj" fmla="val 7692"/>
+            </a:avLst>
+          </a:prstGeom>
+          <a:solidFill>
+            <a:srgbClr val="FFFFFF"/>
+          </a:solidFill>
+          <a:ln w="12700">
+            <a:solidFill>
+              <a:srgbClr val="DB2777"/>
+            </a:solidFill>
+            <a:prstDash val="solid"/>
+          </a:ln>
+        </p:spPr>
+      </p:sp>
+      <p:sp>
+        <p:nvSpPr>
+          <p:cNvPr id="47" name="Text 45"/>
+          <p:cNvSpPr/>
+          <p:nvPr/>
+        </p:nvSpPr>
+        <p:spPr>
+          <a:xfrm>
+            <a:off x="7447135" y="4169664"/>
+            <a:ext cx="685800" cy="475488"/>
+          </a:xfrm>
+          <a:prstGeom prst="rect">
+            <a:avLst/>
+          </a:prstGeom>
+          <a:noFill/>
+          <a:ln/>
+        </p:spPr>
+        <p:txBody>
+          <a:bodyPr wrap="square" lIns="0" tIns="0" rIns="0" bIns="0" rtlCol="0" anchor="ctr"/>
+          <a:lstStyle/>
+          <a:p>
+            <a:pPr algn="ctr" indent="0" marL="0">
+              <a:buNone/>
+            </a:pPr>
+            <a:r>
+              <a:rPr lang="en-US" sz="900" b="1" dirty="0">
+                <a:solidFill>
+                  <a:srgbClr val="9D174D"/>
+                </a:solidFill>
+                <a:latin typeface="Trebuchet MS" pitchFamily="34" charset="0"/>
+                <a:ea typeface="Trebuchet MS" pitchFamily="34" charset="-122"/>
+                <a:cs typeface="Trebuchet MS" pitchFamily="34" charset="-120"/>
+              </a:rPr>
+              <a:t>ay</a:t>
             </a:r>
             <a:endParaRPr lang="en-US" sz="900" dirty="0"/>
           </a:p>
@@ -11126,7 +11468,7 @@
                 <a:ea typeface="Trebuchet MS" pitchFamily="34" charset="-122"/>
                 <a:cs typeface="Trebuchet MS" pitchFamily="34" charset="-120"/>
               </a:rPr>
-              <a:t>outrun</a:t>
+              <a:t>runner</a:t>
             </a:r>
             <a:endParaRPr lang="en-US" sz="2800" dirty="0"/>
           </a:p>
@@ -11953,7 +12295,7 @@
                 <a:ea typeface="Trebuchet MS" pitchFamily="34" charset="-122"/>
                 <a:cs typeface="Trebuchet MS" pitchFamily="34" charset="-120"/>
               </a:rPr>
-              <a:t>outrun</a:t>
+              <a:t>runner</a:t>
             </a:r>
             <a:endParaRPr lang="en-US" sz="2800" dirty="0"/>
           </a:p>
@@ -12033,7 +12375,7 @@
         </p:nvSpPr>
         <p:spPr>
           <a:xfrm>
-            <a:off x="2938272" y="2258568"/>
+            <a:off x="2221992" y="2258568"/>
             <a:ext cx="1828800" cy="292608"/>
           </a:xfrm>
           <a:prstGeom prst="rect">
@@ -12042,11 +12384,11 @@
             </a:avLst>
           </a:prstGeom>
           <a:solidFill>
-            <a:srgbClr val="DDD6FE"/>
+            <a:srgbClr val="CCFBF1"/>
           </a:solidFill>
           <a:ln w="19050">
             <a:solidFill>
-              <a:srgbClr val="7C3AED"/>
+              <a:srgbClr val="0D9488"/>
             </a:solidFill>
             <a:prstDash val="solid"/>
           </a:ln>
@@ -12067,7 +12409,7 @@
         </p:nvSpPr>
         <p:spPr>
           <a:xfrm>
-            <a:off x="2938272" y="2258568"/>
+            <a:off x="2221992" y="2258568"/>
             <a:ext cx="1828800" cy="292608"/>
           </a:xfrm>
           <a:prstGeom prst="rect">
@@ -12086,13 +12428,13 @@
             <a:r>
               <a:rPr lang="en-US" sz="1300" b="1" dirty="0">
                 <a:solidFill>
-                  <a:srgbClr val="4C1D95"/>
+                  <a:srgbClr val="0F766E"/>
                 </a:solidFill>
                 <a:latin typeface="Trebuchet MS" pitchFamily="34" charset="0"/>
                 <a:ea typeface="Trebuchet MS" pitchFamily="34" charset="-122"/>
                 <a:cs typeface="Trebuchet MS" pitchFamily="34" charset="-120"/>
               </a:rPr>
-              <a:t>out</a:t>
+              <a:t>run</a:t>
             </a:r>
             <a:endParaRPr lang="en-US" sz="1300" dirty="0"/>
           </a:p>
@@ -12106,7 +12448,7 @@
         </p:nvSpPr>
         <p:spPr>
           <a:xfrm>
-            <a:off x="2938272" y="2569464"/>
+            <a:off x="2221992" y="2569464"/>
             <a:ext cx="1828800" cy="201168"/>
           </a:xfrm>
           <a:prstGeom prst="rect">
@@ -12131,7 +12473,7 @@
                 <a:ea typeface="Calibri" pitchFamily="34" charset="-122"/>
                 <a:cs typeface="Calibri" pitchFamily="34" charset="-120"/>
               </a:rPr>
-              <a:t>beyond or surpassing</a:t>
+              <a:t>to move quickly on foot</a:t>
             </a:r>
             <a:endParaRPr lang="en-US" sz="850" dirty="0"/>
           </a:p>
@@ -12145,7 +12487,7 @@
         </p:nvSpPr>
         <p:spPr>
           <a:xfrm>
-            <a:off x="5803392" y="2258568"/>
+            <a:off x="4370832" y="2258568"/>
             <a:ext cx="1828800" cy="292608"/>
           </a:xfrm>
           <a:prstGeom prst="rect">
@@ -12154,11 +12496,11 @@
             </a:avLst>
           </a:prstGeom>
           <a:solidFill>
-            <a:srgbClr val="CCFBF1"/>
+            <a:srgbClr val="FCE7F3"/>
           </a:solidFill>
           <a:ln w="19050">
             <a:solidFill>
-              <a:srgbClr val="0D9488"/>
+              <a:srgbClr val="DB2777"/>
             </a:solidFill>
             <a:prstDash val="solid"/>
           </a:ln>
@@ -12179,7 +12521,7 @@
         </p:nvSpPr>
         <p:spPr>
           <a:xfrm>
-            <a:off x="5803392" y="2258568"/>
+            <a:off x="4370832" y="2258568"/>
             <a:ext cx="1828800" cy="292608"/>
           </a:xfrm>
           <a:prstGeom prst="rect">
@@ -12198,13 +12540,13 @@
             <a:r>
               <a:rPr lang="en-US" sz="1300" b="1" dirty="0">
                 <a:solidFill>
-                  <a:srgbClr val="0F766E"/>
+                  <a:srgbClr val="9D174D"/>
                 </a:solidFill>
                 <a:latin typeface="Trebuchet MS" pitchFamily="34" charset="0"/>
                 <a:ea typeface="Trebuchet MS" pitchFamily="34" charset="-122"/>
                 <a:cs typeface="Trebuchet MS" pitchFamily="34" charset="-120"/>
               </a:rPr>
-              <a:t>run</a:t>
+              <a:t>n</a:t>
             </a:r>
             <a:endParaRPr lang="en-US" sz="1300" dirty="0"/>
           </a:p>
@@ -12218,7 +12560,7 @@
         </p:nvSpPr>
         <p:spPr>
           <a:xfrm>
-            <a:off x="5803392" y="2569464"/>
+            <a:off x="4370832" y="2569464"/>
             <a:ext cx="1828800" cy="201168"/>
           </a:xfrm>
           <a:prstGeom prst="rect">
@@ -12243,7 +12585,7 @@
                 <a:ea typeface="Calibri" pitchFamily="34" charset="-122"/>
                 <a:cs typeface="Calibri" pitchFamily="34" charset="-120"/>
               </a:rPr>
-              <a:t>to move quickly on foot</a:t>
+              <a:t>doubled consonant before suffix</a:t>
             </a:r>
             <a:endParaRPr lang="en-US" sz="850" dirty="0"/>
           </a:p>
@@ -12251,7 +12593,158 @@
       </p:sp>
       <p:sp>
         <p:nvSpPr>
-          <p:cNvPr id="22" name="Shape 20"/>
+          <p:cNvPr id="22" name="Text 20"/>
+          <p:cNvSpPr/>
+          <p:nvPr/>
+        </p:nvSpPr>
+        <p:spPr>
+          <a:xfrm>
+            <a:off x="4370832" y="2752344"/>
+            <a:ext cx="1828800" cy="182880"/>
+          </a:xfrm>
+          <a:prstGeom prst="rect">
+            <a:avLst/>
+          </a:prstGeom>
+          <a:noFill/>
+          <a:ln/>
+        </p:spPr>
+        <p:txBody>
+          <a:bodyPr wrap="square" lIns="0" tIns="0" rIns="0" bIns="0" rtlCol="0" anchor="t"/>
+          <a:lstStyle/>
+          <a:p>
+            <a:pPr algn="ctr" indent="0" marL="0">
+              <a:buNone/>
+            </a:pPr>
+            <a:r>
+              <a:rPr lang="en-US" sz="700" i="1" dirty="0">
+                <a:solidFill>
+                  <a:srgbClr val="94A3B8"/>
+                </a:solidFill>
+                <a:latin typeface="Calibri" pitchFamily="34" charset="0"/>
+                <a:ea typeface="Calibri" pitchFamily="34" charset="-122"/>
+                <a:cs typeface="Calibri" pitchFamily="34" charset="-120"/>
+              </a:rPr>
+              <a:t>double 'n' before vowel suffix</a:t>
+            </a:r>
+            <a:endParaRPr lang="en-US" sz="700" dirty="0"/>
+          </a:p>
+        </p:txBody>
+      </p:sp>
+      <p:sp>
+        <p:nvSpPr>
+          <p:cNvPr id="23" name="Shape 21"/>
+          <p:cNvSpPr/>
+          <p:nvPr/>
+        </p:nvSpPr>
+        <p:spPr>
+          <a:xfrm>
+            <a:off x="6519672" y="2258568"/>
+            <a:ext cx="1828800" cy="292608"/>
+          </a:xfrm>
+          <a:prstGeom prst="rect">
+            <a:avLst>
+              <a:gd name="adj" fmla="val 25000"/>
+            </a:avLst>
+          </a:prstGeom>
+          <a:solidFill>
+            <a:srgbClr val="FCE7F3"/>
+          </a:solidFill>
+          <a:ln w="19050">
+            <a:solidFill>
+              <a:srgbClr val="DB2777"/>
+            </a:solidFill>
+            <a:prstDash val="solid"/>
+          </a:ln>
+          <a:effectLst>
+            <a:outerShdw sx="100000" sy="100000" kx="0" ky="0" algn="bl" rotWithShape="0" blurRad="101600" dist="38100" dir="8100000">
+              <a:srgbClr val="000000">
+                <a:alpha val="12000"/>
+              </a:srgbClr>
+            </a:outerShdw>
+          </a:effectLst>
+        </p:spPr>
+      </p:sp>
+      <p:sp>
+        <p:nvSpPr>
+          <p:cNvPr id="24" name="Text 22"/>
+          <p:cNvSpPr/>
+          <p:nvPr/>
+        </p:nvSpPr>
+        <p:spPr>
+          <a:xfrm>
+            <a:off x="6519672" y="2258568"/>
+            <a:ext cx="1828800" cy="292608"/>
+          </a:xfrm>
+          <a:prstGeom prst="rect">
+            <a:avLst/>
+          </a:prstGeom>
+          <a:noFill/>
+          <a:ln/>
+        </p:spPr>
+        <p:txBody>
+          <a:bodyPr wrap="square" lIns="0" tIns="0" rIns="0" bIns="0" rtlCol="0" anchor="ctr"/>
+          <a:lstStyle/>
+          <a:p>
+            <a:pPr algn="ctr" indent="0" marL="0">
+              <a:buNone/>
+            </a:pPr>
+            <a:r>
+              <a:rPr lang="en-US" sz="1300" b="1" dirty="0">
+                <a:solidFill>
+                  <a:srgbClr val="9D174D"/>
+                </a:solidFill>
+                <a:latin typeface="Trebuchet MS" pitchFamily="34" charset="0"/>
+                <a:ea typeface="Trebuchet MS" pitchFamily="34" charset="-122"/>
+                <a:cs typeface="Trebuchet MS" pitchFamily="34" charset="-120"/>
+              </a:rPr>
+              <a:t>er</a:t>
+            </a:r>
+            <a:endParaRPr lang="en-US" sz="1300" dirty="0"/>
+          </a:p>
+        </p:txBody>
+      </p:sp>
+      <p:sp>
+        <p:nvSpPr>
+          <p:cNvPr id="25" name="Text 23"/>
+          <p:cNvSpPr/>
+          <p:nvPr/>
+        </p:nvSpPr>
+        <p:spPr>
+          <a:xfrm>
+            <a:off x="6519672" y="2569464"/>
+            <a:ext cx="1828800" cy="201168"/>
+          </a:xfrm>
+          <a:prstGeom prst="rect">
+            <a:avLst/>
+          </a:prstGeom>
+          <a:noFill/>
+          <a:ln/>
+        </p:spPr>
+        <p:txBody>
+          <a:bodyPr wrap="square" lIns="0" tIns="0" rIns="0" bIns="0" rtlCol="0" anchor="t"/>
+          <a:lstStyle/>
+          <a:p>
+            <a:pPr algn="ctr" indent="0" marL="0">
+              <a:buNone/>
+            </a:pPr>
+            <a:r>
+              <a:rPr lang="en-US" sz="850" dirty="0">
+                <a:solidFill>
+                  <a:srgbClr val="475569"/>
+                </a:solidFill>
+                <a:latin typeface="Calibri" pitchFamily="34" charset="0"/>
+                <a:ea typeface="Calibri" pitchFamily="34" charset="-122"/>
+                <a:cs typeface="Calibri" pitchFamily="34" charset="-120"/>
+              </a:rPr>
+              <a:t>one who does something</a:t>
+            </a:r>
+            <a:endParaRPr lang="en-US" sz="850" dirty="0"/>
+          </a:p>
+        </p:txBody>
+      </p:sp>
+      <p:sp>
+        <p:nvSpPr>
+          <p:cNvPr id="26" name="Shape 24"/>
           <p:cNvSpPr/>
           <p:nvPr/>
         </p:nvSpPr>
@@ -12278,7 +12771,7 @@
       </p:sp>
       <p:sp>
         <p:nvSpPr>
-          <p:cNvPr id="23" name="Text 21"/>
+          <p:cNvPr id="27" name="Text 25"/>
           <p:cNvSpPr/>
           <p:nvPr/>
         </p:nvSpPr>
@@ -12317,7 +12810,7 @@
       </p:sp>
       <p:sp>
         <p:nvSpPr>
-          <p:cNvPr id="24" name="Shape 22"/>
+          <p:cNvPr id="28" name="Shape 26"/>
           <p:cNvSpPr/>
           <p:nvPr/>
         </p:nvSpPr>
@@ -12344,7 +12837,7 @@
       </p:sp>
       <p:sp>
         <p:nvSpPr>
-          <p:cNvPr id="25" name="Text 23"/>
+          <p:cNvPr id="29" name="Text 27"/>
           <p:cNvSpPr/>
           <p:nvPr/>
         </p:nvSpPr>
@@ -12383,7 +12876,7 @@
       </p:sp>
       <p:sp>
         <p:nvSpPr>
-          <p:cNvPr id="26" name="Shape 24"/>
+          <p:cNvPr id="30" name="Shape 28"/>
           <p:cNvSpPr/>
           <p:nvPr/>
         </p:nvSpPr>
@@ -12410,7 +12903,7 @@
       </p:sp>
       <p:sp>
         <p:nvSpPr>
-          <p:cNvPr id="27" name="Text 25"/>
+          <p:cNvPr id="31" name="Text 29"/>
           <p:cNvSpPr/>
           <p:nvPr/>
         </p:nvSpPr>
@@ -12449,7 +12942,7 @@
       </p:sp>
       <p:sp>
         <p:nvSpPr>
-          <p:cNvPr id="28" name="Shape 26"/>
+          <p:cNvPr id="32" name="Shape 30"/>
           <p:cNvSpPr/>
           <p:nvPr/>
         </p:nvSpPr>
@@ -12476,7 +12969,7 @@
       </p:sp>
       <p:sp>
         <p:nvSpPr>
-          <p:cNvPr id="29" name="Text 27"/>
+          <p:cNvPr id="33" name="Text 31"/>
           <p:cNvSpPr/>
           <p:nvPr/>
         </p:nvSpPr>
@@ -12938,7 +13431,7 @@
                 <a:ea typeface="Trebuchet MS" pitchFamily="34" charset="-122"/>
                 <a:cs typeface="Trebuchet MS" pitchFamily="34" charset="-120"/>
               </a:rPr>
-              <a:t>outrun</a:t>
+              <a:t>runner</a:t>
             </a:r>
             <a:endParaRPr lang="en-US" sz="2800" dirty="0"/>
           </a:p>
@@ -13018,7 +13511,7 @@
         </p:nvSpPr>
         <p:spPr>
           <a:xfrm>
-            <a:off x="2938272" y="2258568"/>
+            <a:off x="2221992" y="2258568"/>
             <a:ext cx="1828800" cy="292608"/>
           </a:xfrm>
           <a:prstGeom prst="rect">
@@ -13027,11 +13520,11 @@
             </a:avLst>
           </a:prstGeom>
           <a:solidFill>
-            <a:srgbClr val="DDD6FE"/>
+            <a:srgbClr val="CCFBF1"/>
           </a:solidFill>
           <a:ln w="19050">
             <a:solidFill>
-              <a:srgbClr val="7C3AED"/>
+              <a:srgbClr val="0D9488"/>
             </a:solidFill>
             <a:prstDash val="solid"/>
           </a:ln>
@@ -13052,7 +13545,7 @@
         </p:nvSpPr>
         <p:spPr>
           <a:xfrm>
-            <a:off x="2938272" y="2258568"/>
+            <a:off x="2221992" y="2258568"/>
             <a:ext cx="1828800" cy="292608"/>
           </a:xfrm>
           <a:prstGeom prst="rect">
@@ -13071,13 +13564,13 @@
             <a:r>
               <a:rPr lang="en-US" sz="1300" b="1" dirty="0">
                 <a:solidFill>
-                  <a:srgbClr val="4C1D95"/>
+                  <a:srgbClr val="0F766E"/>
                 </a:solidFill>
                 <a:latin typeface="Trebuchet MS" pitchFamily="34" charset="0"/>
                 <a:ea typeface="Trebuchet MS" pitchFamily="34" charset="-122"/>
                 <a:cs typeface="Trebuchet MS" pitchFamily="34" charset="-120"/>
               </a:rPr>
-              <a:t>out</a:t>
+              <a:t>run</a:t>
             </a:r>
             <a:endParaRPr lang="en-US" sz="1300" dirty="0"/>
           </a:p>
@@ -13091,7 +13584,7 @@
         </p:nvSpPr>
         <p:spPr>
           <a:xfrm>
-            <a:off x="2938272" y="2569464"/>
+            <a:off x="2221992" y="2569464"/>
             <a:ext cx="1828800" cy="201168"/>
           </a:xfrm>
           <a:prstGeom prst="rect">
@@ -13116,7 +13609,7 @@
                 <a:ea typeface="Calibri" pitchFamily="34" charset="-122"/>
                 <a:cs typeface="Calibri" pitchFamily="34" charset="-120"/>
               </a:rPr>
-              <a:t>beyond or surpassing</a:t>
+              <a:t>to move quickly on foot</a:t>
             </a:r>
             <a:endParaRPr lang="en-US" sz="850" dirty="0"/>
           </a:p>
@@ -13130,7 +13623,7 @@
         </p:nvSpPr>
         <p:spPr>
           <a:xfrm>
-            <a:off x="5803392" y="2258568"/>
+            <a:off x="4370832" y="2258568"/>
             <a:ext cx="1828800" cy="292608"/>
           </a:xfrm>
           <a:prstGeom prst="rect">
@@ -13139,11 +13632,11 @@
             </a:avLst>
           </a:prstGeom>
           <a:solidFill>
-            <a:srgbClr val="CCFBF1"/>
+            <a:srgbClr val="FCE7F3"/>
           </a:solidFill>
           <a:ln w="19050">
             <a:solidFill>
-              <a:srgbClr val="0D9488"/>
+              <a:srgbClr val="DB2777"/>
             </a:solidFill>
             <a:prstDash val="solid"/>
           </a:ln>
@@ -13164,7 +13657,7 @@
         </p:nvSpPr>
         <p:spPr>
           <a:xfrm>
-            <a:off x="5803392" y="2258568"/>
+            <a:off x="4370832" y="2258568"/>
             <a:ext cx="1828800" cy="292608"/>
           </a:xfrm>
           <a:prstGeom prst="rect">
@@ -13183,13 +13676,13 @@
             <a:r>
               <a:rPr lang="en-US" sz="1300" b="1" dirty="0">
                 <a:solidFill>
-                  <a:srgbClr val="0F766E"/>
+                  <a:srgbClr val="9D174D"/>
                 </a:solidFill>
                 <a:latin typeface="Trebuchet MS" pitchFamily="34" charset="0"/>
                 <a:ea typeface="Trebuchet MS" pitchFamily="34" charset="-122"/>
                 <a:cs typeface="Trebuchet MS" pitchFamily="34" charset="-120"/>
               </a:rPr>
-              <a:t>run</a:t>
+              <a:t>n</a:t>
             </a:r>
             <a:endParaRPr lang="en-US" sz="1300" dirty="0"/>
           </a:p>
@@ -13203,7 +13696,7 @@
         </p:nvSpPr>
         <p:spPr>
           <a:xfrm>
-            <a:off x="5803392" y="2569464"/>
+            <a:off x="4370832" y="2569464"/>
             <a:ext cx="1828800" cy="201168"/>
           </a:xfrm>
           <a:prstGeom prst="rect">
@@ -13228,7 +13721,7 @@
                 <a:ea typeface="Calibri" pitchFamily="34" charset="-122"/>
                 <a:cs typeface="Calibri" pitchFamily="34" charset="-120"/>
               </a:rPr>
-              <a:t>to move quickly on foot</a:t>
+              <a:t>doubled consonant before suffix</a:t>
             </a:r>
             <a:endParaRPr lang="en-US" sz="850" dirty="0"/>
           </a:p>
@@ -13236,7 +13729,158 @@
       </p:sp>
       <p:sp>
         <p:nvSpPr>
-          <p:cNvPr id="22" name="Shape 20"/>
+          <p:cNvPr id="22" name="Text 20"/>
+          <p:cNvSpPr/>
+          <p:nvPr/>
+        </p:nvSpPr>
+        <p:spPr>
+          <a:xfrm>
+            <a:off x="4370832" y="2752344"/>
+            <a:ext cx="1828800" cy="182880"/>
+          </a:xfrm>
+          <a:prstGeom prst="rect">
+            <a:avLst/>
+          </a:prstGeom>
+          <a:noFill/>
+          <a:ln/>
+        </p:spPr>
+        <p:txBody>
+          <a:bodyPr wrap="square" lIns="0" tIns="0" rIns="0" bIns="0" rtlCol="0" anchor="t"/>
+          <a:lstStyle/>
+          <a:p>
+            <a:pPr algn="ctr" indent="0" marL="0">
+              <a:buNone/>
+            </a:pPr>
+            <a:r>
+              <a:rPr lang="en-US" sz="700" i="1" dirty="0">
+                <a:solidFill>
+                  <a:srgbClr val="94A3B8"/>
+                </a:solidFill>
+                <a:latin typeface="Calibri" pitchFamily="34" charset="0"/>
+                <a:ea typeface="Calibri" pitchFamily="34" charset="-122"/>
+                <a:cs typeface="Calibri" pitchFamily="34" charset="-120"/>
+              </a:rPr>
+              <a:t>double 'n' before vowel suffix</a:t>
+            </a:r>
+            <a:endParaRPr lang="en-US" sz="700" dirty="0"/>
+          </a:p>
+        </p:txBody>
+      </p:sp>
+      <p:sp>
+        <p:nvSpPr>
+          <p:cNvPr id="23" name="Shape 21"/>
+          <p:cNvSpPr/>
+          <p:nvPr/>
+        </p:nvSpPr>
+        <p:spPr>
+          <a:xfrm>
+            <a:off x="6519672" y="2258568"/>
+            <a:ext cx="1828800" cy="292608"/>
+          </a:xfrm>
+          <a:prstGeom prst="rect">
+            <a:avLst>
+              <a:gd name="adj" fmla="val 25000"/>
+            </a:avLst>
+          </a:prstGeom>
+          <a:solidFill>
+            <a:srgbClr val="FCE7F3"/>
+          </a:solidFill>
+          <a:ln w="19050">
+            <a:solidFill>
+              <a:srgbClr val="DB2777"/>
+            </a:solidFill>
+            <a:prstDash val="solid"/>
+          </a:ln>
+          <a:effectLst>
+            <a:outerShdw sx="100000" sy="100000" kx="0" ky="0" algn="bl" rotWithShape="0" blurRad="101600" dist="38100" dir="8100000">
+              <a:srgbClr val="000000">
+                <a:alpha val="12000"/>
+              </a:srgbClr>
+            </a:outerShdw>
+          </a:effectLst>
+        </p:spPr>
+      </p:sp>
+      <p:sp>
+        <p:nvSpPr>
+          <p:cNvPr id="24" name="Text 22"/>
+          <p:cNvSpPr/>
+          <p:nvPr/>
+        </p:nvSpPr>
+        <p:spPr>
+          <a:xfrm>
+            <a:off x="6519672" y="2258568"/>
+            <a:ext cx="1828800" cy="292608"/>
+          </a:xfrm>
+          <a:prstGeom prst="rect">
+            <a:avLst/>
+          </a:prstGeom>
+          <a:noFill/>
+          <a:ln/>
+        </p:spPr>
+        <p:txBody>
+          <a:bodyPr wrap="square" lIns="0" tIns="0" rIns="0" bIns="0" rtlCol="0" anchor="ctr"/>
+          <a:lstStyle/>
+          <a:p>
+            <a:pPr algn="ctr" indent="0" marL="0">
+              <a:buNone/>
+            </a:pPr>
+            <a:r>
+              <a:rPr lang="en-US" sz="1300" b="1" dirty="0">
+                <a:solidFill>
+                  <a:srgbClr val="9D174D"/>
+                </a:solidFill>
+                <a:latin typeface="Trebuchet MS" pitchFamily="34" charset="0"/>
+                <a:ea typeface="Trebuchet MS" pitchFamily="34" charset="-122"/>
+                <a:cs typeface="Trebuchet MS" pitchFamily="34" charset="-120"/>
+              </a:rPr>
+              <a:t>er</a:t>
+            </a:r>
+            <a:endParaRPr lang="en-US" sz="1300" dirty="0"/>
+          </a:p>
+        </p:txBody>
+      </p:sp>
+      <p:sp>
+        <p:nvSpPr>
+          <p:cNvPr id="25" name="Text 23"/>
+          <p:cNvSpPr/>
+          <p:nvPr/>
+        </p:nvSpPr>
+        <p:spPr>
+          <a:xfrm>
+            <a:off x="6519672" y="2569464"/>
+            <a:ext cx="1828800" cy="201168"/>
+          </a:xfrm>
+          <a:prstGeom prst="rect">
+            <a:avLst/>
+          </a:prstGeom>
+          <a:noFill/>
+          <a:ln/>
+        </p:spPr>
+        <p:txBody>
+          <a:bodyPr wrap="square" lIns="0" tIns="0" rIns="0" bIns="0" rtlCol="0" anchor="t"/>
+          <a:lstStyle/>
+          <a:p>
+            <a:pPr algn="ctr" indent="0" marL="0">
+              <a:buNone/>
+            </a:pPr>
+            <a:r>
+              <a:rPr lang="en-US" sz="850" dirty="0">
+                <a:solidFill>
+                  <a:srgbClr val="475569"/>
+                </a:solidFill>
+                <a:latin typeface="Calibri" pitchFamily="34" charset="0"/>
+                <a:ea typeface="Calibri" pitchFamily="34" charset="-122"/>
+                <a:cs typeface="Calibri" pitchFamily="34" charset="-120"/>
+              </a:rPr>
+              <a:t>one who does something</a:t>
+            </a:r>
+            <a:endParaRPr lang="en-US" sz="850" dirty="0"/>
+          </a:p>
+        </p:txBody>
+      </p:sp>
+      <p:sp>
+        <p:nvSpPr>
+          <p:cNvPr id="26" name="Shape 24"/>
           <p:cNvSpPr/>
           <p:nvPr/>
         </p:nvSpPr>
@@ -13263,7 +13907,7 @@
       </p:sp>
       <p:sp>
         <p:nvSpPr>
-          <p:cNvPr id="23" name="Text 21"/>
+          <p:cNvPr id="27" name="Text 25"/>
           <p:cNvSpPr/>
           <p:nvPr/>
         </p:nvSpPr>
@@ -13302,7 +13946,7 @@
       </p:sp>
       <p:sp>
         <p:nvSpPr>
-          <p:cNvPr id="24" name="Shape 22"/>
+          <p:cNvPr id="28" name="Shape 26"/>
           <p:cNvSpPr/>
           <p:nvPr/>
         </p:nvSpPr>
@@ -13329,7 +13973,7 @@
       </p:sp>
       <p:sp>
         <p:nvSpPr>
-          <p:cNvPr id="25" name="Shape 23"/>
+          <p:cNvPr id="29" name="Shape 27"/>
           <p:cNvSpPr/>
           <p:nvPr/>
         </p:nvSpPr>
@@ -13356,7 +14000,7 @@
       </p:sp>
       <p:sp>
         <p:nvSpPr>
-          <p:cNvPr id="26" name="Text 24"/>
+          <p:cNvPr id="30" name="Text 28"/>
           <p:cNvSpPr/>
           <p:nvPr/>
         </p:nvSpPr>
@@ -13387,7 +14031,7 @@
                 <a:ea typeface="Trebuchet MS" pitchFamily="34" charset="-122"/>
                 <a:cs typeface="Trebuchet MS" pitchFamily="34" charset="-120"/>
               </a:rPr>
-              <a:t>out</a:t>
+              <a:t>run</a:t>
             </a:r>
             <a:endParaRPr lang="en-US" sz="1400" dirty="0"/>
           </a:p>
@@ -13395,7 +14039,7 @@
       </p:sp>
       <p:sp>
         <p:nvSpPr>
-          <p:cNvPr id="27" name="Text 25"/>
+          <p:cNvPr id="31" name="Text 29"/>
           <p:cNvSpPr/>
           <p:nvPr/>
         </p:nvSpPr>
@@ -13434,7 +14078,7 @@
       </p:sp>
       <p:sp>
         <p:nvSpPr>
-          <p:cNvPr id="28" name="Shape 26"/>
+          <p:cNvPr id="32" name="Shape 30"/>
           <p:cNvSpPr/>
           <p:nvPr/>
         </p:nvSpPr>
@@ -13461,7 +14105,7 @@
       </p:sp>
       <p:sp>
         <p:nvSpPr>
-          <p:cNvPr id="29" name="Text 27"/>
+          <p:cNvPr id="33" name="Text 31"/>
           <p:cNvSpPr/>
           <p:nvPr/>
         </p:nvSpPr>
@@ -13492,7 +14136,7 @@
                 <a:ea typeface="Trebuchet MS" pitchFamily="34" charset="-122"/>
                 <a:cs typeface="Trebuchet MS" pitchFamily="34" charset="-120"/>
               </a:rPr>
-              <a:t>run</a:t>
+              <a:t>ner</a:t>
             </a:r>
             <a:endParaRPr lang="en-US" sz="1400" dirty="0"/>
           </a:p>
@@ -13500,7 +14144,7 @@
       </p:sp>
       <p:sp>
         <p:nvSpPr>
-          <p:cNvPr id="30" name="Shape 28"/>
+          <p:cNvPr id="34" name="Shape 32"/>
           <p:cNvSpPr/>
           <p:nvPr/>
         </p:nvSpPr>
@@ -13527,7 +14171,7 @@
       </p:sp>
       <p:sp>
         <p:nvSpPr>
-          <p:cNvPr id="31" name="Text 29"/>
+          <p:cNvPr id="35" name="Text 33"/>
           <p:cNvSpPr/>
           <p:nvPr/>
         </p:nvSpPr>
@@ -13566,7 +14210,7 @@
       </p:sp>
       <p:sp>
         <p:nvSpPr>
-          <p:cNvPr id="32" name="Shape 30"/>
+          <p:cNvPr id="36" name="Shape 34"/>
           <p:cNvSpPr/>
           <p:nvPr/>
         </p:nvSpPr>
@@ -13593,7 +14237,7 @@
       </p:sp>
       <p:sp>
         <p:nvSpPr>
-          <p:cNvPr id="33" name="Text 31"/>
+          <p:cNvPr id="37" name="Text 35"/>
           <p:cNvSpPr/>
           <p:nvPr/>
         </p:nvSpPr>
@@ -14320,7 +14964,7 @@
                 <a:ea typeface="Trebuchet MS" pitchFamily="34" charset="-122"/>
                 <a:cs typeface="Trebuchet MS" pitchFamily="34" charset="-120"/>
               </a:rPr>
-              <a:t>outrun</a:t>
+              <a:t>runner</a:t>
             </a:r>
             <a:endParaRPr lang="en-US" sz="2800" dirty="0"/>
           </a:p>
@@ -14400,7 +15044,7 @@
         </p:nvSpPr>
         <p:spPr>
           <a:xfrm>
-            <a:off x="2938272" y="2258568"/>
+            <a:off x="2221992" y="2258568"/>
             <a:ext cx="1828800" cy="292608"/>
           </a:xfrm>
           <a:prstGeom prst="rect">
@@ -14409,11 +15053,11 @@
             </a:avLst>
           </a:prstGeom>
           <a:solidFill>
-            <a:srgbClr val="DDD6FE"/>
+            <a:srgbClr val="CCFBF1"/>
           </a:solidFill>
           <a:ln w="19050">
             <a:solidFill>
-              <a:srgbClr val="7C3AED"/>
+              <a:srgbClr val="0D9488"/>
             </a:solidFill>
             <a:prstDash val="solid"/>
           </a:ln>
@@ -14434,7 +15078,7 @@
         </p:nvSpPr>
         <p:spPr>
           <a:xfrm>
-            <a:off x="2938272" y="2258568"/>
+            <a:off x="2221992" y="2258568"/>
             <a:ext cx="1828800" cy="292608"/>
           </a:xfrm>
           <a:prstGeom prst="rect">
@@ -14453,13 +15097,13 @@
             <a:r>
               <a:rPr lang="en-US" sz="1300" b="1" dirty="0">
                 <a:solidFill>
-                  <a:srgbClr val="4C1D95"/>
+                  <a:srgbClr val="0F766E"/>
                 </a:solidFill>
                 <a:latin typeface="Trebuchet MS" pitchFamily="34" charset="0"/>
                 <a:ea typeface="Trebuchet MS" pitchFamily="34" charset="-122"/>
                 <a:cs typeface="Trebuchet MS" pitchFamily="34" charset="-120"/>
               </a:rPr>
-              <a:t>out</a:t>
+              <a:t>run</a:t>
             </a:r>
             <a:endParaRPr lang="en-US" sz="1300" dirty="0"/>
           </a:p>
@@ -14473,7 +15117,7 @@
         </p:nvSpPr>
         <p:spPr>
           <a:xfrm>
-            <a:off x="2938272" y="2569464"/>
+            <a:off x="2221992" y="2569464"/>
             <a:ext cx="1828800" cy="201168"/>
           </a:xfrm>
           <a:prstGeom prst="rect">
@@ -14498,7 +15142,7 @@
                 <a:ea typeface="Calibri" pitchFamily="34" charset="-122"/>
                 <a:cs typeface="Calibri" pitchFamily="34" charset="-120"/>
               </a:rPr>
-              <a:t>beyond or surpassing</a:t>
+              <a:t>to move quickly on foot</a:t>
             </a:r>
             <a:endParaRPr lang="en-US" sz="850" dirty="0"/>
           </a:p>
@@ -14512,7 +15156,7 @@
         </p:nvSpPr>
         <p:spPr>
           <a:xfrm>
-            <a:off x="5803392" y="2258568"/>
+            <a:off x="4370832" y="2258568"/>
             <a:ext cx="1828800" cy="292608"/>
           </a:xfrm>
           <a:prstGeom prst="rect">
@@ -14521,11 +15165,11 @@
             </a:avLst>
           </a:prstGeom>
           <a:solidFill>
-            <a:srgbClr val="CCFBF1"/>
+            <a:srgbClr val="FCE7F3"/>
           </a:solidFill>
           <a:ln w="19050">
             <a:solidFill>
-              <a:srgbClr val="0D9488"/>
+              <a:srgbClr val="DB2777"/>
             </a:solidFill>
             <a:prstDash val="solid"/>
           </a:ln>
@@ -14546,7 +15190,7 @@
         </p:nvSpPr>
         <p:spPr>
           <a:xfrm>
-            <a:off x="5803392" y="2258568"/>
+            <a:off x="4370832" y="2258568"/>
             <a:ext cx="1828800" cy="292608"/>
           </a:xfrm>
           <a:prstGeom prst="rect">
@@ -14565,13 +15209,13 @@
             <a:r>
               <a:rPr lang="en-US" sz="1300" b="1" dirty="0">
                 <a:solidFill>
-                  <a:srgbClr val="0F766E"/>
+                  <a:srgbClr val="9D174D"/>
                 </a:solidFill>
                 <a:latin typeface="Trebuchet MS" pitchFamily="34" charset="0"/>
                 <a:ea typeface="Trebuchet MS" pitchFamily="34" charset="-122"/>
                 <a:cs typeface="Trebuchet MS" pitchFamily="34" charset="-120"/>
               </a:rPr>
-              <a:t>run</a:t>
+              <a:t>n</a:t>
             </a:r>
             <a:endParaRPr lang="en-US" sz="1300" dirty="0"/>
           </a:p>
@@ -14585,7 +15229,7 @@
         </p:nvSpPr>
         <p:spPr>
           <a:xfrm>
-            <a:off x="5803392" y="2569464"/>
+            <a:off x="4370832" y="2569464"/>
             <a:ext cx="1828800" cy="201168"/>
           </a:xfrm>
           <a:prstGeom prst="rect">
@@ -14610,7 +15254,7 @@
                 <a:ea typeface="Calibri" pitchFamily="34" charset="-122"/>
                 <a:cs typeface="Calibri" pitchFamily="34" charset="-120"/>
               </a:rPr>
-              <a:t>to move quickly on foot</a:t>
+              <a:t>doubled consonant before suffix</a:t>
             </a:r>
             <a:endParaRPr lang="en-US" sz="850" dirty="0"/>
           </a:p>
@@ -14618,7 +15262,158 @@
       </p:sp>
       <p:sp>
         <p:nvSpPr>
-          <p:cNvPr id="22" name="Shape 20"/>
+          <p:cNvPr id="22" name="Text 20"/>
+          <p:cNvSpPr/>
+          <p:nvPr/>
+        </p:nvSpPr>
+        <p:spPr>
+          <a:xfrm>
+            <a:off x="4370832" y="2752344"/>
+            <a:ext cx="1828800" cy="182880"/>
+          </a:xfrm>
+          <a:prstGeom prst="rect">
+            <a:avLst/>
+          </a:prstGeom>
+          <a:noFill/>
+          <a:ln/>
+        </p:spPr>
+        <p:txBody>
+          <a:bodyPr wrap="square" lIns="0" tIns="0" rIns="0" bIns="0" rtlCol="0" anchor="t"/>
+          <a:lstStyle/>
+          <a:p>
+            <a:pPr algn="ctr" indent="0" marL="0">
+              <a:buNone/>
+            </a:pPr>
+            <a:r>
+              <a:rPr lang="en-US" sz="700" i="1" dirty="0">
+                <a:solidFill>
+                  <a:srgbClr val="94A3B8"/>
+                </a:solidFill>
+                <a:latin typeface="Calibri" pitchFamily="34" charset="0"/>
+                <a:ea typeface="Calibri" pitchFamily="34" charset="-122"/>
+                <a:cs typeface="Calibri" pitchFamily="34" charset="-120"/>
+              </a:rPr>
+              <a:t>double 'n' before vowel suffix</a:t>
+            </a:r>
+            <a:endParaRPr lang="en-US" sz="700" dirty="0"/>
+          </a:p>
+        </p:txBody>
+      </p:sp>
+      <p:sp>
+        <p:nvSpPr>
+          <p:cNvPr id="23" name="Shape 21"/>
+          <p:cNvSpPr/>
+          <p:nvPr/>
+        </p:nvSpPr>
+        <p:spPr>
+          <a:xfrm>
+            <a:off x="6519672" y="2258568"/>
+            <a:ext cx="1828800" cy="292608"/>
+          </a:xfrm>
+          <a:prstGeom prst="rect">
+            <a:avLst>
+              <a:gd name="adj" fmla="val 25000"/>
+            </a:avLst>
+          </a:prstGeom>
+          <a:solidFill>
+            <a:srgbClr val="FCE7F3"/>
+          </a:solidFill>
+          <a:ln w="19050">
+            <a:solidFill>
+              <a:srgbClr val="DB2777"/>
+            </a:solidFill>
+            <a:prstDash val="solid"/>
+          </a:ln>
+          <a:effectLst>
+            <a:outerShdw sx="100000" sy="100000" kx="0" ky="0" algn="bl" rotWithShape="0" blurRad="101600" dist="38100" dir="8100000">
+              <a:srgbClr val="000000">
+                <a:alpha val="12000"/>
+              </a:srgbClr>
+            </a:outerShdw>
+          </a:effectLst>
+        </p:spPr>
+      </p:sp>
+      <p:sp>
+        <p:nvSpPr>
+          <p:cNvPr id="24" name="Text 22"/>
+          <p:cNvSpPr/>
+          <p:nvPr/>
+        </p:nvSpPr>
+        <p:spPr>
+          <a:xfrm>
+            <a:off x="6519672" y="2258568"/>
+            <a:ext cx="1828800" cy="292608"/>
+          </a:xfrm>
+          <a:prstGeom prst="rect">
+            <a:avLst/>
+          </a:prstGeom>
+          <a:noFill/>
+          <a:ln/>
+        </p:spPr>
+        <p:txBody>
+          <a:bodyPr wrap="square" lIns="0" tIns="0" rIns="0" bIns="0" rtlCol="0" anchor="ctr"/>
+          <a:lstStyle/>
+          <a:p>
+            <a:pPr algn="ctr" indent="0" marL="0">
+              <a:buNone/>
+            </a:pPr>
+            <a:r>
+              <a:rPr lang="en-US" sz="1300" b="1" dirty="0">
+                <a:solidFill>
+                  <a:srgbClr val="9D174D"/>
+                </a:solidFill>
+                <a:latin typeface="Trebuchet MS" pitchFamily="34" charset="0"/>
+                <a:ea typeface="Trebuchet MS" pitchFamily="34" charset="-122"/>
+                <a:cs typeface="Trebuchet MS" pitchFamily="34" charset="-120"/>
+              </a:rPr>
+              <a:t>er</a:t>
+            </a:r>
+            <a:endParaRPr lang="en-US" sz="1300" dirty="0"/>
+          </a:p>
+        </p:txBody>
+      </p:sp>
+      <p:sp>
+        <p:nvSpPr>
+          <p:cNvPr id="25" name="Text 23"/>
+          <p:cNvSpPr/>
+          <p:nvPr/>
+        </p:nvSpPr>
+        <p:spPr>
+          <a:xfrm>
+            <a:off x="6519672" y="2569464"/>
+            <a:ext cx="1828800" cy="201168"/>
+          </a:xfrm>
+          <a:prstGeom prst="rect">
+            <a:avLst/>
+          </a:prstGeom>
+          <a:noFill/>
+          <a:ln/>
+        </p:spPr>
+        <p:txBody>
+          <a:bodyPr wrap="square" lIns="0" tIns="0" rIns="0" bIns="0" rtlCol="0" anchor="t"/>
+          <a:lstStyle/>
+          <a:p>
+            <a:pPr algn="ctr" indent="0" marL="0">
+              <a:buNone/>
+            </a:pPr>
+            <a:r>
+              <a:rPr lang="en-US" sz="850" dirty="0">
+                <a:solidFill>
+                  <a:srgbClr val="475569"/>
+                </a:solidFill>
+                <a:latin typeface="Calibri" pitchFamily="34" charset="0"/>
+                <a:ea typeface="Calibri" pitchFamily="34" charset="-122"/>
+                <a:cs typeface="Calibri" pitchFamily="34" charset="-120"/>
+              </a:rPr>
+              <a:t>one who does something</a:t>
+            </a:r>
+            <a:endParaRPr lang="en-US" sz="850" dirty="0"/>
+          </a:p>
+        </p:txBody>
+      </p:sp>
+      <p:sp>
+        <p:nvSpPr>
+          <p:cNvPr id="26" name="Shape 24"/>
           <p:cNvSpPr/>
           <p:nvPr/>
         </p:nvSpPr>
@@ -14645,7 +15440,7 @@
       </p:sp>
       <p:sp>
         <p:nvSpPr>
-          <p:cNvPr id="23" name="Text 21"/>
+          <p:cNvPr id="27" name="Text 25"/>
           <p:cNvSpPr/>
           <p:nvPr/>
         </p:nvSpPr>
@@ -14684,7 +15479,7 @@
       </p:sp>
       <p:sp>
         <p:nvSpPr>
-          <p:cNvPr id="24" name="Shape 22"/>
+          <p:cNvPr id="28" name="Shape 26"/>
           <p:cNvSpPr/>
           <p:nvPr/>
         </p:nvSpPr>
@@ -14711,7 +15506,7 @@
       </p:sp>
       <p:sp>
         <p:nvSpPr>
-          <p:cNvPr id="25" name="Shape 23"/>
+          <p:cNvPr id="29" name="Shape 27"/>
           <p:cNvSpPr/>
           <p:nvPr/>
         </p:nvSpPr>
@@ -14738,7 +15533,7 @@
       </p:sp>
       <p:sp>
         <p:nvSpPr>
-          <p:cNvPr id="26" name="Text 24"/>
+          <p:cNvPr id="30" name="Text 28"/>
           <p:cNvSpPr/>
           <p:nvPr/>
         </p:nvSpPr>
@@ -14769,7 +15564,7 @@
                 <a:ea typeface="Trebuchet MS" pitchFamily="34" charset="-122"/>
                 <a:cs typeface="Trebuchet MS" pitchFamily="34" charset="-120"/>
               </a:rPr>
-              <a:t>out</a:t>
+              <a:t>run</a:t>
             </a:r>
             <a:endParaRPr lang="en-US" sz="1400" dirty="0"/>
           </a:p>
@@ -14777,7 +15572,7 @@
       </p:sp>
       <p:sp>
         <p:nvSpPr>
-          <p:cNvPr id="27" name="Text 25"/>
+          <p:cNvPr id="31" name="Text 29"/>
           <p:cNvSpPr/>
           <p:nvPr/>
         </p:nvSpPr>
@@ -14816,7 +15611,7 @@
       </p:sp>
       <p:sp>
         <p:nvSpPr>
-          <p:cNvPr id="28" name="Shape 26"/>
+          <p:cNvPr id="32" name="Shape 30"/>
           <p:cNvSpPr/>
           <p:nvPr/>
         </p:nvSpPr>
@@ -14843,7 +15638,7 @@
       </p:sp>
       <p:sp>
         <p:nvSpPr>
-          <p:cNvPr id="29" name="Text 27"/>
+          <p:cNvPr id="33" name="Text 31"/>
           <p:cNvSpPr/>
           <p:nvPr/>
         </p:nvSpPr>
@@ -14874,7 +15669,7 @@
                 <a:ea typeface="Trebuchet MS" pitchFamily="34" charset="-122"/>
                 <a:cs typeface="Trebuchet MS" pitchFamily="34" charset="-120"/>
               </a:rPr>
-              <a:t>run</a:t>
+              <a:t>ner</a:t>
             </a:r>
             <a:endParaRPr lang="en-US" sz="1400" dirty="0"/>
           </a:p>
@@ -14882,7 +15677,7 @@
       </p:sp>
       <p:sp>
         <p:nvSpPr>
-          <p:cNvPr id="30" name="Shape 28"/>
+          <p:cNvPr id="34" name="Shape 32"/>
           <p:cNvSpPr/>
           <p:nvPr/>
         </p:nvSpPr>
@@ -14909,7 +15704,7 @@
       </p:sp>
       <p:sp>
         <p:nvSpPr>
-          <p:cNvPr id="31" name="Text 29"/>
+          <p:cNvPr id="35" name="Text 33"/>
           <p:cNvSpPr/>
           <p:nvPr/>
         </p:nvSpPr>
@@ -14948,7 +15743,7 @@
       </p:sp>
       <p:sp>
         <p:nvSpPr>
-          <p:cNvPr id="32" name="Shape 30"/>
+          <p:cNvPr id="36" name="Shape 34"/>
           <p:cNvSpPr/>
           <p:nvPr/>
         </p:nvSpPr>
@@ -14975,13 +15770,13 @@
       </p:sp>
       <p:sp>
         <p:nvSpPr>
-          <p:cNvPr id="33" name="Shape 31"/>
-          <p:cNvSpPr/>
-          <p:nvPr/>
-        </p:nvSpPr>
-        <p:spPr>
-          <a:xfrm>
-            <a:off x="2427732" y="4169664"/>
+          <p:cNvPr id="37" name="Shape 35"/>
+          <p:cNvSpPr/>
+          <p:nvPr/>
+        </p:nvSpPr>
+        <p:spPr>
+          <a:xfrm>
+            <a:off x="2670048" y="4169664"/>
             <a:ext cx="685800" cy="475488"/>
           </a:xfrm>
           <a:prstGeom prst="rect">
@@ -15002,13 +15797,13 @@
       </p:sp>
       <p:sp>
         <p:nvSpPr>
-          <p:cNvPr id="34" name="Text 32"/>
-          <p:cNvSpPr/>
-          <p:nvPr/>
-        </p:nvSpPr>
-        <p:spPr>
-          <a:xfrm>
-            <a:off x="2427732" y="4169664"/>
+          <p:cNvPr id="38" name="Text 36"/>
+          <p:cNvSpPr/>
+          <p:nvPr/>
+        </p:nvSpPr>
+        <p:spPr>
+          <a:xfrm>
+            <a:off x="2670048" y="4169664"/>
             <a:ext cx="685800" cy="475488"/>
           </a:xfrm>
           <a:prstGeom prst="rect">
@@ -15033,7 +15828,7 @@
                 <a:ea typeface="Trebuchet MS" pitchFamily="34" charset="-122"/>
                 <a:cs typeface="Trebuchet MS" pitchFamily="34" charset="-120"/>
               </a:rPr>
-              <a:t>ou</a:t>
+              <a:t>r</a:t>
             </a:r>
             <a:endParaRPr lang="en-US" sz="900" dirty="0"/>
           </a:p>
@@ -15041,13 +15836,13 @@
       </p:sp>
       <p:sp>
         <p:nvSpPr>
-          <p:cNvPr id="35" name="Shape 33"/>
-          <p:cNvSpPr/>
-          <p:nvPr/>
-        </p:nvSpPr>
-        <p:spPr>
-          <a:xfrm>
-            <a:off x="3639312" y="4169664"/>
+          <p:cNvPr id="39" name="Shape 37"/>
+          <p:cNvSpPr/>
+          <p:nvPr/>
+        </p:nvSpPr>
+        <p:spPr>
+          <a:xfrm>
+            <a:off x="4123944" y="4169664"/>
             <a:ext cx="685800" cy="475488"/>
           </a:xfrm>
           <a:prstGeom prst="rect">
@@ -15068,13 +15863,13 @@
       </p:sp>
       <p:sp>
         <p:nvSpPr>
-          <p:cNvPr id="36" name="Text 34"/>
-          <p:cNvSpPr/>
-          <p:nvPr/>
-        </p:nvSpPr>
-        <p:spPr>
-          <a:xfrm>
-            <a:off x="3639312" y="4169664"/>
+          <p:cNvPr id="40" name="Text 38"/>
+          <p:cNvSpPr/>
+          <p:nvPr/>
+        </p:nvSpPr>
+        <p:spPr>
+          <a:xfrm>
+            <a:off x="4123944" y="4169664"/>
             <a:ext cx="685800" cy="475488"/>
           </a:xfrm>
           <a:prstGeom prst="rect">
@@ -15099,7 +15894,7 @@
                 <a:ea typeface="Trebuchet MS" pitchFamily="34" charset="-122"/>
                 <a:cs typeface="Trebuchet MS" pitchFamily="34" charset="-120"/>
               </a:rPr>
-              <a:t>t</a:t>
+              <a:t>u</a:t>
             </a:r>
             <a:endParaRPr lang="en-US" sz="900" dirty="0"/>
           </a:p>
@@ -15107,13 +15902,13 @@
       </p:sp>
       <p:sp>
         <p:nvSpPr>
-          <p:cNvPr id="37" name="Shape 35"/>
-          <p:cNvSpPr/>
-          <p:nvPr/>
-        </p:nvSpPr>
-        <p:spPr>
-          <a:xfrm>
-            <a:off x="4850892" y="4169664"/>
+          <p:cNvPr id="41" name="Shape 39"/>
+          <p:cNvSpPr/>
+          <p:nvPr/>
+        </p:nvSpPr>
+        <p:spPr>
+          <a:xfrm>
+            <a:off x="5577840" y="4169664"/>
             <a:ext cx="685800" cy="475488"/>
           </a:xfrm>
           <a:prstGeom prst="rect">
@@ -15134,13 +15929,13 @@
       </p:sp>
       <p:sp>
         <p:nvSpPr>
-          <p:cNvPr id="38" name="Text 36"/>
-          <p:cNvSpPr/>
-          <p:nvPr/>
-        </p:nvSpPr>
-        <p:spPr>
-          <a:xfrm>
-            <a:off x="4850892" y="4169664"/>
+          <p:cNvPr id="42" name="Text 40"/>
+          <p:cNvSpPr/>
+          <p:nvPr/>
+        </p:nvSpPr>
+        <p:spPr>
+          <a:xfrm>
+            <a:off x="5577840" y="4169664"/>
             <a:ext cx="685800" cy="475488"/>
           </a:xfrm>
           <a:prstGeom prst="rect">
@@ -15165,7 +15960,7 @@
                 <a:ea typeface="Trebuchet MS" pitchFamily="34" charset="-122"/>
                 <a:cs typeface="Trebuchet MS" pitchFamily="34" charset="-120"/>
               </a:rPr>
-              <a:t>r</a:t>
+              <a:t>nn</a:t>
             </a:r>
             <a:endParaRPr lang="en-US" sz="900" dirty="0"/>
           </a:p>
@@ -15173,13 +15968,13 @@
       </p:sp>
       <p:sp>
         <p:nvSpPr>
-          <p:cNvPr id="39" name="Shape 37"/>
-          <p:cNvSpPr/>
-          <p:nvPr/>
-        </p:nvSpPr>
-        <p:spPr>
-          <a:xfrm>
-            <a:off x="6062472" y="4169664"/>
+          <p:cNvPr id="43" name="Shape 41"/>
+          <p:cNvSpPr/>
+          <p:nvPr/>
+        </p:nvSpPr>
+        <p:spPr>
+          <a:xfrm>
+            <a:off x="7031736" y="4169664"/>
             <a:ext cx="685800" cy="475488"/>
           </a:xfrm>
           <a:prstGeom prst="rect">
@@ -15200,13 +15995,13 @@
       </p:sp>
       <p:sp>
         <p:nvSpPr>
-          <p:cNvPr id="40" name="Text 38"/>
-          <p:cNvSpPr/>
-          <p:nvPr/>
-        </p:nvSpPr>
-        <p:spPr>
-          <a:xfrm>
-            <a:off x="6062472" y="4169664"/>
+          <p:cNvPr id="44" name="Text 42"/>
+          <p:cNvSpPr/>
+          <p:nvPr/>
+        </p:nvSpPr>
+        <p:spPr>
+          <a:xfrm>
+            <a:off x="7031736" y="4169664"/>
             <a:ext cx="685800" cy="475488"/>
           </a:xfrm>
           <a:prstGeom prst="rect">
@@ -15231,73 +16026,7 @@
                 <a:ea typeface="Trebuchet MS" pitchFamily="34" charset="-122"/>
                 <a:cs typeface="Trebuchet MS" pitchFamily="34" charset="-120"/>
               </a:rPr>
-              <a:t>u</a:t>
-            </a:r>
-            <a:endParaRPr lang="en-US" sz="900" dirty="0"/>
-          </a:p>
-        </p:txBody>
-      </p:sp>
-      <p:sp>
-        <p:nvSpPr>
-          <p:cNvPr id="41" name="Shape 39"/>
-          <p:cNvSpPr/>
-          <p:nvPr/>
-        </p:nvSpPr>
-        <p:spPr>
-          <a:xfrm>
-            <a:off x="7274052" y="4169664"/>
-            <a:ext cx="685800" cy="475488"/>
-          </a:xfrm>
-          <a:prstGeom prst="rect">
-            <a:avLst>
-              <a:gd name="adj" fmla="val 7692"/>
-            </a:avLst>
-          </a:prstGeom>
-          <a:solidFill>
-            <a:srgbClr val="FFFFFF"/>
-          </a:solidFill>
-          <a:ln w="12700">
-            <a:solidFill>
-              <a:srgbClr val="DB2777"/>
-            </a:solidFill>
-            <a:prstDash val="solid"/>
-          </a:ln>
-        </p:spPr>
-      </p:sp>
-      <p:sp>
-        <p:nvSpPr>
-          <p:cNvPr id="42" name="Text 40"/>
-          <p:cNvSpPr/>
-          <p:nvPr/>
-        </p:nvSpPr>
-        <p:spPr>
-          <a:xfrm>
-            <a:off x="7274052" y="4169664"/>
-            <a:ext cx="685800" cy="475488"/>
-          </a:xfrm>
-          <a:prstGeom prst="rect">
-            <a:avLst/>
-          </a:prstGeom>
-          <a:noFill/>
-          <a:ln/>
-        </p:spPr>
-        <p:txBody>
-          <a:bodyPr wrap="square" lIns="0" tIns="0" rIns="0" bIns="0" rtlCol="0" anchor="ctr"/>
-          <a:lstStyle/>
-          <a:p>
-            <a:pPr algn="ctr" indent="0" marL="0">
-              <a:buNone/>
-            </a:pPr>
-            <a:r>
-              <a:rPr lang="en-US" sz="900" b="1" dirty="0">
-                <a:solidFill>
-                  <a:srgbClr val="9D174D"/>
-                </a:solidFill>
-                <a:latin typeface="Trebuchet MS" pitchFamily="34" charset="0"/>
-                <a:ea typeface="Trebuchet MS" pitchFamily="34" charset="-122"/>
-                <a:cs typeface="Trebuchet MS" pitchFamily="34" charset="-120"/>
-              </a:rPr>
-              <a:t>n</a:t>
+              <a:t>er</a:t>
             </a:r>
             <a:endParaRPr lang="en-US" sz="900" dirty="0"/>
           </a:p>
@@ -16205,7 +16934,7 @@
                 <a:ea typeface="Trebuchet MS" pitchFamily="34" charset="-122"/>
                 <a:cs typeface="Trebuchet MS" pitchFamily="34" charset="-120"/>
               </a:rPr>
-              <a:t>1</a:t>
+              <a:t>2</a:t>
             </a:r>
             <a:pPr algn="ctr" indent="0" marL="0">
               <a:buNone/>
@@ -16219,7 +16948,7 @@
                 <a:ea typeface="Trebuchet MS" pitchFamily="34" charset="-122"/>
                 <a:cs typeface="Trebuchet MS" pitchFamily="34" charset="-120"/>
               </a:rPr>
-              <a:t>  punctuation mark</a:t>
+              <a:t>  punctuation marks</a:t>
             </a:r>
             <a:endParaRPr lang="en-US" sz="2800" dirty="0"/>
           </a:p>
@@ -16623,7 +17352,7 @@
                 <a:ea typeface="Calibri" pitchFamily="34" charset="-122"/>
                 <a:cs typeface="Calibri" pitchFamily="34" charset="-120"/>
               </a:rPr>
-              <a:t>The </a:t>
+              <a:t>After the </a:t>
             </a:r>
             <a:pPr algn="l" indent="0" marL="0">
               <a:buNone/>
@@ -16640,7 +17369,7 @@
                 <a:ea typeface="Calibri" pitchFamily="34" charset="-122"/>
                 <a:cs typeface="Calibri" pitchFamily="34" charset="-120"/>
               </a:rPr>
-              <a:t>runaway</a:t>
+              <a:t>overrun</a:t>
             </a:r>
             <a:pPr algn="l" indent="0" marL="0">
               <a:buNone/>
@@ -16654,7 +17383,7 @@
                 <a:ea typeface="Calibri" pitchFamily="34" charset="-122"/>
                 <a:cs typeface="Calibri" pitchFamily="34" charset="-120"/>
               </a:rPr>
-              <a:t> horse galloped past the </a:t>
+              <a:t> rehearsal, the </a:t>
             </a:r>
             <a:pPr algn="l" indent="0" marL="0">
               <a:buNone/>
@@ -16671,7 +17400,7 @@
                 <a:ea typeface="Calibri" pitchFamily="34" charset="-122"/>
                 <a:cs typeface="Calibri" pitchFamily="34" charset="-120"/>
               </a:rPr>
-              <a:t>forerunner</a:t>
+              <a:t>runners</a:t>
             </a:r>
             <a:pPr algn="l" indent="0" marL="0">
               <a:buNone/>
@@ -16685,7 +17414,7 @@
                 <a:ea typeface="Calibri" pitchFamily="34" charset="-122"/>
                 <a:cs typeface="Calibri" pitchFamily="34" charset="-120"/>
               </a:rPr>
-              <a:t> of the pack, leaving all the other </a:t>
+              <a:t> had to </a:t>
             </a:r>
             <a:pPr algn="l" indent="0" marL="0">
               <a:buNone/>
@@ -16702,7 +17431,7 @@
                 <a:ea typeface="Calibri" pitchFamily="34" charset="-122"/>
                 <a:cs typeface="Calibri" pitchFamily="34" charset="-120"/>
               </a:rPr>
-              <a:t>runners</a:t>
+              <a:t>rerun</a:t>
             </a:r>
             <a:pPr algn="l" indent="0" marL="0">
               <a:buNone/>
@@ -16716,7 +17445,7 @@
                 <a:ea typeface="Calibri" pitchFamily="34" charset="-122"/>
                 <a:cs typeface="Calibri" pitchFamily="34" charset="-120"/>
               </a:rPr>
-              <a:t> far behind!</a:t>
+              <a:t> the final scene; everyone was exhausted!</a:t>
             </a:r>
             <a:endParaRPr lang="en-US" sz="1800" dirty="0"/>
           </a:p>
@@ -16871,7 +17600,7 @@
                 <a:ea typeface="Trebuchet MS" pitchFamily="34" charset="-122"/>
                 <a:cs typeface="Trebuchet MS" pitchFamily="34" charset="-120"/>
               </a:rPr>
-              <a:t>runaway</a:t>
+              <a:t>overrun</a:t>
             </a:r>
             <a:endParaRPr lang="en-US" sz="1400" dirty="0"/>
           </a:p>
@@ -16999,7 +17728,7 @@
                 <a:ea typeface="Trebuchet MS" pitchFamily="34" charset="-122"/>
                 <a:cs typeface="Trebuchet MS" pitchFamily="34" charset="-120"/>
               </a:rPr>
-              <a:t>forerunner</a:t>
+              <a:t>runners</a:t>
             </a:r>
             <a:endParaRPr lang="en-US" sz="1400" dirty="0"/>
           </a:p>
@@ -17127,7 +17856,7 @@
                 <a:ea typeface="Trebuchet MS" pitchFamily="34" charset="-122"/>
                 <a:cs typeface="Trebuchet MS" pitchFamily="34" charset="-120"/>
               </a:rPr>
-              <a:t>runners</a:t>
+              <a:t>rerun</a:t>
             </a:r>
             <a:endParaRPr lang="en-US" sz="1400" dirty="0"/>
           </a:p>
@@ -17597,7 +18326,7 @@
                 <a:ea typeface="Trebuchet MS" pitchFamily="34" charset="-122"/>
                 <a:cs typeface="Trebuchet MS" pitchFamily="34" charset="-120"/>
               </a:rPr>
-              <a:t>runaway</a:t>
+              <a:t>overrun</a:t>
             </a:r>
             <a:endParaRPr lang="en-US" sz="2800" dirty="0"/>
           </a:p>
@@ -18424,7 +19153,7 @@
                 <a:ea typeface="Trebuchet MS" pitchFamily="34" charset="-122"/>
                 <a:cs typeface="Trebuchet MS" pitchFamily="34" charset="-120"/>
               </a:rPr>
-              <a:t>runaway</a:t>
+              <a:t>overrun</a:t>
             </a:r>
             <a:endParaRPr lang="en-US" sz="2800" dirty="0"/>
           </a:p>
@@ -18513,11 +19242,11 @@
             </a:avLst>
           </a:prstGeom>
           <a:solidFill>
-            <a:srgbClr val="CCFBF1"/>
+            <a:srgbClr val="DDD6FE"/>
           </a:solidFill>
           <a:ln w="19050">
             <a:solidFill>
-              <a:srgbClr val="0D9488"/>
+              <a:srgbClr val="7C3AED"/>
             </a:solidFill>
             <a:prstDash val="solid"/>
           </a:ln>
@@ -18557,13 +19286,13 @@
             <a:r>
               <a:rPr lang="en-US" sz="1300" b="1" dirty="0">
                 <a:solidFill>
-                  <a:srgbClr val="0F766E"/>
+                  <a:srgbClr val="4C1D95"/>
                 </a:solidFill>
                 <a:latin typeface="Trebuchet MS" pitchFamily="34" charset="0"/>
                 <a:ea typeface="Trebuchet MS" pitchFamily="34" charset="-122"/>
                 <a:cs typeface="Trebuchet MS" pitchFamily="34" charset="-120"/>
               </a:rPr>
-              <a:t>run</a:t>
+              <a:t>over</a:t>
             </a:r>
             <a:endParaRPr lang="en-US" sz="1300" dirty="0"/>
           </a:p>
@@ -18602,7 +19331,7 @@
                 <a:ea typeface="Calibri" pitchFamily="34" charset="-122"/>
                 <a:cs typeface="Calibri" pitchFamily="34" charset="-120"/>
               </a:rPr>
-              <a:t>to move quickly on foot</a:t>
+              <a:t>too much, or beyond a limit</a:t>
             </a:r>
             <a:endParaRPr lang="en-US" sz="850" dirty="0"/>
           </a:p>
@@ -18625,11 +19354,11 @@
             </a:avLst>
           </a:prstGeom>
           <a:solidFill>
-            <a:srgbClr val="FCE7F3"/>
+            <a:srgbClr val="CCFBF1"/>
           </a:solidFill>
           <a:ln w="19050">
             <a:solidFill>
-              <a:srgbClr val="DB2777"/>
+              <a:srgbClr val="0D9488"/>
             </a:solidFill>
             <a:prstDash val="solid"/>
           </a:ln>
@@ -18669,13 +19398,13 @@
             <a:r>
               <a:rPr lang="en-US" sz="1300" b="1" dirty="0">
                 <a:solidFill>
-                  <a:srgbClr val="9D174D"/>
+                  <a:srgbClr val="0F766E"/>
                 </a:solidFill>
                 <a:latin typeface="Trebuchet MS" pitchFamily="34" charset="0"/>
                 <a:ea typeface="Trebuchet MS" pitchFamily="34" charset="-122"/>
                 <a:cs typeface="Trebuchet MS" pitchFamily="34" charset="-120"/>
               </a:rPr>
-              <a:t>away</a:t>
+              <a:t>run</a:t>
             </a:r>
             <a:endParaRPr lang="en-US" sz="1300" dirty="0"/>
           </a:p>
@@ -18714,7 +19443,7 @@
                 <a:ea typeface="Calibri" pitchFamily="34" charset="-122"/>
                 <a:cs typeface="Calibri" pitchFamily="34" charset="-120"/>
               </a:rPr>
-              <a:t>from a place or person</a:t>
+              <a:t>to move quickly on foot</a:t>
             </a:r>
             <a:endParaRPr lang="en-US" sz="850" dirty="0"/>
           </a:p>
@@ -19409,7 +20138,7 @@
                 <a:ea typeface="Trebuchet MS" pitchFamily="34" charset="-122"/>
                 <a:cs typeface="Trebuchet MS" pitchFamily="34" charset="-120"/>
               </a:rPr>
-              <a:t>runaway</a:t>
+              <a:t>overrun</a:t>
             </a:r>
             <a:endParaRPr lang="en-US" sz="2800" dirty="0"/>
           </a:p>
@@ -19498,11 +20227,11 @@
             </a:avLst>
           </a:prstGeom>
           <a:solidFill>
-            <a:srgbClr val="CCFBF1"/>
+            <a:srgbClr val="DDD6FE"/>
           </a:solidFill>
           <a:ln w="19050">
             <a:solidFill>
-              <a:srgbClr val="0D9488"/>
+              <a:srgbClr val="7C3AED"/>
             </a:solidFill>
             <a:prstDash val="solid"/>
           </a:ln>
@@ -19542,13 +20271,13 @@
             <a:r>
               <a:rPr lang="en-US" sz="1300" b="1" dirty="0">
                 <a:solidFill>
-                  <a:srgbClr val="0F766E"/>
+                  <a:srgbClr val="4C1D95"/>
                 </a:solidFill>
                 <a:latin typeface="Trebuchet MS" pitchFamily="34" charset="0"/>
                 <a:ea typeface="Trebuchet MS" pitchFamily="34" charset="-122"/>
                 <a:cs typeface="Trebuchet MS" pitchFamily="34" charset="-120"/>
               </a:rPr>
-              <a:t>run</a:t>
+              <a:t>over</a:t>
             </a:r>
             <a:endParaRPr lang="en-US" sz="1300" dirty="0"/>
           </a:p>
@@ -19587,7 +20316,7 @@
                 <a:ea typeface="Calibri" pitchFamily="34" charset="-122"/>
                 <a:cs typeface="Calibri" pitchFamily="34" charset="-120"/>
               </a:rPr>
-              <a:t>to move quickly on foot</a:t>
+              <a:t>too much, or beyond a limit</a:t>
             </a:r>
             <a:endParaRPr lang="en-US" sz="850" dirty="0"/>
           </a:p>
@@ -19610,11 +20339,11 @@
             </a:avLst>
           </a:prstGeom>
           <a:solidFill>
-            <a:srgbClr val="FCE7F3"/>
+            <a:srgbClr val="CCFBF1"/>
           </a:solidFill>
           <a:ln w="19050">
             <a:solidFill>
-              <a:srgbClr val="DB2777"/>
+              <a:srgbClr val="0D9488"/>
             </a:solidFill>
             <a:prstDash val="solid"/>
           </a:ln>
@@ -19654,13 +20383,13 @@
             <a:r>
               <a:rPr lang="en-US" sz="1300" b="1" dirty="0">
                 <a:solidFill>
-                  <a:srgbClr val="9D174D"/>
+                  <a:srgbClr val="0F766E"/>
                 </a:solidFill>
                 <a:latin typeface="Trebuchet MS" pitchFamily="34" charset="0"/>
                 <a:ea typeface="Trebuchet MS" pitchFamily="34" charset="-122"/>
                 <a:cs typeface="Trebuchet MS" pitchFamily="34" charset="-120"/>
               </a:rPr>
-              <a:t>away</a:t>
+              <a:t>run</a:t>
             </a:r>
             <a:endParaRPr lang="en-US" sz="1300" dirty="0"/>
           </a:p>
@@ -19699,7 +20428,7 @@
                 <a:ea typeface="Calibri" pitchFamily="34" charset="-122"/>
                 <a:cs typeface="Calibri" pitchFamily="34" charset="-120"/>
               </a:rPr>
-              <a:t>from a place or person</a:t>
+              <a:t>to move quickly on foot</a:t>
             </a:r>
             <a:endParaRPr lang="en-US" sz="850" dirty="0"/>
           </a:p>
@@ -19858,7 +20587,7 @@
                 <a:ea typeface="Trebuchet MS" pitchFamily="34" charset="-122"/>
                 <a:cs typeface="Trebuchet MS" pitchFamily="34" charset="-120"/>
               </a:rPr>
-              <a:t>run</a:t>
+              <a:t>o</a:t>
             </a:r>
             <a:endParaRPr lang="en-US" sz="1400" dirty="0"/>
           </a:p>
@@ -19963,7 +20692,7 @@
                 <a:ea typeface="Trebuchet MS" pitchFamily="34" charset="-122"/>
                 <a:cs typeface="Trebuchet MS" pitchFamily="34" charset="-120"/>
               </a:rPr>
-              <a:t>a</a:t>
+              <a:t>ver</a:t>
             </a:r>
             <a:endParaRPr lang="en-US" sz="1400" dirty="0"/>
           </a:p>
@@ -20068,7 +20797,7 @@
                 <a:ea typeface="Trebuchet MS" pitchFamily="34" charset="-122"/>
                 <a:cs typeface="Trebuchet MS" pitchFamily="34" charset="-120"/>
               </a:rPr>
-              <a:t>way</a:t>
+              <a:t>run</a:t>
             </a:r>
             <a:endParaRPr lang="en-US" sz="1400" dirty="0"/>
           </a:p>
@@ -20631,7 +21360,7 @@
                 <a:ea typeface="Trebuchet MS" pitchFamily="34" charset="-122"/>
                 <a:cs typeface="Trebuchet MS" pitchFamily="34" charset="-120"/>
               </a:rPr>
-              <a:t>runaway</a:t>
+              <a:t>overrun</a:t>
             </a:r>
             <a:endParaRPr lang="en-US" sz="2800" dirty="0"/>
           </a:p>
@@ -20720,11 +21449,11 @@
             </a:avLst>
           </a:prstGeom>
           <a:solidFill>
-            <a:srgbClr val="CCFBF1"/>
+            <a:srgbClr val="DDD6FE"/>
           </a:solidFill>
           <a:ln w="19050">
             <a:solidFill>
-              <a:srgbClr val="0D9488"/>
+              <a:srgbClr val="7C3AED"/>
             </a:solidFill>
             <a:prstDash val="solid"/>
           </a:ln>
@@ -20764,13 +21493,13 @@
             <a:r>
               <a:rPr lang="en-US" sz="1300" b="1" dirty="0">
                 <a:solidFill>
-                  <a:srgbClr val="0F766E"/>
+                  <a:srgbClr val="4C1D95"/>
                 </a:solidFill>
                 <a:latin typeface="Trebuchet MS" pitchFamily="34" charset="0"/>
                 <a:ea typeface="Trebuchet MS" pitchFamily="34" charset="-122"/>
                 <a:cs typeface="Trebuchet MS" pitchFamily="34" charset="-120"/>
               </a:rPr>
-              <a:t>run</a:t>
+              <a:t>over</a:t>
             </a:r>
             <a:endParaRPr lang="en-US" sz="1300" dirty="0"/>
           </a:p>
@@ -20809,7 +21538,7 @@
                 <a:ea typeface="Calibri" pitchFamily="34" charset="-122"/>
                 <a:cs typeface="Calibri" pitchFamily="34" charset="-120"/>
               </a:rPr>
-              <a:t>to move quickly on foot</a:t>
+              <a:t>too much, or beyond a limit</a:t>
             </a:r>
             <a:endParaRPr lang="en-US" sz="850" dirty="0"/>
           </a:p>
@@ -20832,11 +21561,11 @@
             </a:avLst>
           </a:prstGeom>
           <a:solidFill>
-            <a:srgbClr val="FCE7F3"/>
+            <a:srgbClr val="CCFBF1"/>
           </a:solidFill>
           <a:ln w="19050">
             <a:solidFill>
-              <a:srgbClr val="DB2777"/>
+              <a:srgbClr val="0D9488"/>
             </a:solidFill>
             <a:prstDash val="solid"/>
           </a:ln>
@@ -20876,13 +21605,13 @@
             <a:r>
               <a:rPr lang="en-US" sz="1300" b="1" dirty="0">
                 <a:solidFill>
-                  <a:srgbClr val="9D174D"/>
+                  <a:srgbClr val="0F766E"/>
                 </a:solidFill>
                 <a:latin typeface="Trebuchet MS" pitchFamily="34" charset="0"/>
                 <a:ea typeface="Trebuchet MS" pitchFamily="34" charset="-122"/>
                 <a:cs typeface="Trebuchet MS" pitchFamily="34" charset="-120"/>
               </a:rPr>
-              <a:t>away</a:t>
+              <a:t>run</a:t>
             </a:r>
             <a:endParaRPr lang="en-US" sz="1300" dirty="0"/>
           </a:p>
@@ -20921,7 +21650,7 @@
                 <a:ea typeface="Calibri" pitchFamily="34" charset="-122"/>
                 <a:cs typeface="Calibri" pitchFamily="34" charset="-120"/>
               </a:rPr>
-              <a:t>from a place or person</a:t>
+              <a:t>to move quickly on foot</a:t>
             </a:r>
             <a:endParaRPr lang="en-US" sz="850" dirty="0"/>
           </a:p>
@@ -21080,7 +21809,7 @@
                 <a:ea typeface="Trebuchet MS" pitchFamily="34" charset="-122"/>
                 <a:cs typeface="Trebuchet MS" pitchFamily="34" charset="-120"/>
               </a:rPr>
-              <a:t>run</a:t>
+              <a:t>o</a:t>
             </a:r>
             <a:endParaRPr lang="en-US" sz="1400" dirty="0"/>
           </a:p>
@@ -21185,7 +21914,7 @@
                 <a:ea typeface="Trebuchet MS" pitchFamily="34" charset="-122"/>
                 <a:cs typeface="Trebuchet MS" pitchFamily="34" charset="-120"/>
               </a:rPr>
-              <a:t>a</a:t>
+              <a:t>ver</a:t>
             </a:r>
             <a:endParaRPr lang="en-US" sz="1400" dirty="0"/>
           </a:p>
@@ -21290,7 +22019,7 @@
                 <a:ea typeface="Trebuchet MS" pitchFamily="34" charset="-122"/>
                 <a:cs typeface="Trebuchet MS" pitchFamily="34" charset="-120"/>
               </a:rPr>
-              <a:t>way</a:t>
+              <a:t>run</a:t>
             </a:r>
             <a:endParaRPr lang="en-US" sz="1400" dirty="0"/>
           </a:p>
@@ -21449,7 +22178,7 @@
                 <a:ea typeface="Trebuchet MS" pitchFamily="34" charset="-122"/>
                 <a:cs typeface="Trebuchet MS" pitchFamily="34" charset="-120"/>
               </a:rPr>
-              <a:t>r</a:t>
+              <a:t>o</a:t>
             </a:r>
             <a:endParaRPr lang="en-US" sz="900" dirty="0"/>
           </a:p>
@@ -21515,7 +22244,7 @@
                 <a:ea typeface="Trebuchet MS" pitchFamily="34" charset="-122"/>
                 <a:cs typeface="Trebuchet MS" pitchFamily="34" charset="-120"/>
               </a:rPr>
-              <a:t>u</a:t>
+              <a:t>v</a:t>
             </a:r>
             <a:endParaRPr lang="en-US" sz="900" dirty="0"/>
           </a:p>
@@ -21581,7 +22310,7 @@
                 <a:ea typeface="Trebuchet MS" pitchFamily="34" charset="-122"/>
                 <a:cs typeface="Trebuchet MS" pitchFamily="34" charset="-120"/>
               </a:rPr>
-              <a:t>n</a:t>
+              <a:t>er</a:t>
             </a:r>
             <a:endParaRPr lang="en-US" sz="900" dirty="0"/>
           </a:p>
@@ -21647,7 +22376,7 @@
                 <a:ea typeface="Trebuchet MS" pitchFamily="34" charset="-122"/>
                 <a:cs typeface="Trebuchet MS" pitchFamily="34" charset="-120"/>
               </a:rPr>
-              <a:t>a</a:t>
+              <a:t>r</a:t>
             </a:r>
             <a:endParaRPr lang="en-US" sz="900" dirty="0"/>
           </a:p>
@@ -21713,7 +22442,7 @@
                 <a:ea typeface="Trebuchet MS" pitchFamily="34" charset="-122"/>
                 <a:cs typeface="Trebuchet MS" pitchFamily="34" charset="-120"/>
               </a:rPr>
-              <a:t>w</a:t>
+              <a:t>u</a:t>
             </a:r>
             <a:endParaRPr lang="en-US" sz="900" dirty="0"/>
           </a:p>
@@ -21779,7 +22508,7 @@
                 <a:ea typeface="Trebuchet MS" pitchFamily="34" charset="-122"/>
                 <a:cs typeface="Trebuchet MS" pitchFamily="34" charset="-120"/>
               </a:rPr>
-              <a:t>ay</a:t>
+              <a:t>n</a:t>
             </a:r>
             <a:endParaRPr lang="en-US" sz="900" dirty="0"/>
           </a:p>
@@ -22210,7 +22939,7 @@
                 <a:ea typeface="Trebuchet MS" pitchFamily="34" charset="-122"/>
                 <a:cs typeface="Trebuchet MS" pitchFamily="34" charset="-120"/>
               </a:rPr>
-              <a:t>forerunner</a:t>
+              <a:t>runners</a:t>
             </a:r>
             <a:endParaRPr lang="en-US" sz="2800" dirty="0"/>
           </a:p>
@@ -23037,7 +23766,7 @@
                 <a:ea typeface="Trebuchet MS" pitchFamily="34" charset="-122"/>
                 <a:cs typeface="Trebuchet MS" pitchFamily="34" charset="-120"/>
               </a:rPr>
-              <a:t>forerunner</a:t>
+              <a:t>runners</a:t>
             </a:r>
             <a:endParaRPr lang="en-US" sz="2800" dirty="0"/>
           </a:p>
@@ -23117,8 +23846,8 @@
         </p:nvSpPr>
         <p:spPr>
           <a:xfrm>
-            <a:off x="2221992" y="2258568"/>
-            <a:ext cx="1828800" cy="292608"/>
+            <a:off x="1989734" y="2258568"/>
+            <a:ext cx="1581912" cy="292608"/>
           </a:xfrm>
           <a:prstGeom prst="rect">
             <a:avLst>
@@ -23126,11 +23855,11 @@
             </a:avLst>
           </a:prstGeom>
           <a:solidFill>
-            <a:srgbClr val="DDD6FE"/>
+            <a:srgbClr val="CCFBF1"/>
           </a:solidFill>
           <a:ln w="19050">
             <a:solidFill>
-              <a:srgbClr val="7C3AED"/>
+              <a:srgbClr val="0D9488"/>
             </a:solidFill>
             <a:prstDash val="solid"/>
           </a:ln>
@@ -23151,8 +23880,8 @@
         </p:nvSpPr>
         <p:spPr>
           <a:xfrm>
-            <a:off x="2221992" y="2258568"/>
-            <a:ext cx="1828800" cy="292608"/>
+            <a:off x="1989734" y="2258568"/>
+            <a:ext cx="1581912" cy="292608"/>
           </a:xfrm>
           <a:prstGeom prst="rect">
             <a:avLst/>
@@ -23170,13 +23899,13 @@
             <a:r>
               <a:rPr lang="en-US" sz="1300" b="1" dirty="0">
                 <a:solidFill>
-                  <a:srgbClr val="4C1D95"/>
+                  <a:srgbClr val="0F766E"/>
                 </a:solidFill>
                 <a:latin typeface="Trebuchet MS" pitchFamily="34" charset="0"/>
                 <a:ea typeface="Trebuchet MS" pitchFamily="34" charset="-122"/>
                 <a:cs typeface="Trebuchet MS" pitchFamily="34" charset="-120"/>
               </a:rPr>
-              <a:t>fore</a:t>
+              <a:t>run</a:t>
             </a:r>
             <a:endParaRPr lang="en-US" sz="1300" dirty="0"/>
           </a:p>
@@ -23190,8 +23919,8 @@
         </p:nvSpPr>
         <p:spPr>
           <a:xfrm>
-            <a:off x="2221992" y="2569464"/>
-            <a:ext cx="1828800" cy="201168"/>
+            <a:off x="1989734" y="2569464"/>
+            <a:ext cx="1581912" cy="201168"/>
           </a:xfrm>
           <a:prstGeom prst="rect">
             <a:avLst/>
@@ -23215,7 +23944,7 @@
                 <a:ea typeface="Calibri" pitchFamily="34" charset="-122"/>
                 <a:cs typeface="Calibri" pitchFamily="34" charset="-120"/>
               </a:rPr>
-              <a:t>before or in front</a:t>
+              <a:t>to move quickly on foot</a:t>
             </a:r>
             <a:endParaRPr lang="en-US" sz="850" dirty="0"/>
           </a:p>
@@ -23229,8 +23958,8 @@
         </p:nvSpPr>
         <p:spPr>
           <a:xfrm>
-            <a:off x="4370832" y="2258568"/>
-            <a:ext cx="1828800" cy="292608"/>
+            <a:off x="3659429" y="2258568"/>
+            <a:ext cx="1581912" cy="292608"/>
           </a:xfrm>
           <a:prstGeom prst="rect">
             <a:avLst>
@@ -23238,11 +23967,11 @@
             </a:avLst>
           </a:prstGeom>
           <a:solidFill>
-            <a:srgbClr val="CCFBF1"/>
+            <a:srgbClr val="FCE7F3"/>
           </a:solidFill>
           <a:ln w="19050">
             <a:solidFill>
-              <a:srgbClr val="0D9488"/>
+              <a:srgbClr val="DB2777"/>
             </a:solidFill>
             <a:prstDash val="solid"/>
           </a:ln>
@@ -23263,8 +23992,8 @@
         </p:nvSpPr>
         <p:spPr>
           <a:xfrm>
-            <a:off x="4370832" y="2258568"/>
-            <a:ext cx="1828800" cy="292608"/>
+            <a:off x="3659429" y="2258568"/>
+            <a:ext cx="1581912" cy="292608"/>
           </a:xfrm>
           <a:prstGeom prst="rect">
             <a:avLst/>
@@ -23282,13 +24011,13 @@
             <a:r>
               <a:rPr lang="en-US" sz="1300" b="1" dirty="0">
                 <a:solidFill>
-                  <a:srgbClr val="0F766E"/>
+                  <a:srgbClr val="9D174D"/>
                 </a:solidFill>
                 <a:latin typeface="Trebuchet MS" pitchFamily="34" charset="0"/>
                 <a:ea typeface="Trebuchet MS" pitchFamily="34" charset="-122"/>
                 <a:cs typeface="Trebuchet MS" pitchFamily="34" charset="-120"/>
               </a:rPr>
-              <a:t>run</a:t>
+              <a:t>n</a:t>
             </a:r>
             <a:endParaRPr lang="en-US" sz="1300" dirty="0"/>
           </a:p>
@@ -23302,8 +24031,8 @@
         </p:nvSpPr>
         <p:spPr>
           <a:xfrm>
-            <a:off x="4370832" y="2569464"/>
-            <a:ext cx="1828800" cy="201168"/>
+            <a:off x="3659429" y="2569464"/>
+            <a:ext cx="1581912" cy="201168"/>
           </a:xfrm>
           <a:prstGeom prst="rect">
             <a:avLst/>
@@ -23327,7 +24056,7 @@
                 <a:ea typeface="Calibri" pitchFamily="34" charset="-122"/>
                 <a:cs typeface="Calibri" pitchFamily="34" charset="-120"/>
               </a:rPr>
-              <a:t>to move quickly on foot</a:t>
+              <a:t>doubled consonant before suffix</a:t>
             </a:r>
             <a:endParaRPr lang="en-US" sz="850" dirty="0"/>
           </a:p>
@@ -23335,14 +24064,53 @@
       </p:sp>
       <p:sp>
         <p:nvSpPr>
-          <p:cNvPr id="22" name="Shape 20"/>
-          <p:cNvSpPr/>
-          <p:nvPr/>
-        </p:nvSpPr>
-        <p:spPr>
-          <a:xfrm>
-            <a:off x="6519672" y="2258568"/>
-            <a:ext cx="1828800" cy="292608"/>
+          <p:cNvPr id="22" name="Text 20"/>
+          <p:cNvSpPr/>
+          <p:nvPr/>
+        </p:nvSpPr>
+        <p:spPr>
+          <a:xfrm>
+            <a:off x="3659429" y="2752344"/>
+            <a:ext cx="1581912" cy="182880"/>
+          </a:xfrm>
+          <a:prstGeom prst="rect">
+            <a:avLst/>
+          </a:prstGeom>
+          <a:noFill/>
+          <a:ln/>
+        </p:spPr>
+        <p:txBody>
+          <a:bodyPr wrap="square" lIns="0" tIns="0" rIns="0" bIns="0" rtlCol="0" anchor="t"/>
+          <a:lstStyle/>
+          <a:p>
+            <a:pPr algn="ctr" indent="0" marL="0">
+              <a:buNone/>
+            </a:pPr>
+            <a:r>
+              <a:rPr lang="en-US" sz="700" i="1" dirty="0">
+                <a:solidFill>
+                  <a:srgbClr val="94A3B8"/>
+                </a:solidFill>
+                <a:latin typeface="Calibri" pitchFamily="34" charset="0"/>
+                <a:ea typeface="Calibri" pitchFamily="34" charset="-122"/>
+                <a:cs typeface="Calibri" pitchFamily="34" charset="-120"/>
+              </a:rPr>
+              <a:t>double 'n' before vowel suffix</a:t>
+            </a:r>
+            <a:endParaRPr lang="en-US" sz="700" dirty="0"/>
+          </a:p>
+        </p:txBody>
+      </p:sp>
+      <p:sp>
+        <p:nvSpPr>
+          <p:cNvPr id="23" name="Shape 21"/>
+          <p:cNvSpPr/>
+          <p:nvPr/>
+        </p:nvSpPr>
+        <p:spPr>
+          <a:xfrm>
+            <a:off x="5329123" y="2258568"/>
+            <a:ext cx="1581912" cy="292608"/>
           </a:xfrm>
           <a:prstGeom prst="rect">
             <a:avLst>
@@ -23369,14 +24137,14 @@
       </p:sp>
       <p:sp>
         <p:nvSpPr>
-          <p:cNvPr id="23" name="Text 21"/>
-          <p:cNvSpPr/>
-          <p:nvPr/>
-        </p:nvSpPr>
-        <p:spPr>
-          <a:xfrm>
-            <a:off x="6519672" y="2258568"/>
-            <a:ext cx="1828800" cy="292608"/>
+          <p:cNvPr id="24" name="Text 22"/>
+          <p:cNvSpPr/>
+          <p:nvPr/>
+        </p:nvSpPr>
+        <p:spPr>
+          <a:xfrm>
+            <a:off x="5329123" y="2258568"/>
+            <a:ext cx="1581912" cy="292608"/>
           </a:xfrm>
           <a:prstGeom prst="rect">
             <a:avLst/>
@@ -23408,14 +24176,14 @@
       </p:sp>
       <p:sp>
         <p:nvSpPr>
-          <p:cNvPr id="24" name="Text 22"/>
-          <p:cNvSpPr/>
-          <p:nvPr/>
-        </p:nvSpPr>
-        <p:spPr>
-          <a:xfrm>
-            <a:off x="6519672" y="2569464"/>
-            <a:ext cx="1828800" cy="201168"/>
+          <p:cNvPr id="25" name="Text 23"/>
+          <p:cNvSpPr/>
+          <p:nvPr/>
+        </p:nvSpPr>
+        <p:spPr>
+          <a:xfrm>
+            <a:off x="5329123" y="2569464"/>
+            <a:ext cx="1581912" cy="201168"/>
           </a:xfrm>
           <a:prstGeom prst="rect">
             <a:avLst/>
@@ -23439,7 +24207,7 @@
                 <a:ea typeface="Calibri" pitchFamily="34" charset="-122"/>
                 <a:cs typeface="Calibri" pitchFamily="34" charset="-120"/>
               </a:rPr>
-              <a:t>a person or thing that does something</a:t>
+              <a:t>one who does something</a:t>
             </a:r>
             <a:endParaRPr lang="en-US" sz="850" dirty="0"/>
           </a:p>
@@ -23447,7 +24215,119 @@
       </p:sp>
       <p:sp>
         <p:nvSpPr>
-          <p:cNvPr id="25" name="Shape 23"/>
+          <p:cNvPr id="26" name="Shape 24"/>
+          <p:cNvSpPr/>
+          <p:nvPr/>
+        </p:nvSpPr>
+        <p:spPr>
+          <a:xfrm>
+            <a:off x="6998818" y="2258568"/>
+            <a:ext cx="1581912" cy="292608"/>
+          </a:xfrm>
+          <a:prstGeom prst="rect">
+            <a:avLst>
+              <a:gd name="adj" fmla="val 25000"/>
+            </a:avLst>
+          </a:prstGeom>
+          <a:solidFill>
+            <a:srgbClr val="FCE7F3"/>
+          </a:solidFill>
+          <a:ln w="19050">
+            <a:solidFill>
+              <a:srgbClr val="DB2777"/>
+            </a:solidFill>
+            <a:prstDash val="solid"/>
+          </a:ln>
+          <a:effectLst>
+            <a:outerShdw sx="100000" sy="100000" kx="0" ky="0" algn="bl" rotWithShape="0" blurRad="101600" dist="38100" dir="8100000">
+              <a:srgbClr val="000000">
+                <a:alpha val="12000"/>
+              </a:srgbClr>
+            </a:outerShdw>
+          </a:effectLst>
+        </p:spPr>
+      </p:sp>
+      <p:sp>
+        <p:nvSpPr>
+          <p:cNvPr id="27" name="Text 25"/>
+          <p:cNvSpPr/>
+          <p:nvPr/>
+        </p:nvSpPr>
+        <p:spPr>
+          <a:xfrm>
+            <a:off x="6998818" y="2258568"/>
+            <a:ext cx="1581912" cy="292608"/>
+          </a:xfrm>
+          <a:prstGeom prst="rect">
+            <a:avLst/>
+          </a:prstGeom>
+          <a:noFill/>
+          <a:ln/>
+        </p:spPr>
+        <p:txBody>
+          <a:bodyPr wrap="square" lIns="0" tIns="0" rIns="0" bIns="0" rtlCol="0" anchor="ctr"/>
+          <a:lstStyle/>
+          <a:p>
+            <a:pPr algn="ctr" indent="0" marL="0">
+              <a:buNone/>
+            </a:pPr>
+            <a:r>
+              <a:rPr lang="en-US" sz="1300" b="1" dirty="0">
+                <a:solidFill>
+                  <a:srgbClr val="9D174D"/>
+                </a:solidFill>
+                <a:latin typeface="Trebuchet MS" pitchFamily="34" charset="0"/>
+                <a:ea typeface="Trebuchet MS" pitchFamily="34" charset="-122"/>
+                <a:cs typeface="Trebuchet MS" pitchFamily="34" charset="-120"/>
+              </a:rPr>
+              <a:t>s</a:t>
+            </a:r>
+            <a:endParaRPr lang="en-US" sz="1300" dirty="0"/>
+          </a:p>
+        </p:txBody>
+      </p:sp>
+      <p:sp>
+        <p:nvSpPr>
+          <p:cNvPr id="28" name="Text 26"/>
+          <p:cNvSpPr/>
+          <p:nvPr/>
+        </p:nvSpPr>
+        <p:spPr>
+          <a:xfrm>
+            <a:off x="6998818" y="2569464"/>
+            <a:ext cx="1581912" cy="201168"/>
+          </a:xfrm>
+          <a:prstGeom prst="rect">
+            <a:avLst/>
+          </a:prstGeom>
+          <a:noFill/>
+          <a:ln/>
+        </p:spPr>
+        <p:txBody>
+          <a:bodyPr wrap="square" lIns="0" tIns="0" rIns="0" bIns="0" rtlCol="0" anchor="t"/>
+          <a:lstStyle/>
+          <a:p>
+            <a:pPr algn="ctr" indent="0" marL="0">
+              <a:buNone/>
+            </a:pPr>
+            <a:r>
+              <a:rPr lang="en-US" sz="850" dirty="0">
+                <a:solidFill>
+                  <a:srgbClr val="475569"/>
+                </a:solidFill>
+                <a:latin typeface="Calibri" pitchFamily="34" charset="0"/>
+                <a:ea typeface="Calibri" pitchFamily="34" charset="-122"/>
+                <a:cs typeface="Calibri" pitchFamily="34" charset="-120"/>
+              </a:rPr>
+              <a:t>more than one</a:t>
+            </a:r>
+            <a:endParaRPr lang="en-US" sz="850" dirty="0"/>
+          </a:p>
+        </p:txBody>
+      </p:sp>
+      <p:sp>
+        <p:nvSpPr>
+          <p:cNvPr id="29" name="Shape 27"/>
           <p:cNvSpPr/>
           <p:nvPr/>
         </p:nvSpPr>
@@ -23474,7 +24354,7 @@
       </p:sp>
       <p:sp>
         <p:nvSpPr>
-          <p:cNvPr id="26" name="Text 24"/>
+          <p:cNvPr id="30" name="Text 28"/>
           <p:cNvSpPr/>
           <p:nvPr/>
         </p:nvSpPr>
@@ -23513,7 +24393,7 @@
       </p:sp>
       <p:sp>
         <p:nvSpPr>
-          <p:cNvPr id="27" name="Shape 25"/>
+          <p:cNvPr id="31" name="Shape 29"/>
           <p:cNvSpPr/>
           <p:nvPr/>
         </p:nvSpPr>
@@ -23540,7 +24420,7 @@
       </p:sp>
       <p:sp>
         <p:nvSpPr>
-          <p:cNvPr id="28" name="Text 26"/>
+          <p:cNvPr id="32" name="Text 30"/>
           <p:cNvSpPr/>
           <p:nvPr/>
         </p:nvSpPr>
@@ -23579,7 +24459,7 @@
       </p:sp>
       <p:sp>
         <p:nvSpPr>
-          <p:cNvPr id="29" name="Shape 27"/>
+          <p:cNvPr id="33" name="Shape 31"/>
           <p:cNvSpPr/>
           <p:nvPr/>
         </p:nvSpPr>
@@ -23606,7 +24486,7 @@
       </p:sp>
       <p:sp>
         <p:nvSpPr>
-          <p:cNvPr id="30" name="Text 28"/>
+          <p:cNvPr id="34" name="Text 32"/>
           <p:cNvSpPr/>
           <p:nvPr/>
         </p:nvSpPr>
@@ -23645,7 +24525,7 @@
       </p:sp>
       <p:sp>
         <p:nvSpPr>
-          <p:cNvPr id="31" name="Shape 29"/>
+          <p:cNvPr id="35" name="Shape 33"/>
           <p:cNvSpPr/>
           <p:nvPr/>
         </p:nvSpPr>
@@ -23672,7 +24552,7 @@
       </p:sp>
       <p:sp>
         <p:nvSpPr>
-          <p:cNvPr id="32" name="Text 30"/>
+          <p:cNvPr id="36" name="Text 34"/>
           <p:cNvSpPr/>
           <p:nvPr/>
         </p:nvSpPr>
@@ -24853,7 +25733,7 @@
                 <a:ea typeface="Trebuchet MS" pitchFamily="34" charset="-122"/>
                 <a:cs typeface="Trebuchet MS" pitchFamily="34" charset="-120"/>
               </a:rPr>
-              <a:t>forerunner</a:t>
+              <a:t>runners</a:t>
             </a:r>
             <a:endParaRPr lang="en-US" sz="2800" dirty="0"/>
           </a:p>
@@ -24933,8 +25813,8 @@
         </p:nvSpPr>
         <p:spPr>
           <a:xfrm>
-            <a:off x="2221992" y="2258568"/>
-            <a:ext cx="1828800" cy="292608"/>
+            <a:off x="1989734" y="2258568"/>
+            <a:ext cx="1581912" cy="292608"/>
           </a:xfrm>
           <a:prstGeom prst="rect">
             <a:avLst>
@@ -24942,11 +25822,11 @@
             </a:avLst>
           </a:prstGeom>
           <a:solidFill>
-            <a:srgbClr val="DDD6FE"/>
+            <a:srgbClr val="CCFBF1"/>
           </a:solidFill>
           <a:ln w="19050">
             <a:solidFill>
-              <a:srgbClr val="7C3AED"/>
+              <a:srgbClr val="0D9488"/>
             </a:solidFill>
             <a:prstDash val="solid"/>
           </a:ln>
@@ -24967,8 +25847,8 @@
         </p:nvSpPr>
         <p:spPr>
           <a:xfrm>
-            <a:off x="2221992" y="2258568"/>
-            <a:ext cx="1828800" cy="292608"/>
+            <a:off x="1989734" y="2258568"/>
+            <a:ext cx="1581912" cy="292608"/>
           </a:xfrm>
           <a:prstGeom prst="rect">
             <a:avLst/>
@@ -24986,13 +25866,13 @@
             <a:r>
               <a:rPr lang="en-US" sz="1300" b="1" dirty="0">
                 <a:solidFill>
-                  <a:srgbClr val="4C1D95"/>
+                  <a:srgbClr val="0F766E"/>
                 </a:solidFill>
                 <a:latin typeface="Trebuchet MS" pitchFamily="34" charset="0"/>
                 <a:ea typeface="Trebuchet MS" pitchFamily="34" charset="-122"/>
                 <a:cs typeface="Trebuchet MS" pitchFamily="34" charset="-120"/>
               </a:rPr>
-              <a:t>fore</a:t>
+              <a:t>run</a:t>
             </a:r>
             <a:endParaRPr lang="en-US" sz="1300" dirty="0"/>
           </a:p>
@@ -25006,8 +25886,8 @@
         </p:nvSpPr>
         <p:spPr>
           <a:xfrm>
-            <a:off x="2221992" y="2569464"/>
-            <a:ext cx="1828800" cy="201168"/>
+            <a:off x="1989734" y="2569464"/>
+            <a:ext cx="1581912" cy="201168"/>
           </a:xfrm>
           <a:prstGeom prst="rect">
             <a:avLst/>
@@ -25031,7 +25911,7 @@
                 <a:ea typeface="Calibri" pitchFamily="34" charset="-122"/>
                 <a:cs typeface="Calibri" pitchFamily="34" charset="-120"/>
               </a:rPr>
-              <a:t>before or in front</a:t>
+              <a:t>to move quickly on foot</a:t>
             </a:r>
             <a:endParaRPr lang="en-US" sz="850" dirty="0"/>
           </a:p>
@@ -25045,8 +25925,8 @@
         </p:nvSpPr>
         <p:spPr>
           <a:xfrm>
-            <a:off x="4370832" y="2258568"/>
-            <a:ext cx="1828800" cy="292608"/>
+            <a:off x="3659429" y="2258568"/>
+            <a:ext cx="1581912" cy="292608"/>
           </a:xfrm>
           <a:prstGeom prst="rect">
             <a:avLst>
@@ -25054,11 +25934,11 @@
             </a:avLst>
           </a:prstGeom>
           <a:solidFill>
-            <a:srgbClr val="CCFBF1"/>
+            <a:srgbClr val="FCE7F3"/>
           </a:solidFill>
           <a:ln w="19050">
             <a:solidFill>
-              <a:srgbClr val="0D9488"/>
+              <a:srgbClr val="DB2777"/>
             </a:solidFill>
             <a:prstDash val="solid"/>
           </a:ln>
@@ -25079,8 +25959,8 @@
         </p:nvSpPr>
         <p:spPr>
           <a:xfrm>
-            <a:off x="4370832" y="2258568"/>
-            <a:ext cx="1828800" cy="292608"/>
+            <a:off x="3659429" y="2258568"/>
+            <a:ext cx="1581912" cy="292608"/>
           </a:xfrm>
           <a:prstGeom prst="rect">
             <a:avLst/>
@@ -25098,13 +25978,13 @@
             <a:r>
               <a:rPr lang="en-US" sz="1300" b="1" dirty="0">
                 <a:solidFill>
-                  <a:srgbClr val="0F766E"/>
+                  <a:srgbClr val="9D174D"/>
                 </a:solidFill>
                 <a:latin typeface="Trebuchet MS" pitchFamily="34" charset="0"/>
                 <a:ea typeface="Trebuchet MS" pitchFamily="34" charset="-122"/>
                 <a:cs typeface="Trebuchet MS" pitchFamily="34" charset="-120"/>
               </a:rPr>
-              <a:t>run</a:t>
+              <a:t>n</a:t>
             </a:r>
             <a:endParaRPr lang="en-US" sz="1300" dirty="0"/>
           </a:p>
@@ -25118,8 +25998,8 @@
         </p:nvSpPr>
         <p:spPr>
           <a:xfrm>
-            <a:off x="4370832" y="2569464"/>
-            <a:ext cx="1828800" cy="201168"/>
+            <a:off x="3659429" y="2569464"/>
+            <a:ext cx="1581912" cy="201168"/>
           </a:xfrm>
           <a:prstGeom prst="rect">
             <a:avLst/>
@@ -25143,7 +26023,7 @@
                 <a:ea typeface="Calibri" pitchFamily="34" charset="-122"/>
                 <a:cs typeface="Calibri" pitchFamily="34" charset="-120"/>
               </a:rPr>
-              <a:t>to move quickly on foot</a:t>
+              <a:t>doubled consonant before suffix</a:t>
             </a:r>
             <a:endParaRPr lang="en-US" sz="850" dirty="0"/>
           </a:p>
@@ -25151,14 +26031,53 @@
       </p:sp>
       <p:sp>
         <p:nvSpPr>
-          <p:cNvPr id="22" name="Shape 20"/>
-          <p:cNvSpPr/>
-          <p:nvPr/>
-        </p:nvSpPr>
-        <p:spPr>
-          <a:xfrm>
-            <a:off x="6519672" y="2258568"/>
-            <a:ext cx="1828800" cy="292608"/>
+          <p:cNvPr id="22" name="Text 20"/>
+          <p:cNvSpPr/>
+          <p:nvPr/>
+        </p:nvSpPr>
+        <p:spPr>
+          <a:xfrm>
+            <a:off x="3659429" y="2752344"/>
+            <a:ext cx="1581912" cy="182880"/>
+          </a:xfrm>
+          <a:prstGeom prst="rect">
+            <a:avLst/>
+          </a:prstGeom>
+          <a:noFill/>
+          <a:ln/>
+        </p:spPr>
+        <p:txBody>
+          <a:bodyPr wrap="square" lIns="0" tIns="0" rIns="0" bIns="0" rtlCol="0" anchor="t"/>
+          <a:lstStyle/>
+          <a:p>
+            <a:pPr algn="ctr" indent="0" marL="0">
+              <a:buNone/>
+            </a:pPr>
+            <a:r>
+              <a:rPr lang="en-US" sz="700" i="1" dirty="0">
+                <a:solidFill>
+                  <a:srgbClr val="94A3B8"/>
+                </a:solidFill>
+                <a:latin typeface="Calibri" pitchFamily="34" charset="0"/>
+                <a:ea typeface="Calibri" pitchFamily="34" charset="-122"/>
+                <a:cs typeface="Calibri" pitchFamily="34" charset="-120"/>
+              </a:rPr>
+              <a:t>double 'n' before vowel suffix</a:t>
+            </a:r>
+            <a:endParaRPr lang="en-US" sz="700" dirty="0"/>
+          </a:p>
+        </p:txBody>
+      </p:sp>
+      <p:sp>
+        <p:nvSpPr>
+          <p:cNvPr id="23" name="Shape 21"/>
+          <p:cNvSpPr/>
+          <p:nvPr/>
+        </p:nvSpPr>
+        <p:spPr>
+          <a:xfrm>
+            <a:off x="5329123" y="2258568"/>
+            <a:ext cx="1581912" cy="292608"/>
           </a:xfrm>
           <a:prstGeom prst="rect">
             <a:avLst>
@@ -25185,14 +26104,14 @@
       </p:sp>
       <p:sp>
         <p:nvSpPr>
-          <p:cNvPr id="23" name="Text 21"/>
-          <p:cNvSpPr/>
-          <p:nvPr/>
-        </p:nvSpPr>
-        <p:spPr>
-          <a:xfrm>
-            <a:off x="6519672" y="2258568"/>
-            <a:ext cx="1828800" cy="292608"/>
+          <p:cNvPr id="24" name="Text 22"/>
+          <p:cNvSpPr/>
+          <p:nvPr/>
+        </p:nvSpPr>
+        <p:spPr>
+          <a:xfrm>
+            <a:off x="5329123" y="2258568"/>
+            <a:ext cx="1581912" cy="292608"/>
           </a:xfrm>
           <a:prstGeom prst="rect">
             <a:avLst/>
@@ -25224,14 +26143,14 @@
       </p:sp>
       <p:sp>
         <p:nvSpPr>
-          <p:cNvPr id="24" name="Text 22"/>
-          <p:cNvSpPr/>
-          <p:nvPr/>
-        </p:nvSpPr>
-        <p:spPr>
-          <a:xfrm>
-            <a:off x="6519672" y="2569464"/>
-            <a:ext cx="1828800" cy="201168"/>
+          <p:cNvPr id="25" name="Text 23"/>
+          <p:cNvSpPr/>
+          <p:nvPr/>
+        </p:nvSpPr>
+        <p:spPr>
+          <a:xfrm>
+            <a:off x="5329123" y="2569464"/>
+            <a:ext cx="1581912" cy="201168"/>
           </a:xfrm>
           <a:prstGeom prst="rect">
             <a:avLst/>
@@ -25255,7 +26174,7 @@
                 <a:ea typeface="Calibri" pitchFamily="34" charset="-122"/>
                 <a:cs typeface="Calibri" pitchFamily="34" charset="-120"/>
               </a:rPr>
-              <a:t>a person or thing that does something</a:t>
+              <a:t>one who does something</a:t>
             </a:r>
             <a:endParaRPr lang="en-US" sz="850" dirty="0"/>
           </a:p>
@@ -25263,7 +26182,119 @@
       </p:sp>
       <p:sp>
         <p:nvSpPr>
-          <p:cNvPr id="25" name="Shape 23"/>
+          <p:cNvPr id="26" name="Shape 24"/>
+          <p:cNvSpPr/>
+          <p:nvPr/>
+        </p:nvSpPr>
+        <p:spPr>
+          <a:xfrm>
+            <a:off x="6998818" y="2258568"/>
+            <a:ext cx="1581912" cy="292608"/>
+          </a:xfrm>
+          <a:prstGeom prst="rect">
+            <a:avLst>
+              <a:gd name="adj" fmla="val 25000"/>
+            </a:avLst>
+          </a:prstGeom>
+          <a:solidFill>
+            <a:srgbClr val="FCE7F3"/>
+          </a:solidFill>
+          <a:ln w="19050">
+            <a:solidFill>
+              <a:srgbClr val="DB2777"/>
+            </a:solidFill>
+            <a:prstDash val="solid"/>
+          </a:ln>
+          <a:effectLst>
+            <a:outerShdw sx="100000" sy="100000" kx="0" ky="0" algn="bl" rotWithShape="0" blurRad="101600" dist="38100" dir="8100000">
+              <a:srgbClr val="000000">
+                <a:alpha val="12000"/>
+              </a:srgbClr>
+            </a:outerShdw>
+          </a:effectLst>
+        </p:spPr>
+      </p:sp>
+      <p:sp>
+        <p:nvSpPr>
+          <p:cNvPr id="27" name="Text 25"/>
+          <p:cNvSpPr/>
+          <p:nvPr/>
+        </p:nvSpPr>
+        <p:spPr>
+          <a:xfrm>
+            <a:off x="6998818" y="2258568"/>
+            <a:ext cx="1581912" cy="292608"/>
+          </a:xfrm>
+          <a:prstGeom prst="rect">
+            <a:avLst/>
+          </a:prstGeom>
+          <a:noFill/>
+          <a:ln/>
+        </p:spPr>
+        <p:txBody>
+          <a:bodyPr wrap="square" lIns="0" tIns="0" rIns="0" bIns="0" rtlCol="0" anchor="ctr"/>
+          <a:lstStyle/>
+          <a:p>
+            <a:pPr algn="ctr" indent="0" marL="0">
+              <a:buNone/>
+            </a:pPr>
+            <a:r>
+              <a:rPr lang="en-US" sz="1300" b="1" dirty="0">
+                <a:solidFill>
+                  <a:srgbClr val="9D174D"/>
+                </a:solidFill>
+                <a:latin typeface="Trebuchet MS" pitchFamily="34" charset="0"/>
+                <a:ea typeface="Trebuchet MS" pitchFamily="34" charset="-122"/>
+                <a:cs typeface="Trebuchet MS" pitchFamily="34" charset="-120"/>
+              </a:rPr>
+              <a:t>s</a:t>
+            </a:r>
+            <a:endParaRPr lang="en-US" sz="1300" dirty="0"/>
+          </a:p>
+        </p:txBody>
+      </p:sp>
+      <p:sp>
+        <p:nvSpPr>
+          <p:cNvPr id="28" name="Text 26"/>
+          <p:cNvSpPr/>
+          <p:nvPr/>
+        </p:nvSpPr>
+        <p:spPr>
+          <a:xfrm>
+            <a:off x="6998818" y="2569464"/>
+            <a:ext cx="1581912" cy="201168"/>
+          </a:xfrm>
+          <a:prstGeom prst="rect">
+            <a:avLst/>
+          </a:prstGeom>
+          <a:noFill/>
+          <a:ln/>
+        </p:spPr>
+        <p:txBody>
+          <a:bodyPr wrap="square" lIns="0" tIns="0" rIns="0" bIns="0" rtlCol="0" anchor="t"/>
+          <a:lstStyle/>
+          <a:p>
+            <a:pPr algn="ctr" indent="0" marL="0">
+              <a:buNone/>
+            </a:pPr>
+            <a:r>
+              <a:rPr lang="en-US" sz="850" dirty="0">
+                <a:solidFill>
+                  <a:srgbClr val="475569"/>
+                </a:solidFill>
+                <a:latin typeface="Calibri" pitchFamily="34" charset="0"/>
+                <a:ea typeface="Calibri" pitchFamily="34" charset="-122"/>
+                <a:cs typeface="Calibri" pitchFamily="34" charset="-120"/>
+              </a:rPr>
+              <a:t>more than one</a:t>
+            </a:r>
+            <a:endParaRPr lang="en-US" sz="850" dirty="0"/>
+          </a:p>
+        </p:txBody>
+      </p:sp>
+      <p:sp>
+        <p:nvSpPr>
+          <p:cNvPr id="29" name="Shape 27"/>
           <p:cNvSpPr/>
           <p:nvPr/>
         </p:nvSpPr>
@@ -25290,7 +26321,7 @@
       </p:sp>
       <p:sp>
         <p:nvSpPr>
-          <p:cNvPr id="26" name="Text 24"/>
+          <p:cNvPr id="30" name="Text 28"/>
           <p:cNvSpPr/>
           <p:nvPr/>
         </p:nvSpPr>
@@ -25329,7 +26360,7 @@
       </p:sp>
       <p:sp>
         <p:nvSpPr>
-          <p:cNvPr id="27" name="Shape 25"/>
+          <p:cNvPr id="31" name="Shape 29"/>
           <p:cNvSpPr/>
           <p:nvPr/>
         </p:nvSpPr>
@@ -25356,13 +26387,13 @@
       </p:sp>
       <p:sp>
         <p:nvSpPr>
-          <p:cNvPr id="28" name="Shape 26"/>
-          <p:cNvSpPr/>
-          <p:nvPr/>
-        </p:nvSpPr>
-        <p:spPr>
-          <a:xfrm>
-            <a:off x="2313432" y="3364992"/>
+          <p:cNvPr id="32" name="Shape 30"/>
+          <p:cNvSpPr/>
+          <p:nvPr/>
+        </p:nvSpPr>
+        <p:spPr>
+          <a:xfrm>
+            <a:off x="2999232" y="3364992"/>
             <a:ext cx="1645920" cy="475488"/>
           </a:xfrm>
           <a:prstGeom prst="rect">
@@ -25383,13 +26414,13 @@
       </p:sp>
       <p:sp>
         <p:nvSpPr>
-          <p:cNvPr id="29" name="Text 27"/>
-          <p:cNvSpPr/>
-          <p:nvPr/>
-        </p:nvSpPr>
-        <p:spPr>
-          <a:xfrm>
-            <a:off x="2313432" y="3364992"/>
+          <p:cNvPr id="33" name="Text 31"/>
+          <p:cNvSpPr/>
+          <p:nvPr/>
+        </p:nvSpPr>
+        <p:spPr>
+          <a:xfrm>
+            <a:off x="2999232" y="3364992"/>
             <a:ext cx="1645920" cy="475488"/>
           </a:xfrm>
           <a:prstGeom prst="rect">
@@ -25414,7 +26445,7 @@
                 <a:ea typeface="Trebuchet MS" pitchFamily="34" charset="-122"/>
                 <a:cs typeface="Trebuchet MS" pitchFamily="34" charset="-120"/>
               </a:rPr>
-              <a:t>fore</a:t>
+              <a:t>run</a:t>
             </a:r>
             <a:endParaRPr lang="en-US" sz="1400" dirty="0"/>
           </a:p>
@@ -25422,14 +26453,14 @@
       </p:sp>
       <p:sp>
         <p:nvSpPr>
-          <p:cNvPr id="30" name="Text 28"/>
-          <p:cNvSpPr/>
-          <p:nvPr/>
-        </p:nvSpPr>
-        <p:spPr>
-          <a:xfrm>
-            <a:off x="3959352" y="3364992"/>
-            <a:ext cx="411480" cy="475488"/>
+          <p:cNvPr id="34" name="Text 32"/>
+          <p:cNvSpPr/>
+          <p:nvPr/>
+        </p:nvSpPr>
+        <p:spPr>
+          <a:xfrm>
+            <a:off x="4645152" y="3364992"/>
+            <a:ext cx="1097280" cy="475488"/>
           </a:xfrm>
           <a:prstGeom prst="rect">
             <a:avLst/>
@@ -25461,13 +26492,13 @@
       </p:sp>
       <p:sp>
         <p:nvSpPr>
-          <p:cNvPr id="31" name="Shape 29"/>
-          <p:cNvSpPr/>
-          <p:nvPr/>
-        </p:nvSpPr>
-        <p:spPr>
-          <a:xfrm>
-            <a:off x="4370832" y="3364992"/>
+          <p:cNvPr id="35" name="Shape 33"/>
+          <p:cNvSpPr/>
+          <p:nvPr/>
+        </p:nvSpPr>
+        <p:spPr>
+          <a:xfrm>
+            <a:off x="5742432" y="3364992"/>
             <a:ext cx="1645920" cy="475488"/>
           </a:xfrm>
           <a:prstGeom prst="rect">
@@ -25488,13 +26519,13 @@
       </p:sp>
       <p:sp>
         <p:nvSpPr>
-          <p:cNvPr id="32" name="Text 30"/>
-          <p:cNvSpPr/>
-          <p:nvPr/>
-        </p:nvSpPr>
-        <p:spPr>
-          <a:xfrm>
-            <a:off x="4370832" y="3364992"/>
+          <p:cNvPr id="36" name="Text 34"/>
+          <p:cNvSpPr/>
+          <p:nvPr/>
+        </p:nvSpPr>
+        <p:spPr>
+          <a:xfrm>
+            <a:off x="5742432" y="3364992"/>
             <a:ext cx="1645920" cy="475488"/>
           </a:xfrm>
           <a:prstGeom prst="rect">
@@ -25519,7 +26550,7 @@
                 <a:ea typeface="Trebuchet MS" pitchFamily="34" charset="-122"/>
                 <a:cs typeface="Trebuchet MS" pitchFamily="34" charset="-120"/>
               </a:rPr>
-              <a:t>run</a:t>
+              <a:t>ners</a:t>
             </a:r>
             <a:endParaRPr lang="en-US" sz="1400" dirty="0"/>
           </a:p>
@@ -25527,14 +26558,41 @@
       </p:sp>
       <p:sp>
         <p:nvSpPr>
-          <p:cNvPr id="33" name="Text 31"/>
-          <p:cNvSpPr/>
-          <p:nvPr/>
-        </p:nvSpPr>
-        <p:spPr>
-          <a:xfrm>
-            <a:off x="6016752" y="3364992"/>
-            <a:ext cx="411480" cy="475488"/>
+          <p:cNvPr id="37" name="Shape 35"/>
+          <p:cNvSpPr/>
+          <p:nvPr/>
+        </p:nvSpPr>
+        <p:spPr>
+          <a:xfrm>
+            <a:off x="365760" y="4096512"/>
+            <a:ext cx="1371600" cy="804672"/>
+          </a:xfrm>
+          <a:prstGeom prst="rect">
+            <a:avLst>
+              <a:gd name="adj" fmla="val 6818"/>
+            </a:avLst>
+          </a:prstGeom>
+          <a:solidFill>
+            <a:srgbClr val="E2E8F0"/>
+          </a:solidFill>
+          <a:ln w="12700">
+            <a:solidFill>
+              <a:srgbClr val="E2E8F0"/>
+            </a:solidFill>
+            <a:prstDash val="solid"/>
+          </a:ln>
+        </p:spPr>
+      </p:sp>
+      <p:sp>
+        <p:nvSpPr>
+          <p:cNvPr id="38" name="Text 36"/>
+          <p:cNvSpPr/>
+          <p:nvPr/>
+        </p:nvSpPr>
+        <p:spPr>
+          <a:xfrm>
+            <a:off x="365760" y="4096512"/>
+            <a:ext cx="1371600" cy="804672"/>
           </a:xfrm>
           <a:prstGeom prst="rect">
             <a:avLst/>
@@ -25550,96 +26608,30 @@
               <a:buNone/>
             </a:pPr>
             <a:r>
-              <a:rPr lang="en-US" sz="1600" b="1" dirty="0">
-                <a:solidFill>
-                  <a:srgbClr val="0D9488"/>
+              <a:rPr lang="en-US" sz="1100" b="1" dirty="0">
+                <a:solidFill>
+                  <a:srgbClr val="475569"/>
                 </a:solidFill>
                 <a:latin typeface="Trebuchet MS" pitchFamily="34" charset="0"/>
                 <a:ea typeface="Trebuchet MS" pitchFamily="34" charset="-122"/>
                 <a:cs typeface="Trebuchet MS" pitchFamily="34" charset="-120"/>
               </a:rPr>
-              <a:t>·</a:t>
-            </a:r>
-            <a:endParaRPr lang="en-US" sz="1600" dirty="0"/>
-          </a:p>
-        </p:txBody>
-      </p:sp>
-      <p:sp>
-        <p:nvSpPr>
-          <p:cNvPr id="34" name="Shape 32"/>
-          <p:cNvSpPr/>
-          <p:nvPr/>
-        </p:nvSpPr>
-        <p:spPr>
-          <a:xfrm>
-            <a:off x="6428232" y="3364992"/>
-            <a:ext cx="1645920" cy="475488"/>
-          </a:xfrm>
-          <a:prstGeom prst="rect">
-            <a:avLst>
-              <a:gd name="adj" fmla="val 9615"/>
-            </a:avLst>
-          </a:prstGeom>
-          <a:solidFill>
-            <a:srgbClr val="FFFFFF"/>
-          </a:solidFill>
-          <a:ln w="12700">
-            <a:solidFill>
-              <a:srgbClr val="0D9488"/>
-            </a:solidFill>
-            <a:prstDash val="solid"/>
-          </a:ln>
-        </p:spPr>
-      </p:sp>
-      <p:sp>
-        <p:nvSpPr>
-          <p:cNvPr id="35" name="Text 33"/>
-          <p:cNvSpPr/>
-          <p:nvPr/>
-        </p:nvSpPr>
-        <p:spPr>
-          <a:xfrm>
-            <a:off x="6428232" y="3364992"/>
-            <a:ext cx="1645920" cy="475488"/>
-          </a:xfrm>
-          <a:prstGeom prst="rect">
-            <a:avLst/>
-          </a:prstGeom>
-          <a:noFill/>
-          <a:ln/>
-        </p:spPr>
-        <p:txBody>
-          <a:bodyPr wrap="square" lIns="0" tIns="0" rIns="0" bIns="0" rtlCol="0" anchor="ctr"/>
-          <a:lstStyle/>
-          <a:p>
-            <a:pPr algn="ctr" indent="0" marL="0">
-              <a:buNone/>
-            </a:pPr>
-            <a:r>
-              <a:rPr lang="en-US" sz="1400" b="1" dirty="0">
-                <a:solidFill>
-                  <a:srgbClr val="0D9488"/>
-                </a:solidFill>
-                <a:latin typeface="Trebuchet MS" pitchFamily="34" charset="0"/>
-                <a:ea typeface="Trebuchet MS" pitchFamily="34" charset="-122"/>
-                <a:cs typeface="Trebuchet MS" pitchFamily="34" charset="-120"/>
-              </a:rPr>
-              <a:t>ner</a:t>
-            </a:r>
-            <a:endParaRPr lang="en-US" sz="1400" dirty="0"/>
-          </a:p>
-        </p:txBody>
-      </p:sp>
-      <p:sp>
-        <p:nvSpPr>
-          <p:cNvPr id="36" name="Shape 34"/>
-          <p:cNvSpPr/>
-          <p:nvPr/>
-        </p:nvSpPr>
-        <p:spPr>
-          <a:xfrm>
-            <a:off x="365760" y="4096512"/>
-            <a:ext cx="1371600" cy="804672"/>
+              <a:t>Phonemes</a:t>
+            </a:r>
+            <a:endParaRPr lang="en-US" sz="1100" dirty="0"/>
+          </a:p>
+        </p:txBody>
+      </p:sp>
+      <p:sp>
+        <p:nvSpPr>
+          <p:cNvPr id="39" name="Shape 37"/>
+          <p:cNvSpPr/>
+          <p:nvPr/>
+        </p:nvSpPr>
+        <p:spPr>
+          <a:xfrm>
+            <a:off x="1874520" y="4096512"/>
+            <a:ext cx="6903720" cy="804672"/>
           </a:xfrm>
           <a:prstGeom prst="rect">
             <a:avLst>
@@ -25647,85 +26639,19 @@
             </a:avLst>
           </a:prstGeom>
           <a:solidFill>
-            <a:srgbClr val="E2E8F0"/>
+            <a:srgbClr val="F8FAFC"/>
           </a:solidFill>
           <a:ln w="12700">
             <a:solidFill>
               <a:srgbClr val="E2E8F0"/>
             </a:solidFill>
-            <a:prstDash val="solid"/>
-          </a:ln>
-        </p:spPr>
-      </p:sp>
-      <p:sp>
-        <p:nvSpPr>
-          <p:cNvPr id="37" name="Text 35"/>
-          <p:cNvSpPr/>
-          <p:nvPr/>
-        </p:nvSpPr>
-        <p:spPr>
-          <a:xfrm>
-            <a:off x="365760" y="4096512"/>
-            <a:ext cx="1371600" cy="804672"/>
-          </a:xfrm>
-          <a:prstGeom prst="rect">
-            <a:avLst/>
-          </a:prstGeom>
-          <a:noFill/>
-          <a:ln/>
-        </p:spPr>
-        <p:txBody>
-          <a:bodyPr wrap="square" lIns="0" tIns="0" rIns="0" bIns="0" rtlCol="0" anchor="ctr"/>
-          <a:lstStyle/>
-          <a:p>
-            <a:pPr algn="ctr" indent="0" marL="0">
-              <a:buNone/>
-            </a:pPr>
-            <a:r>
-              <a:rPr lang="en-US" sz="1100" b="1" dirty="0">
-                <a:solidFill>
-                  <a:srgbClr val="475569"/>
-                </a:solidFill>
-                <a:latin typeface="Trebuchet MS" pitchFamily="34" charset="0"/>
-                <a:ea typeface="Trebuchet MS" pitchFamily="34" charset="-122"/>
-                <a:cs typeface="Trebuchet MS" pitchFamily="34" charset="-120"/>
-              </a:rPr>
-              <a:t>Phonemes</a:t>
-            </a:r>
-            <a:endParaRPr lang="en-US" sz="1100" dirty="0"/>
-          </a:p>
-        </p:txBody>
-      </p:sp>
-      <p:sp>
-        <p:nvSpPr>
-          <p:cNvPr id="38" name="Shape 36"/>
-          <p:cNvSpPr/>
-          <p:nvPr/>
-        </p:nvSpPr>
-        <p:spPr>
-          <a:xfrm>
-            <a:off x="1874520" y="4096512"/>
-            <a:ext cx="6903720" cy="804672"/>
-          </a:xfrm>
-          <a:prstGeom prst="rect">
-            <a:avLst>
-              <a:gd name="adj" fmla="val 6818"/>
-            </a:avLst>
-          </a:prstGeom>
-          <a:solidFill>
-            <a:srgbClr val="F8FAFC"/>
-          </a:solidFill>
-          <a:ln w="12700">
-            <a:solidFill>
-              <a:srgbClr val="E2E8F0"/>
-            </a:solidFill>
             <a:prstDash val="dash"/>
           </a:ln>
         </p:spPr>
       </p:sp>
       <p:sp>
         <p:nvSpPr>
-          <p:cNvPr id="39" name="Text 37"/>
+          <p:cNvPr id="40" name="Text 38"/>
           <p:cNvSpPr/>
           <p:nvPr/>
         </p:nvSpPr>
@@ -26187,7 +27113,7 @@
                 <a:ea typeface="Trebuchet MS" pitchFamily="34" charset="-122"/>
                 <a:cs typeface="Trebuchet MS" pitchFamily="34" charset="-120"/>
               </a:rPr>
-              <a:t>forerunner</a:t>
+              <a:t>runners</a:t>
             </a:r>
             <a:endParaRPr lang="en-US" sz="2800" dirty="0"/>
           </a:p>
@@ -26267,8 +27193,8 @@
         </p:nvSpPr>
         <p:spPr>
           <a:xfrm>
-            <a:off x="2221992" y="2258568"/>
-            <a:ext cx="1828800" cy="292608"/>
+            <a:off x="1989734" y="2258568"/>
+            <a:ext cx="1581912" cy="292608"/>
           </a:xfrm>
           <a:prstGeom prst="rect">
             <a:avLst>
@@ -26276,11 +27202,11 @@
             </a:avLst>
           </a:prstGeom>
           <a:solidFill>
-            <a:srgbClr val="DDD6FE"/>
+            <a:srgbClr val="CCFBF1"/>
           </a:solidFill>
           <a:ln w="19050">
             <a:solidFill>
-              <a:srgbClr val="7C3AED"/>
+              <a:srgbClr val="0D9488"/>
             </a:solidFill>
             <a:prstDash val="solid"/>
           </a:ln>
@@ -26301,8 +27227,8 @@
         </p:nvSpPr>
         <p:spPr>
           <a:xfrm>
-            <a:off x="2221992" y="2258568"/>
-            <a:ext cx="1828800" cy="292608"/>
+            <a:off x="1989734" y="2258568"/>
+            <a:ext cx="1581912" cy="292608"/>
           </a:xfrm>
           <a:prstGeom prst="rect">
             <a:avLst/>
@@ -26320,13 +27246,13 @@
             <a:r>
               <a:rPr lang="en-US" sz="1300" b="1" dirty="0">
                 <a:solidFill>
-                  <a:srgbClr val="4C1D95"/>
+                  <a:srgbClr val="0F766E"/>
                 </a:solidFill>
                 <a:latin typeface="Trebuchet MS" pitchFamily="34" charset="0"/>
                 <a:ea typeface="Trebuchet MS" pitchFamily="34" charset="-122"/>
                 <a:cs typeface="Trebuchet MS" pitchFamily="34" charset="-120"/>
               </a:rPr>
-              <a:t>fore</a:t>
+              <a:t>run</a:t>
             </a:r>
             <a:endParaRPr lang="en-US" sz="1300" dirty="0"/>
           </a:p>
@@ -26340,8 +27266,8 @@
         </p:nvSpPr>
         <p:spPr>
           <a:xfrm>
-            <a:off x="2221992" y="2569464"/>
-            <a:ext cx="1828800" cy="201168"/>
+            <a:off x="1989734" y="2569464"/>
+            <a:ext cx="1581912" cy="201168"/>
           </a:xfrm>
           <a:prstGeom prst="rect">
             <a:avLst/>
@@ -26365,7 +27291,7 @@
                 <a:ea typeface="Calibri" pitchFamily="34" charset="-122"/>
                 <a:cs typeface="Calibri" pitchFamily="34" charset="-120"/>
               </a:rPr>
-              <a:t>before or in front</a:t>
+              <a:t>to move quickly on foot</a:t>
             </a:r>
             <a:endParaRPr lang="en-US" sz="850" dirty="0"/>
           </a:p>
@@ -26379,8 +27305,8 @@
         </p:nvSpPr>
         <p:spPr>
           <a:xfrm>
-            <a:off x="4370832" y="2258568"/>
-            <a:ext cx="1828800" cy="292608"/>
+            <a:off x="3659429" y="2258568"/>
+            <a:ext cx="1581912" cy="292608"/>
           </a:xfrm>
           <a:prstGeom prst="rect">
             <a:avLst>
@@ -26388,11 +27314,11 @@
             </a:avLst>
           </a:prstGeom>
           <a:solidFill>
-            <a:srgbClr val="CCFBF1"/>
+            <a:srgbClr val="FCE7F3"/>
           </a:solidFill>
           <a:ln w="19050">
             <a:solidFill>
-              <a:srgbClr val="0D9488"/>
+              <a:srgbClr val="DB2777"/>
             </a:solidFill>
             <a:prstDash val="solid"/>
           </a:ln>
@@ -26413,8 +27339,8 @@
         </p:nvSpPr>
         <p:spPr>
           <a:xfrm>
-            <a:off x="4370832" y="2258568"/>
-            <a:ext cx="1828800" cy="292608"/>
+            <a:off x="3659429" y="2258568"/>
+            <a:ext cx="1581912" cy="292608"/>
           </a:xfrm>
           <a:prstGeom prst="rect">
             <a:avLst/>
@@ -26432,13 +27358,13 @@
             <a:r>
               <a:rPr lang="en-US" sz="1300" b="1" dirty="0">
                 <a:solidFill>
-                  <a:srgbClr val="0F766E"/>
+                  <a:srgbClr val="9D174D"/>
                 </a:solidFill>
                 <a:latin typeface="Trebuchet MS" pitchFamily="34" charset="0"/>
                 <a:ea typeface="Trebuchet MS" pitchFamily="34" charset="-122"/>
                 <a:cs typeface="Trebuchet MS" pitchFamily="34" charset="-120"/>
               </a:rPr>
-              <a:t>run</a:t>
+              <a:t>n</a:t>
             </a:r>
             <a:endParaRPr lang="en-US" sz="1300" dirty="0"/>
           </a:p>
@@ -26452,8 +27378,8 @@
         </p:nvSpPr>
         <p:spPr>
           <a:xfrm>
-            <a:off x="4370832" y="2569464"/>
-            <a:ext cx="1828800" cy="201168"/>
+            <a:off x="3659429" y="2569464"/>
+            <a:ext cx="1581912" cy="201168"/>
           </a:xfrm>
           <a:prstGeom prst="rect">
             <a:avLst/>
@@ -26477,7 +27403,7 @@
                 <a:ea typeface="Calibri" pitchFamily="34" charset="-122"/>
                 <a:cs typeface="Calibri" pitchFamily="34" charset="-120"/>
               </a:rPr>
-              <a:t>to move quickly on foot</a:t>
+              <a:t>doubled consonant before suffix</a:t>
             </a:r>
             <a:endParaRPr lang="en-US" sz="850" dirty="0"/>
           </a:p>
@@ -26485,14 +27411,53 @@
       </p:sp>
       <p:sp>
         <p:nvSpPr>
-          <p:cNvPr id="22" name="Shape 20"/>
-          <p:cNvSpPr/>
-          <p:nvPr/>
-        </p:nvSpPr>
-        <p:spPr>
-          <a:xfrm>
-            <a:off x="6519672" y="2258568"/>
-            <a:ext cx="1828800" cy="292608"/>
+          <p:cNvPr id="22" name="Text 20"/>
+          <p:cNvSpPr/>
+          <p:nvPr/>
+        </p:nvSpPr>
+        <p:spPr>
+          <a:xfrm>
+            <a:off x="3659429" y="2752344"/>
+            <a:ext cx="1581912" cy="182880"/>
+          </a:xfrm>
+          <a:prstGeom prst="rect">
+            <a:avLst/>
+          </a:prstGeom>
+          <a:noFill/>
+          <a:ln/>
+        </p:spPr>
+        <p:txBody>
+          <a:bodyPr wrap="square" lIns="0" tIns="0" rIns="0" bIns="0" rtlCol="0" anchor="t"/>
+          <a:lstStyle/>
+          <a:p>
+            <a:pPr algn="ctr" indent="0" marL="0">
+              <a:buNone/>
+            </a:pPr>
+            <a:r>
+              <a:rPr lang="en-US" sz="700" i="1" dirty="0">
+                <a:solidFill>
+                  <a:srgbClr val="94A3B8"/>
+                </a:solidFill>
+                <a:latin typeface="Calibri" pitchFamily="34" charset="0"/>
+                <a:ea typeface="Calibri" pitchFamily="34" charset="-122"/>
+                <a:cs typeface="Calibri" pitchFamily="34" charset="-120"/>
+              </a:rPr>
+              <a:t>double 'n' before vowel suffix</a:t>
+            </a:r>
+            <a:endParaRPr lang="en-US" sz="700" dirty="0"/>
+          </a:p>
+        </p:txBody>
+      </p:sp>
+      <p:sp>
+        <p:nvSpPr>
+          <p:cNvPr id="23" name="Shape 21"/>
+          <p:cNvSpPr/>
+          <p:nvPr/>
+        </p:nvSpPr>
+        <p:spPr>
+          <a:xfrm>
+            <a:off x="5329123" y="2258568"/>
+            <a:ext cx="1581912" cy="292608"/>
           </a:xfrm>
           <a:prstGeom prst="rect">
             <a:avLst>
@@ -26519,14 +27484,14 @@
       </p:sp>
       <p:sp>
         <p:nvSpPr>
-          <p:cNvPr id="23" name="Text 21"/>
-          <p:cNvSpPr/>
-          <p:nvPr/>
-        </p:nvSpPr>
-        <p:spPr>
-          <a:xfrm>
-            <a:off x="6519672" y="2258568"/>
-            <a:ext cx="1828800" cy="292608"/>
+          <p:cNvPr id="24" name="Text 22"/>
+          <p:cNvSpPr/>
+          <p:nvPr/>
+        </p:nvSpPr>
+        <p:spPr>
+          <a:xfrm>
+            <a:off x="5329123" y="2258568"/>
+            <a:ext cx="1581912" cy="292608"/>
           </a:xfrm>
           <a:prstGeom prst="rect">
             <a:avLst/>
@@ -26558,14 +27523,14 @@
       </p:sp>
       <p:sp>
         <p:nvSpPr>
-          <p:cNvPr id="24" name="Text 22"/>
-          <p:cNvSpPr/>
-          <p:nvPr/>
-        </p:nvSpPr>
-        <p:spPr>
-          <a:xfrm>
-            <a:off x="6519672" y="2569464"/>
-            <a:ext cx="1828800" cy="201168"/>
+          <p:cNvPr id="25" name="Text 23"/>
+          <p:cNvSpPr/>
+          <p:nvPr/>
+        </p:nvSpPr>
+        <p:spPr>
+          <a:xfrm>
+            <a:off x="5329123" y="2569464"/>
+            <a:ext cx="1581912" cy="201168"/>
           </a:xfrm>
           <a:prstGeom prst="rect">
             <a:avLst/>
@@ -26589,7 +27554,7 @@
                 <a:ea typeface="Calibri" pitchFamily="34" charset="-122"/>
                 <a:cs typeface="Calibri" pitchFamily="34" charset="-120"/>
               </a:rPr>
-              <a:t>a person or thing that does something</a:t>
+              <a:t>one who does something</a:t>
             </a:r>
             <a:endParaRPr lang="en-US" sz="850" dirty="0"/>
           </a:p>
@@ -26597,7 +27562,119 @@
       </p:sp>
       <p:sp>
         <p:nvSpPr>
-          <p:cNvPr id="25" name="Shape 23"/>
+          <p:cNvPr id="26" name="Shape 24"/>
+          <p:cNvSpPr/>
+          <p:nvPr/>
+        </p:nvSpPr>
+        <p:spPr>
+          <a:xfrm>
+            <a:off x="6998818" y="2258568"/>
+            <a:ext cx="1581912" cy="292608"/>
+          </a:xfrm>
+          <a:prstGeom prst="rect">
+            <a:avLst>
+              <a:gd name="adj" fmla="val 25000"/>
+            </a:avLst>
+          </a:prstGeom>
+          <a:solidFill>
+            <a:srgbClr val="FCE7F3"/>
+          </a:solidFill>
+          <a:ln w="19050">
+            <a:solidFill>
+              <a:srgbClr val="DB2777"/>
+            </a:solidFill>
+            <a:prstDash val="solid"/>
+          </a:ln>
+          <a:effectLst>
+            <a:outerShdw sx="100000" sy="100000" kx="0" ky="0" algn="bl" rotWithShape="0" blurRad="101600" dist="38100" dir="8100000">
+              <a:srgbClr val="000000">
+                <a:alpha val="12000"/>
+              </a:srgbClr>
+            </a:outerShdw>
+          </a:effectLst>
+        </p:spPr>
+      </p:sp>
+      <p:sp>
+        <p:nvSpPr>
+          <p:cNvPr id="27" name="Text 25"/>
+          <p:cNvSpPr/>
+          <p:nvPr/>
+        </p:nvSpPr>
+        <p:spPr>
+          <a:xfrm>
+            <a:off x="6998818" y="2258568"/>
+            <a:ext cx="1581912" cy="292608"/>
+          </a:xfrm>
+          <a:prstGeom prst="rect">
+            <a:avLst/>
+          </a:prstGeom>
+          <a:noFill/>
+          <a:ln/>
+        </p:spPr>
+        <p:txBody>
+          <a:bodyPr wrap="square" lIns="0" tIns="0" rIns="0" bIns="0" rtlCol="0" anchor="ctr"/>
+          <a:lstStyle/>
+          <a:p>
+            <a:pPr algn="ctr" indent="0" marL="0">
+              <a:buNone/>
+            </a:pPr>
+            <a:r>
+              <a:rPr lang="en-US" sz="1300" b="1" dirty="0">
+                <a:solidFill>
+                  <a:srgbClr val="9D174D"/>
+                </a:solidFill>
+                <a:latin typeface="Trebuchet MS" pitchFamily="34" charset="0"/>
+                <a:ea typeface="Trebuchet MS" pitchFamily="34" charset="-122"/>
+                <a:cs typeface="Trebuchet MS" pitchFamily="34" charset="-120"/>
+              </a:rPr>
+              <a:t>s</a:t>
+            </a:r>
+            <a:endParaRPr lang="en-US" sz="1300" dirty="0"/>
+          </a:p>
+        </p:txBody>
+      </p:sp>
+      <p:sp>
+        <p:nvSpPr>
+          <p:cNvPr id="28" name="Text 26"/>
+          <p:cNvSpPr/>
+          <p:nvPr/>
+        </p:nvSpPr>
+        <p:spPr>
+          <a:xfrm>
+            <a:off x="6998818" y="2569464"/>
+            <a:ext cx="1581912" cy="201168"/>
+          </a:xfrm>
+          <a:prstGeom prst="rect">
+            <a:avLst/>
+          </a:prstGeom>
+          <a:noFill/>
+          <a:ln/>
+        </p:spPr>
+        <p:txBody>
+          <a:bodyPr wrap="square" lIns="0" tIns="0" rIns="0" bIns="0" rtlCol="0" anchor="t"/>
+          <a:lstStyle/>
+          <a:p>
+            <a:pPr algn="ctr" indent="0" marL="0">
+              <a:buNone/>
+            </a:pPr>
+            <a:r>
+              <a:rPr lang="en-US" sz="850" dirty="0">
+                <a:solidFill>
+                  <a:srgbClr val="475569"/>
+                </a:solidFill>
+                <a:latin typeface="Calibri" pitchFamily="34" charset="0"/>
+                <a:ea typeface="Calibri" pitchFamily="34" charset="-122"/>
+                <a:cs typeface="Calibri" pitchFamily="34" charset="-120"/>
+              </a:rPr>
+              <a:t>more than one</a:t>
+            </a:r>
+            <a:endParaRPr lang="en-US" sz="850" dirty="0"/>
+          </a:p>
+        </p:txBody>
+      </p:sp>
+      <p:sp>
+        <p:nvSpPr>
+          <p:cNvPr id="29" name="Shape 27"/>
           <p:cNvSpPr/>
           <p:nvPr/>
         </p:nvSpPr>
@@ -26624,7 +27701,7 @@
       </p:sp>
       <p:sp>
         <p:nvSpPr>
-          <p:cNvPr id="26" name="Text 24"/>
+          <p:cNvPr id="30" name="Text 28"/>
           <p:cNvSpPr/>
           <p:nvPr/>
         </p:nvSpPr>
@@ -26663,7 +27740,7 @@
       </p:sp>
       <p:sp>
         <p:nvSpPr>
-          <p:cNvPr id="27" name="Shape 25"/>
+          <p:cNvPr id="31" name="Shape 29"/>
           <p:cNvSpPr/>
           <p:nvPr/>
         </p:nvSpPr>
@@ -26690,13 +27767,13 @@
       </p:sp>
       <p:sp>
         <p:nvSpPr>
-          <p:cNvPr id="28" name="Shape 26"/>
-          <p:cNvSpPr/>
-          <p:nvPr/>
-        </p:nvSpPr>
-        <p:spPr>
-          <a:xfrm>
-            <a:off x="2313432" y="3364992"/>
+          <p:cNvPr id="32" name="Shape 30"/>
+          <p:cNvSpPr/>
+          <p:nvPr/>
+        </p:nvSpPr>
+        <p:spPr>
+          <a:xfrm>
+            <a:off x="2999232" y="3364992"/>
             <a:ext cx="1645920" cy="475488"/>
           </a:xfrm>
           <a:prstGeom prst="rect">
@@ -26717,13 +27794,13 @@
       </p:sp>
       <p:sp>
         <p:nvSpPr>
-          <p:cNvPr id="29" name="Text 27"/>
-          <p:cNvSpPr/>
-          <p:nvPr/>
-        </p:nvSpPr>
-        <p:spPr>
-          <a:xfrm>
-            <a:off x="2313432" y="3364992"/>
+          <p:cNvPr id="33" name="Text 31"/>
+          <p:cNvSpPr/>
+          <p:nvPr/>
+        </p:nvSpPr>
+        <p:spPr>
+          <a:xfrm>
+            <a:off x="2999232" y="3364992"/>
             <a:ext cx="1645920" cy="475488"/>
           </a:xfrm>
           <a:prstGeom prst="rect">
@@ -26748,7 +27825,7 @@
                 <a:ea typeface="Trebuchet MS" pitchFamily="34" charset="-122"/>
                 <a:cs typeface="Trebuchet MS" pitchFamily="34" charset="-120"/>
               </a:rPr>
-              <a:t>fore</a:t>
+              <a:t>run</a:t>
             </a:r>
             <a:endParaRPr lang="en-US" sz="1400" dirty="0"/>
           </a:p>
@@ -26756,14 +27833,14 @@
       </p:sp>
       <p:sp>
         <p:nvSpPr>
-          <p:cNvPr id="30" name="Text 28"/>
-          <p:cNvSpPr/>
-          <p:nvPr/>
-        </p:nvSpPr>
-        <p:spPr>
-          <a:xfrm>
-            <a:off x="3959352" y="3364992"/>
-            <a:ext cx="411480" cy="475488"/>
+          <p:cNvPr id="34" name="Text 32"/>
+          <p:cNvSpPr/>
+          <p:nvPr/>
+        </p:nvSpPr>
+        <p:spPr>
+          <a:xfrm>
+            <a:off x="4645152" y="3364992"/>
+            <a:ext cx="1097280" cy="475488"/>
           </a:xfrm>
           <a:prstGeom prst="rect">
             <a:avLst/>
@@ -26795,13 +27872,13 @@
       </p:sp>
       <p:sp>
         <p:nvSpPr>
-          <p:cNvPr id="31" name="Shape 29"/>
-          <p:cNvSpPr/>
-          <p:nvPr/>
-        </p:nvSpPr>
-        <p:spPr>
-          <a:xfrm>
-            <a:off x="4370832" y="3364992"/>
+          <p:cNvPr id="35" name="Shape 33"/>
+          <p:cNvSpPr/>
+          <p:nvPr/>
+        </p:nvSpPr>
+        <p:spPr>
+          <a:xfrm>
+            <a:off x="5742432" y="3364992"/>
             <a:ext cx="1645920" cy="475488"/>
           </a:xfrm>
           <a:prstGeom prst="rect">
@@ -26822,13 +27899,13 @@
       </p:sp>
       <p:sp>
         <p:nvSpPr>
-          <p:cNvPr id="32" name="Text 30"/>
-          <p:cNvSpPr/>
-          <p:nvPr/>
-        </p:nvSpPr>
-        <p:spPr>
-          <a:xfrm>
-            <a:off x="4370832" y="3364992"/>
+          <p:cNvPr id="36" name="Text 34"/>
+          <p:cNvSpPr/>
+          <p:nvPr/>
+        </p:nvSpPr>
+        <p:spPr>
+          <a:xfrm>
+            <a:off x="5742432" y="3364992"/>
             <a:ext cx="1645920" cy="475488"/>
           </a:xfrm>
           <a:prstGeom prst="rect">
@@ -26853,7 +27930,7 @@
                 <a:ea typeface="Trebuchet MS" pitchFamily="34" charset="-122"/>
                 <a:cs typeface="Trebuchet MS" pitchFamily="34" charset="-120"/>
               </a:rPr>
-              <a:t>run</a:t>
+              <a:t>ners</a:t>
             </a:r>
             <a:endParaRPr lang="en-US" sz="1400" dirty="0"/>
           </a:p>
@@ -26861,14 +27938,41 @@
       </p:sp>
       <p:sp>
         <p:nvSpPr>
-          <p:cNvPr id="33" name="Text 31"/>
-          <p:cNvSpPr/>
-          <p:nvPr/>
-        </p:nvSpPr>
-        <p:spPr>
-          <a:xfrm>
-            <a:off x="6016752" y="3364992"/>
-            <a:ext cx="411480" cy="475488"/>
+          <p:cNvPr id="37" name="Shape 35"/>
+          <p:cNvSpPr/>
+          <p:nvPr/>
+        </p:nvSpPr>
+        <p:spPr>
+          <a:xfrm>
+            <a:off x="365760" y="4096512"/>
+            <a:ext cx="1371600" cy="804672"/>
+          </a:xfrm>
+          <a:prstGeom prst="rect">
+            <a:avLst>
+              <a:gd name="adj" fmla="val 6818"/>
+            </a:avLst>
+          </a:prstGeom>
+          <a:solidFill>
+            <a:srgbClr val="E2E8F0"/>
+          </a:solidFill>
+          <a:ln w="12700">
+            <a:solidFill>
+              <a:srgbClr val="E2E8F0"/>
+            </a:solidFill>
+            <a:prstDash val="solid"/>
+          </a:ln>
+        </p:spPr>
+      </p:sp>
+      <p:sp>
+        <p:nvSpPr>
+          <p:cNvPr id="38" name="Text 36"/>
+          <p:cNvSpPr/>
+          <p:nvPr/>
+        </p:nvSpPr>
+        <p:spPr>
+          <a:xfrm>
+            <a:off x="365760" y="4096512"/>
+            <a:ext cx="1371600" cy="804672"/>
           </a:xfrm>
           <a:prstGeom prst="rect">
             <a:avLst/>
@@ -26884,57 +27988,84 @@
               <a:buNone/>
             </a:pPr>
             <a:r>
-              <a:rPr lang="en-US" sz="1600" b="1" dirty="0">
-                <a:solidFill>
-                  <a:srgbClr val="0D9488"/>
+              <a:rPr lang="en-US" sz="1100" b="1" dirty="0">
+                <a:solidFill>
+                  <a:srgbClr val="475569"/>
                 </a:solidFill>
                 <a:latin typeface="Trebuchet MS" pitchFamily="34" charset="0"/>
                 <a:ea typeface="Trebuchet MS" pitchFamily="34" charset="-122"/>
                 <a:cs typeface="Trebuchet MS" pitchFamily="34" charset="-120"/>
               </a:rPr>
-              <a:t>·</a:t>
-            </a:r>
-            <a:endParaRPr lang="en-US" sz="1600" dirty="0"/>
-          </a:p>
-        </p:txBody>
-      </p:sp>
-      <p:sp>
-        <p:nvSpPr>
-          <p:cNvPr id="34" name="Shape 32"/>
-          <p:cNvSpPr/>
-          <p:nvPr/>
-        </p:nvSpPr>
-        <p:spPr>
-          <a:xfrm>
-            <a:off x="6428232" y="3364992"/>
-            <a:ext cx="1645920" cy="475488"/>
+              <a:t>Phonemes</a:t>
+            </a:r>
+            <a:endParaRPr lang="en-US" sz="1100" dirty="0"/>
+          </a:p>
+        </p:txBody>
+      </p:sp>
+      <p:sp>
+        <p:nvSpPr>
+          <p:cNvPr id="39" name="Shape 37"/>
+          <p:cNvSpPr/>
+          <p:nvPr/>
+        </p:nvSpPr>
+        <p:spPr>
+          <a:xfrm>
+            <a:off x="1874520" y="4096512"/>
+            <a:ext cx="6903720" cy="658368"/>
           </a:xfrm>
           <a:prstGeom prst="rect">
             <a:avLst>
-              <a:gd name="adj" fmla="val 9615"/>
+              <a:gd name="adj" fmla="val 8333"/>
             </a:avLst>
           </a:prstGeom>
           <a:solidFill>
+            <a:srgbClr val="FCE7F3"/>
+          </a:solidFill>
+          <a:ln w="12700">
+            <a:solidFill>
+              <a:srgbClr val="DB2777"/>
+            </a:solidFill>
+            <a:prstDash val="solid"/>
+          </a:ln>
+        </p:spPr>
+      </p:sp>
+      <p:sp>
+        <p:nvSpPr>
+          <p:cNvPr id="40" name="Shape 38"/>
+          <p:cNvSpPr/>
+          <p:nvPr/>
+        </p:nvSpPr>
+        <p:spPr>
+          <a:xfrm>
+            <a:off x="2427732" y="4169664"/>
+            <a:ext cx="685800" cy="475488"/>
+          </a:xfrm>
+          <a:prstGeom prst="rect">
+            <a:avLst>
+              <a:gd name="adj" fmla="val 7692"/>
+            </a:avLst>
+          </a:prstGeom>
+          <a:solidFill>
             <a:srgbClr val="FFFFFF"/>
           </a:solidFill>
           <a:ln w="12700">
             <a:solidFill>
-              <a:srgbClr val="0D9488"/>
-            </a:solidFill>
-            <a:prstDash val="solid"/>
-          </a:ln>
-        </p:spPr>
-      </p:sp>
-      <p:sp>
-        <p:nvSpPr>
-          <p:cNvPr id="35" name="Text 33"/>
-          <p:cNvSpPr/>
-          <p:nvPr/>
-        </p:nvSpPr>
-        <p:spPr>
-          <a:xfrm>
-            <a:off x="6428232" y="3364992"/>
-            <a:ext cx="1645920" cy="475488"/>
+              <a:srgbClr val="DB2777"/>
+            </a:solidFill>
+            <a:prstDash val="solid"/>
+          </a:ln>
+        </p:spPr>
+      </p:sp>
+      <p:sp>
+        <p:nvSpPr>
+          <p:cNvPr id="41" name="Text 39"/>
+          <p:cNvSpPr/>
+          <p:nvPr/>
+        </p:nvSpPr>
+        <p:spPr>
+          <a:xfrm>
+            <a:off x="2427732" y="4169664"/>
+            <a:ext cx="685800" cy="475488"/>
           </a:xfrm>
           <a:prstGeom prst="rect">
             <a:avLst/>
@@ -26950,57 +28081,57 @@
               <a:buNone/>
             </a:pPr>
             <a:r>
-              <a:rPr lang="en-US" sz="1400" b="1" dirty="0">
-                <a:solidFill>
-                  <a:srgbClr val="0D9488"/>
+              <a:rPr lang="en-US" sz="900" b="1" dirty="0">
+                <a:solidFill>
+                  <a:srgbClr val="9D174D"/>
                 </a:solidFill>
                 <a:latin typeface="Trebuchet MS" pitchFamily="34" charset="0"/>
                 <a:ea typeface="Trebuchet MS" pitchFamily="34" charset="-122"/>
                 <a:cs typeface="Trebuchet MS" pitchFamily="34" charset="-120"/>
               </a:rPr>
-              <a:t>ner</a:t>
-            </a:r>
-            <a:endParaRPr lang="en-US" sz="1400" dirty="0"/>
-          </a:p>
-        </p:txBody>
-      </p:sp>
-      <p:sp>
-        <p:nvSpPr>
-          <p:cNvPr id="36" name="Shape 34"/>
-          <p:cNvSpPr/>
-          <p:nvPr/>
-        </p:nvSpPr>
-        <p:spPr>
-          <a:xfrm>
-            <a:off x="365760" y="4096512"/>
-            <a:ext cx="1371600" cy="804672"/>
+              <a:t>r</a:t>
+            </a:r>
+            <a:endParaRPr lang="en-US" sz="900" dirty="0"/>
+          </a:p>
+        </p:txBody>
+      </p:sp>
+      <p:sp>
+        <p:nvSpPr>
+          <p:cNvPr id="42" name="Shape 40"/>
+          <p:cNvSpPr/>
+          <p:nvPr/>
+        </p:nvSpPr>
+        <p:spPr>
+          <a:xfrm>
+            <a:off x="3639312" y="4169664"/>
+            <a:ext cx="685800" cy="475488"/>
           </a:xfrm>
           <a:prstGeom prst="rect">
             <a:avLst>
-              <a:gd name="adj" fmla="val 6818"/>
+              <a:gd name="adj" fmla="val 7692"/>
             </a:avLst>
           </a:prstGeom>
           <a:solidFill>
-            <a:srgbClr val="E2E8F0"/>
-          </a:solidFill>
-          <a:ln w="12700">
-            <a:solidFill>
-              <a:srgbClr val="E2E8F0"/>
-            </a:solidFill>
-            <a:prstDash val="solid"/>
-          </a:ln>
-        </p:spPr>
-      </p:sp>
-      <p:sp>
-        <p:nvSpPr>
-          <p:cNvPr id="37" name="Text 35"/>
-          <p:cNvSpPr/>
-          <p:nvPr/>
-        </p:nvSpPr>
-        <p:spPr>
-          <a:xfrm>
-            <a:off x="365760" y="4096512"/>
-            <a:ext cx="1371600" cy="804672"/>
+            <a:srgbClr val="FFFFFF"/>
+          </a:solidFill>
+          <a:ln w="12700">
+            <a:solidFill>
+              <a:srgbClr val="DB2777"/>
+            </a:solidFill>
+            <a:prstDash val="solid"/>
+          </a:ln>
+        </p:spPr>
+      </p:sp>
+      <p:sp>
+        <p:nvSpPr>
+          <p:cNvPr id="43" name="Text 41"/>
+          <p:cNvSpPr/>
+          <p:nvPr/>
+        </p:nvSpPr>
+        <p:spPr>
+          <a:xfrm>
+            <a:off x="3639312" y="4169664"/>
+            <a:ext cx="685800" cy="475488"/>
           </a:xfrm>
           <a:prstGeom prst="rect">
             <a:avLst/>
@@ -27016,56 +28147,29 @@
               <a:buNone/>
             </a:pPr>
             <a:r>
-              <a:rPr lang="en-US" sz="1100" b="1" dirty="0">
-                <a:solidFill>
-                  <a:srgbClr val="475569"/>
+              <a:rPr lang="en-US" sz="900" b="1" dirty="0">
+                <a:solidFill>
+                  <a:srgbClr val="9D174D"/>
                 </a:solidFill>
                 <a:latin typeface="Trebuchet MS" pitchFamily="34" charset="0"/>
                 <a:ea typeface="Trebuchet MS" pitchFamily="34" charset="-122"/>
                 <a:cs typeface="Trebuchet MS" pitchFamily="34" charset="-120"/>
               </a:rPr>
-              <a:t>Phonemes</a:t>
-            </a:r>
-            <a:endParaRPr lang="en-US" sz="1100" dirty="0"/>
-          </a:p>
-        </p:txBody>
-      </p:sp>
-      <p:sp>
-        <p:nvSpPr>
-          <p:cNvPr id="38" name="Shape 36"/>
-          <p:cNvSpPr/>
-          <p:nvPr/>
-        </p:nvSpPr>
-        <p:spPr>
-          <a:xfrm>
-            <a:off x="1874520" y="4096512"/>
-            <a:ext cx="6903720" cy="658368"/>
-          </a:xfrm>
-          <a:prstGeom prst="rect">
-            <a:avLst>
-              <a:gd name="adj" fmla="val 8333"/>
-            </a:avLst>
-          </a:prstGeom>
-          <a:solidFill>
-            <a:srgbClr val="FCE7F3"/>
-          </a:solidFill>
-          <a:ln w="12700">
-            <a:solidFill>
-              <a:srgbClr val="DB2777"/>
-            </a:solidFill>
-            <a:prstDash val="solid"/>
-          </a:ln>
-        </p:spPr>
-      </p:sp>
-      <p:sp>
-        <p:nvSpPr>
-          <p:cNvPr id="39" name="Shape 37"/>
-          <p:cNvSpPr/>
-          <p:nvPr/>
-        </p:nvSpPr>
-        <p:spPr>
-          <a:xfrm>
-            <a:off x="2254649" y="4169664"/>
+              <a:t>u</a:t>
+            </a:r>
+            <a:endParaRPr lang="en-US" sz="900" dirty="0"/>
+          </a:p>
+        </p:txBody>
+      </p:sp>
+      <p:sp>
+        <p:nvSpPr>
+          <p:cNvPr id="44" name="Shape 42"/>
+          <p:cNvSpPr/>
+          <p:nvPr/>
+        </p:nvSpPr>
+        <p:spPr>
+          <a:xfrm>
+            <a:off x="4850892" y="4169664"/>
             <a:ext cx="685800" cy="475488"/>
           </a:xfrm>
           <a:prstGeom prst="rect">
@@ -27086,13 +28190,13 @@
       </p:sp>
       <p:sp>
         <p:nvSpPr>
-          <p:cNvPr id="40" name="Text 38"/>
-          <p:cNvSpPr/>
-          <p:nvPr/>
-        </p:nvSpPr>
-        <p:spPr>
-          <a:xfrm>
-            <a:off x="2254649" y="4169664"/>
+          <p:cNvPr id="45" name="Text 43"/>
+          <p:cNvSpPr/>
+          <p:nvPr/>
+        </p:nvSpPr>
+        <p:spPr>
+          <a:xfrm>
+            <a:off x="4850892" y="4169664"/>
             <a:ext cx="685800" cy="475488"/>
           </a:xfrm>
           <a:prstGeom prst="rect">
@@ -27117,7 +28221,7 @@
                 <a:ea typeface="Trebuchet MS" pitchFamily="34" charset="-122"/>
                 <a:cs typeface="Trebuchet MS" pitchFamily="34" charset="-120"/>
               </a:rPr>
-              <a:t>f</a:t>
+              <a:t>nn</a:t>
             </a:r>
             <a:endParaRPr lang="en-US" sz="900" dirty="0"/>
           </a:p>
@@ -27125,13 +28229,13 @@
       </p:sp>
       <p:sp>
         <p:nvSpPr>
-          <p:cNvPr id="41" name="Shape 39"/>
-          <p:cNvSpPr/>
-          <p:nvPr/>
-        </p:nvSpPr>
-        <p:spPr>
-          <a:xfrm>
-            <a:off x="3293146" y="4169664"/>
+          <p:cNvPr id="46" name="Shape 44"/>
+          <p:cNvSpPr/>
+          <p:nvPr/>
+        </p:nvSpPr>
+        <p:spPr>
+          <a:xfrm>
+            <a:off x="6062472" y="4169664"/>
             <a:ext cx="685800" cy="475488"/>
           </a:xfrm>
           <a:prstGeom prst="rect">
@@ -27152,13 +28256,13 @@
       </p:sp>
       <p:sp>
         <p:nvSpPr>
-          <p:cNvPr id="42" name="Text 40"/>
-          <p:cNvSpPr/>
-          <p:nvPr/>
-        </p:nvSpPr>
-        <p:spPr>
-          <a:xfrm>
-            <a:off x="3293146" y="4169664"/>
+          <p:cNvPr id="47" name="Text 45"/>
+          <p:cNvSpPr/>
+          <p:nvPr/>
+        </p:nvSpPr>
+        <p:spPr>
+          <a:xfrm>
+            <a:off x="6062472" y="4169664"/>
             <a:ext cx="685800" cy="475488"/>
           </a:xfrm>
           <a:prstGeom prst="rect">
@@ -27183,7 +28287,7 @@
                 <a:ea typeface="Trebuchet MS" pitchFamily="34" charset="-122"/>
                 <a:cs typeface="Trebuchet MS" pitchFamily="34" charset="-120"/>
               </a:rPr>
-              <a:t>or</a:t>
+              <a:t>er</a:t>
             </a:r>
             <a:endParaRPr lang="en-US" sz="900" dirty="0"/>
           </a:p>
@@ -27191,13 +28295,13 @@
       </p:sp>
       <p:sp>
         <p:nvSpPr>
-          <p:cNvPr id="43" name="Shape 41"/>
-          <p:cNvSpPr/>
-          <p:nvPr/>
-        </p:nvSpPr>
-        <p:spPr>
-          <a:xfrm>
-            <a:off x="4331643" y="4169664"/>
+          <p:cNvPr id="48" name="Shape 46"/>
+          <p:cNvSpPr/>
+          <p:nvPr/>
+        </p:nvSpPr>
+        <p:spPr>
+          <a:xfrm>
+            <a:off x="7274052" y="4169664"/>
             <a:ext cx="685800" cy="475488"/>
           </a:xfrm>
           <a:prstGeom prst="rect">
@@ -27218,13 +28322,13 @@
       </p:sp>
       <p:sp>
         <p:nvSpPr>
-          <p:cNvPr id="44" name="Text 42"/>
-          <p:cNvSpPr/>
-          <p:nvPr/>
-        </p:nvSpPr>
-        <p:spPr>
-          <a:xfrm>
-            <a:off x="4331643" y="4169664"/>
+          <p:cNvPr id="49" name="Text 47"/>
+          <p:cNvSpPr/>
+          <p:nvPr/>
+        </p:nvSpPr>
+        <p:spPr>
+          <a:xfrm>
+            <a:off x="7274052" y="4169664"/>
             <a:ext cx="685800" cy="475488"/>
           </a:xfrm>
           <a:prstGeom prst="rect">
@@ -27249,205 +28353,7 @@
                 <a:ea typeface="Trebuchet MS" pitchFamily="34" charset="-122"/>
                 <a:cs typeface="Trebuchet MS" pitchFamily="34" charset="-120"/>
               </a:rPr>
-              <a:t>r</a:t>
-            </a:r>
-            <a:endParaRPr lang="en-US" sz="900" dirty="0"/>
-          </a:p>
-        </p:txBody>
-      </p:sp>
-      <p:sp>
-        <p:nvSpPr>
-          <p:cNvPr id="45" name="Shape 43"/>
-          <p:cNvSpPr/>
-          <p:nvPr/>
-        </p:nvSpPr>
-        <p:spPr>
-          <a:xfrm>
-            <a:off x="5370141" y="4169664"/>
-            <a:ext cx="685800" cy="475488"/>
-          </a:xfrm>
-          <a:prstGeom prst="rect">
-            <a:avLst>
-              <a:gd name="adj" fmla="val 7692"/>
-            </a:avLst>
-          </a:prstGeom>
-          <a:solidFill>
-            <a:srgbClr val="FFFFFF"/>
-          </a:solidFill>
-          <a:ln w="12700">
-            <a:solidFill>
-              <a:srgbClr val="DB2777"/>
-            </a:solidFill>
-            <a:prstDash val="solid"/>
-          </a:ln>
-        </p:spPr>
-      </p:sp>
-      <p:sp>
-        <p:nvSpPr>
-          <p:cNvPr id="46" name="Text 44"/>
-          <p:cNvSpPr/>
-          <p:nvPr/>
-        </p:nvSpPr>
-        <p:spPr>
-          <a:xfrm>
-            <a:off x="5370141" y="4169664"/>
-            <a:ext cx="685800" cy="475488"/>
-          </a:xfrm>
-          <a:prstGeom prst="rect">
-            <a:avLst/>
-          </a:prstGeom>
-          <a:noFill/>
-          <a:ln/>
-        </p:spPr>
-        <p:txBody>
-          <a:bodyPr wrap="square" lIns="0" tIns="0" rIns="0" bIns="0" rtlCol="0" anchor="ctr"/>
-          <a:lstStyle/>
-          <a:p>
-            <a:pPr algn="ctr" indent="0" marL="0">
-              <a:buNone/>
-            </a:pPr>
-            <a:r>
-              <a:rPr lang="en-US" sz="900" b="1" dirty="0">
-                <a:solidFill>
-                  <a:srgbClr val="9D174D"/>
-                </a:solidFill>
-                <a:latin typeface="Trebuchet MS" pitchFamily="34" charset="0"/>
-                <a:ea typeface="Trebuchet MS" pitchFamily="34" charset="-122"/>
-                <a:cs typeface="Trebuchet MS" pitchFamily="34" charset="-120"/>
-              </a:rPr>
-              <a:t>u</a:t>
-            </a:r>
-            <a:endParaRPr lang="en-US" sz="900" dirty="0"/>
-          </a:p>
-        </p:txBody>
-      </p:sp>
-      <p:sp>
-        <p:nvSpPr>
-          <p:cNvPr id="47" name="Shape 45"/>
-          <p:cNvSpPr/>
-          <p:nvPr/>
-        </p:nvSpPr>
-        <p:spPr>
-          <a:xfrm>
-            <a:off x="6408638" y="4169664"/>
-            <a:ext cx="685800" cy="475488"/>
-          </a:xfrm>
-          <a:prstGeom prst="rect">
-            <a:avLst>
-              <a:gd name="adj" fmla="val 7692"/>
-            </a:avLst>
-          </a:prstGeom>
-          <a:solidFill>
-            <a:srgbClr val="FFFFFF"/>
-          </a:solidFill>
-          <a:ln w="12700">
-            <a:solidFill>
-              <a:srgbClr val="DB2777"/>
-            </a:solidFill>
-            <a:prstDash val="solid"/>
-          </a:ln>
-        </p:spPr>
-      </p:sp>
-      <p:sp>
-        <p:nvSpPr>
-          <p:cNvPr id="48" name="Text 46"/>
-          <p:cNvSpPr/>
-          <p:nvPr/>
-        </p:nvSpPr>
-        <p:spPr>
-          <a:xfrm>
-            <a:off x="6408638" y="4169664"/>
-            <a:ext cx="685800" cy="475488"/>
-          </a:xfrm>
-          <a:prstGeom prst="rect">
-            <a:avLst/>
-          </a:prstGeom>
-          <a:noFill/>
-          <a:ln/>
-        </p:spPr>
-        <p:txBody>
-          <a:bodyPr wrap="square" lIns="0" tIns="0" rIns="0" bIns="0" rtlCol="0" anchor="ctr"/>
-          <a:lstStyle/>
-          <a:p>
-            <a:pPr algn="ctr" indent="0" marL="0">
-              <a:buNone/>
-            </a:pPr>
-            <a:r>
-              <a:rPr lang="en-US" sz="900" b="1" dirty="0">
-                <a:solidFill>
-                  <a:srgbClr val="9D174D"/>
-                </a:solidFill>
-                <a:latin typeface="Trebuchet MS" pitchFamily="34" charset="0"/>
-                <a:ea typeface="Trebuchet MS" pitchFamily="34" charset="-122"/>
-                <a:cs typeface="Trebuchet MS" pitchFamily="34" charset="-120"/>
-              </a:rPr>
-              <a:t>nn</a:t>
-            </a:r>
-            <a:endParaRPr lang="en-US" sz="900" dirty="0"/>
-          </a:p>
-        </p:txBody>
-      </p:sp>
-      <p:sp>
-        <p:nvSpPr>
-          <p:cNvPr id="49" name="Shape 47"/>
-          <p:cNvSpPr/>
-          <p:nvPr/>
-        </p:nvSpPr>
-        <p:spPr>
-          <a:xfrm>
-            <a:off x="7447135" y="4169664"/>
-            <a:ext cx="685800" cy="475488"/>
-          </a:xfrm>
-          <a:prstGeom prst="rect">
-            <a:avLst>
-              <a:gd name="adj" fmla="val 7692"/>
-            </a:avLst>
-          </a:prstGeom>
-          <a:solidFill>
-            <a:srgbClr val="FFFFFF"/>
-          </a:solidFill>
-          <a:ln w="12700">
-            <a:solidFill>
-              <a:srgbClr val="DB2777"/>
-            </a:solidFill>
-            <a:prstDash val="solid"/>
-          </a:ln>
-        </p:spPr>
-      </p:sp>
-      <p:sp>
-        <p:nvSpPr>
-          <p:cNvPr id="50" name="Text 48"/>
-          <p:cNvSpPr/>
-          <p:nvPr/>
-        </p:nvSpPr>
-        <p:spPr>
-          <a:xfrm>
-            <a:off x="7447135" y="4169664"/>
-            <a:ext cx="685800" cy="475488"/>
-          </a:xfrm>
-          <a:prstGeom prst="rect">
-            <a:avLst/>
-          </a:prstGeom>
-          <a:noFill/>
-          <a:ln/>
-        </p:spPr>
-        <p:txBody>
-          <a:bodyPr wrap="square" lIns="0" tIns="0" rIns="0" bIns="0" rtlCol="0" anchor="ctr"/>
-          <a:lstStyle/>
-          <a:p>
-            <a:pPr algn="ctr" indent="0" marL="0">
-              <a:buNone/>
-            </a:pPr>
-            <a:r>
-              <a:rPr lang="en-US" sz="900" b="1" dirty="0">
-                <a:solidFill>
-                  <a:srgbClr val="9D174D"/>
-                </a:solidFill>
-                <a:latin typeface="Trebuchet MS" pitchFamily="34" charset="0"/>
-                <a:ea typeface="Trebuchet MS" pitchFamily="34" charset="-122"/>
-                <a:cs typeface="Trebuchet MS" pitchFamily="34" charset="-120"/>
-              </a:rPr>
-              <a:t>er</a:t>
+              <a:t>s</a:t>
             </a:r>
             <a:endParaRPr lang="en-US" sz="900" dirty="0"/>
           </a:p>
@@ -27878,7 +28784,7 @@
                 <a:ea typeface="Trebuchet MS" pitchFamily="34" charset="-122"/>
                 <a:cs typeface="Trebuchet MS" pitchFamily="34" charset="-120"/>
               </a:rPr>
-              <a:t>runners</a:t>
+              <a:t>rerun</a:t>
             </a:r>
             <a:endParaRPr lang="en-US" sz="2800" dirty="0"/>
           </a:p>
@@ -28705,7 +29611,7 @@
                 <a:ea typeface="Trebuchet MS" pitchFamily="34" charset="-122"/>
                 <a:cs typeface="Trebuchet MS" pitchFamily="34" charset="-120"/>
               </a:rPr>
-              <a:t>runners</a:t>
+              <a:t>rerun</a:t>
             </a:r>
             <a:endParaRPr lang="en-US" sz="2800" dirty="0"/>
           </a:p>
@@ -28785,7 +29691,7 @@
         </p:nvSpPr>
         <p:spPr>
           <a:xfrm>
-            <a:off x="2221992" y="2258568"/>
+            <a:off x="2938272" y="2258568"/>
             <a:ext cx="1828800" cy="292608"/>
           </a:xfrm>
           <a:prstGeom prst="rect">
@@ -28794,11 +29700,11 @@
             </a:avLst>
           </a:prstGeom>
           <a:solidFill>
-            <a:srgbClr val="CCFBF1"/>
+            <a:srgbClr val="DDD6FE"/>
           </a:solidFill>
           <a:ln w="19050">
             <a:solidFill>
-              <a:srgbClr val="0D9488"/>
+              <a:srgbClr val="7C3AED"/>
             </a:solidFill>
             <a:prstDash val="solid"/>
           </a:ln>
@@ -28819,7 +29725,7 @@
         </p:nvSpPr>
         <p:spPr>
           <a:xfrm>
-            <a:off x="2221992" y="2258568"/>
+            <a:off x="2938272" y="2258568"/>
             <a:ext cx="1828800" cy="292608"/>
           </a:xfrm>
           <a:prstGeom prst="rect">
@@ -28838,13 +29744,13 @@
             <a:r>
               <a:rPr lang="en-US" sz="1300" b="1" dirty="0">
                 <a:solidFill>
-                  <a:srgbClr val="0F766E"/>
+                  <a:srgbClr val="4C1D95"/>
                 </a:solidFill>
                 <a:latin typeface="Trebuchet MS" pitchFamily="34" charset="0"/>
                 <a:ea typeface="Trebuchet MS" pitchFamily="34" charset="-122"/>
                 <a:cs typeface="Trebuchet MS" pitchFamily="34" charset="-120"/>
               </a:rPr>
-              <a:t>run</a:t>
+              <a:t>re</a:t>
             </a:r>
             <a:endParaRPr lang="en-US" sz="1300" dirty="0"/>
           </a:p>
@@ -28858,7 +29764,7 @@
         </p:nvSpPr>
         <p:spPr>
           <a:xfrm>
-            <a:off x="2221992" y="2569464"/>
+            <a:off x="2938272" y="2569464"/>
             <a:ext cx="1828800" cy="201168"/>
           </a:xfrm>
           <a:prstGeom prst="rect">
@@ -28883,7 +29789,7 @@
                 <a:ea typeface="Calibri" pitchFamily="34" charset="-122"/>
                 <a:cs typeface="Calibri" pitchFamily="34" charset="-120"/>
               </a:rPr>
-              <a:t>to move quickly on foot</a:t>
+              <a:t>again</a:t>
             </a:r>
             <a:endParaRPr lang="en-US" sz="850" dirty="0"/>
           </a:p>
@@ -28897,7 +29803,7 @@
         </p:nvSpPr>
         <p:spPr>
           <a:xfrm>
-            <a:off x="4370832" y="2258568"/>
+            <a:off x="5803392" y="2258568"/>
             <a:ext cx="1828800" cy="292608"/>
           </a:xfrm>
           <a:prstGeom prst="rect">
@@ -28906,11 +29812,11 @@
             </a:avLst>
           </a:prstGeom>
           <a:solidFill>
-            <a:srgbClr val="FCE7F3"/>
+            <a:srgbClr val="CCFBF1"/>
           </a:solidFill>
           <a:ln w="19050">
             <a:solidFill>
-              <a:srgbClr val="DB2777"/>
+              <a:srgbClr val="0D9488"/>
             </a:solidFill>
             <a:prstDash val="solid"/>
           </a:ln>
@@ -28931,7 +29837,7 @@
         </p:nvSpPr>
         <p:spPr>
           <a:xfrm>
-            <a:off x="4370832" y="2258568"/>
+            <a:off x="5803392" y="2258568"/>
             <a:ext cx="1828800" cy="292608"/>
           </a:xfrm>
           <a:prstGeom prst="rect">
@@ -28950,13 +29856,13 @@
             <a:r>
               <a:rPr lang="en-US" sz="1300" b="1" dirty="0">
                 <a:solidFill>
-                  <a:srgbClr val="9D174D"/>
+                  <a:srgbClr val="0F766E"/>
                 </a:solidFill>
                 <a:latin typeface="Trebuchet MS" pitchFamily="34" charset="0"/>
                 <a:ea typeface="Trebuchet MS" pitchFamily="34" charset="-122"/>
                 <a:cs typeface="Trebuchet MS" pitchFamily="34" charset="-120"/>
               </a:rPr>
-              <a:t>er</a:t>
+              <a:t>run</a:t>
             </a:r>
             <a:endParaRPr lang="en-US" sz="1300" dirty="0"/>
           </a:p>
@@ -28970,7 +29876,7 @@
         </p:nvSpPr>
         <p:spPr>
           <a:xfrm>
-            <a:off x="4370832" y="2569464"/>
+            <a:off x="5803392" y="2569464"/>
             <a:ext cx="1828800" cy="201168"/>
           </a:xfrm>
           <a:prstGeom prst="rect">
@@ -28995,7 +29901,7 @@
                 <a:ea typeface="Calibri" pitchFamily="34" charset="-122"/>
                 <a:cs typeface="Calibri" pitchFamily="34" charset="-120"/>
               </a:rPr>
-              <a:t>a person who does something</a:t>
+              <a:t>to move quickly on foot</a:t>
             </a:r>
             <a:endParaRPr lang="en-US" sz="850" dirty="0"/>
           </a:p>
@@ -29009,30 +29915,23 @@
         </p:nvSpPr>
         <p:spPr>
           <a:xfrm>
-            <a:off x="6519672" y="2258568"/>
-            <a:ext cx="1828800" cy="292608"/>
+            <a:off x="365760" y="3273552"/>
+            <a:ext cx="1371600" cy="658368"/>
           </a:xfrm>
           <a:prstGeom prst="rect">
             <a:avLst>
-              <a:gd name="adj" fmla="val 25000"/>
+              <a:gd name="adj" fmla="val 8333"/>
             </a:avLst>
           </a:prstGeom>
           <a:solidFill>
-            <a:srgbClr val="FCE7F3"/>
-          </a:solidFill>
-          <a:ln w="19050">
-            <a:solidFill>
-              <a:srgbClr val="DB2777"/>
-            </a:solidFill>
-            <a:prstDash val="solid"/>
-          </a:ln>
-          <a:effectLst>
-            <a:outerShdw sx="100000" sy="100000" kx="0" ky="0" algn="bl" rotWithShape="0" blurRad="101600" dist="38100" dir="8100000">
-              <a:srgbClr val="000000">
-                <a:alpha val="12000"/>
-              </a:srgbClr>
-            </a:outerShdw>
-          </a:effectLst>
+            <a:srgbClr val="E2E8F0"/>
+          </a:solidFill>
+          <a:ln w="12700">
+            <a:solidFill>
+              <a:srgbClr val="E2E8F0"/>
+            </a:solidFill>
+            <a:prstDash val="solid"/>
+          </a:ln>
         </p:spPr>
       </p:sp>
       <p:sp>
@@ -29043,8 +29942,8 @@
         </p:nvSpPr>
         <p:spPr>
           <a:xfrm>
-            <a:off x="6519672" y="2258568"/>
-            <a:ext cx="1828800" cy="292608"/>
+            <a:off x="365760" y="3273552"/>
+            <a:ext cx="1371600" cy="658368"/>
           </a:xfrm>
           <a:prstGeom prst="rect">
             <a:avLst/>
@@ -29060,73 +29959,100 @@
               <a:buNone/>
             </a:pPr>
             <a:r>
-              <a:rPr lang="en-US" sz="1300" b="1" dirty="0">
-                <a:solidFill>
-                  <a:srgbClr val="9D174D"/>
+              <a:rPr lang="en-US" sz="1100" b="1" dirty="0">
+                <a:solidFill>
+                  <a:srgbClr val="475569"/>
                 </a:solidFill>
                 <a:latin typeface="Trebuchet MS" pitchFamily="34" charset="0"/>
                 <a:ea typeface="Trebuchet MS" pitchFamily="34" charset="-122"/>
                 <a:cs typeface="Trebuchet MS" pitchFamily="34" charset="-120"/>
               </a:rPr>
-              <a:t>s</a:t>
-            </a:r>
-            <a:endParaRPr lang="en-US" sz="1300" dirty="0"/>
-          </a:p>
-        </p:txBody>
-      </p:sp>
-      <p:sp>
-        <p:nvSpPr>
-          <p:cNvPr id="24" name="Text 22"/>
-          <p:cNvSpPr/>
-          <p:nvPr/>
-        </p:nvSpPr>
-        <p:spPr>
-          <a:xfrm>
-            <a:off x="6519672" y="2569464"/>
-            <a:ext cx="1828800" cy="201168"/>
-          </a:xfrm>
-          <a:prstGeom prst="rect">
-            <a:avLst/>
-          </a:prstGeom>
-          <a:noFill/>
-          <a:ln/>
-        </p:spPr>
-        <p:txBody>
-          <a:bodyPr wrap="square" lIns="0" tIns="0" rIns="0" bIns="0" rtlCol="0" anchor="t"/>
-          <a:lstStyle/>
-          <a:p>
-            <a:pPr algn="ctr" indent="0" marL="0">
-              <a:buNone/>
-            </a:pPr>
-            <a:r>
-              <a:rPr lang="en-US" sz="850" dirty="0">
-                <a:solidFill>
-                  <a:srgbClr val="475569"/>
+              <a:t>Syllables</a:t>
+            </a:r>
+            <a:endParaRPr lang="en-US" sz="1100" dirty="0"/>
+          </a:p>
+        </p:txBody>
+      </p:sp>
+      <p:sp>
+        <p:nvSpPr>
+          <p:cNvPr id="24" name="Shape 22"/>
+          <p:cNvSpPr/>
+          <p:nvPr/>
+        </p:nvSpPr>
+        <p:spPr>
+          <a:xfrm>
+            <a:off x="1874520" y="3273552"/>
+            <a:ext cx="6903720" cy="658368"/>
+          </a:xfrm>
+          <a:prstGeom prst="rect">
+            <a:avLst>
+              <a:gd name="adj" fmla="val 8333"/>
+            </a:avLst>
+          </a:prstGeom>
+          <a:solidFill>
+            <a:srgbClr val="F8FAFC"/>
+          </a:solidFill>
+          <a:ln w="12700">
+            <a:solidFill>
+              <a:srgbClr val="E2E8F0"/>
+            </a:solidFill>
+            <a:prstDash val="dash"/>
+          </a:ln>
+        </p:spPr>
+      </p:sp>
+      <p:sp>
+        <p:nvSpPr>
+          <p:cNvPr id="25" name="Text 23"/>
+          <p:cNvSpPr/>
+          <p:nvPr/>
+        </p:nvSpPr>
+        <p:spPr>
+          <a:xfrm>
+            <a:off x="1874520" y="3273552"/>
+            <a:ext cx="6903720" cy="658368"/>
+          </a:xfrm>
+          <a:prstGeom prst="rect">
+            <a:avLst/>
+          </a:prstGeom>
+          <a:noFill/>
+          <a:ln/>
+        </p:spPr>
+        <p:txBody>
+          <a:bodyPr wrap="square" rtlCol="0" anchor="ctr"/>
+          <a:lstStyle/>
+          <a:p>
+            <a:pPr algn="ctr" indent="0" marL="0">
+              <a:buNone/>
+            </a:pPr>
+            <a:r>
+              <a:rPr lang="en-US" sz="1100" i="1" dirty="0">
+                <a:solidFill>
+                  <a:srgbClr val="CBD5E1"/>
                 </a:solidFill>
                 <a:latin typeface="Calibri" pitchFamily="34" charset="0"/>
                 <a:ea typeface="Calibri" pitchFamily="34" charset="-122"/>
                 <a:cs typeface="Calibri" pitchFamily="34" charset="-120"/>
               </a:rPr>
-              <a:t>more than one</a:t>
-            </a:r>
-            <a:endParaRPr lang="en-US" sz="850" dirty="0"/>
-          </a:p>
-        </p:txBody>
-      </p:sp>
-      <p:sp>
-        <p:nvSpPr>
-          <p:cNvPr id="25" name="Shape 23"/>
-          <p:cNvSpPr/>
-          <p:nvPr/>
-        </p:nvSpPr>
-        <p:spPr>
-          <a:xfrm>
-            <a:off x="365760" y="3273552"/>
-            <a:ext cx="1371600" cy="658368"/>
+              <a:t>Write here...</a:t>
+            </a:r>
+            <a:endParaRPr lang="en-US" sz="1100" dirty="0"/>
+          </a:p>
+        </p:txBody>
+      </p:sp>
+      <p:sp>
+        <p:nvSpPr>
+          <p:cNvPr id="26" name="Shape 24"/>
+          <p:cNvSpPr/>
+          <p:nvPr/>
+        </p:nvSpPr>
+        <p:spPr>
+          <a:xfrm>
+            <a:off x="365760" y="4096512"/>
+            <a:ext cx="1371600" cy="804672"/>
           </a:xfrm>
           <a:prstGeom prst="rect">
             <a:avLst>
-              <a:gd name="adj" fmla="val 8333"/>
+              <a:gd name="adj" fmla="val 6818"/>
             </a:avLst>
           </a:prstGeom>
           <a:solidFill>
@@ -29142,14 +30068,14 @@
       </p:sp>
       <p:sp>
         <p:nvSpPr>
-          <p:cNvPr id="26" name="Text 24"/>
-          <p:cNvSpPr/>
-          <p:nvPr/>
-        </p:nvSpPr>
-        <p:spPr>
-          <a:xfrm>
-            <a:off x="365760" y="3273552"/>
-            <a:ext cx="1371600" cy="658368"/>
+          <p:cNvPr id="27" name="Text 25"/>
+          <p:cNvSpPr/>
+          <p:nvPr/>
+        </p:nvSpPr>
+        <p:spPr>
+          <a:xfrm>
+            <a:off x="365760" y="4096512"/>
+            <a:ext cx="1371600" cy="804672"/>
           </a:xfrm>
           <a:prstGeom prst="rect">
             <a:avLst/>
@@ -29173,7 +30099,7 @@
                 <a:ea typeface="Trebuchet MS" pitchFamily="34" charset="-122"/>
                 <a:cs typeface="Trebuchet MS" pitchFamily="34" charset="-120"/>
               </a:rPr>
-              <a:t>Syllables</a:t>
+              <a:t>Phonemes</a:t>
             </a:r>
             <a:endParaRPr lang="en-US" sz="1100" dirty="0"/>
           </a:p>
@@ -29181,80 +30107,14 @@
       </p:sp>
       <p:sp>
         <p:nvSpPr>
-          <p:cNvPr id="27" name="Shape 25"/>
-          <p:cNvSpPr/>
-          <p:nvPr/>
-        </p:nvSpPr>
-        <p:spPr>
-          <a:xfrm>
-            <a:off x="1874520" y="3273552"/>
-            <a:ext cx="6903720" cy="658368"/>
-          </a:xfrm>
-          <a:prstGeom prst="rect">
-            <a:avLst>
-              <a:gd name="adj" fmla="val 8333"/>
-            </a:avLst>
-          </a:prstGeom>
-          <a:solidFill>
-            <a:srgbClr val="F8FAFC"/>
-          </a:solidFill>
-          <a:ln w="12700">
-            <a:solidFill>
-              <a:srgbClr val="E2E8F0"/>
-            </a:solidFill>
-            <a:prstDash val="dash"/>
-          </a:ln>
-        </p:spPr>
-      </p:sp>
-      <p:sp>
-        <p:nvSpPr>
-          <p:cNvPr id="28" name="Text 26"/>
-          <p:cNvSpPr/>
-          <p:nvPr/>
-        </p:nvSpPr>
-        <p:spPr>
-          <a:xfrm>
-            <a:off x="1874520" y="3273552"/>
-            <a:ext cx="6903720" cy="658368"/>
-          </a:xfrm>
-          <a:prstGeom prst="rect">
-            <a:avLst/>
-          </a:prstGeom>
-          <a:noFill/>
-          <a:ln/>
-        </p:spPr>
-        <p:txBody>
-          <a:bodyPr wrap="square" rtlCol="0" anchor="ctr"/>
-          <a:lstStyle/>
-          <a:p>
-            <a:pPr algn="ctr" indent="0" marL="0">
-              <a:buNone/>
-            </a:pPr>
-            <a:r>
-              <a:rPr lang="en-US" sz="1100" i="1" dirty="0">
-                <a:solidFill>
-                  <a:srgbClr val="CBD5E1"/>
-                </a:solidFill>
-                <a:latin typeface="Calibri" pitchFamily="34" charset="0"/>
-                <a:ea typeface="Calibri" pitchFamily="34" charset="-122"/>
-                <a:cs typeface="Calibri" pitchFamily="34" charset="-120"/>
-              </a:rPr>
-              <a:t>Write here...</a:t>
-            </a:r>
-            <a:endParaRPr lang="en-US" sz="1100" dirty="0"/>
-          </a:p>
-        </p:txBody>
-      </p:sp>
-      <p:sp>
-        <p:nvSpPr>
-          <p:cNvPr id="29" name="Shape 27"/>
-          <p:cNvSpPr/>
-          <p:nvPr/>
-        </p:nvSpPr>
-        <p:spPr>
-          <a:xfrm>
-            <a:off x="365760" y="4096512"/>
-            <a:ext cx="1371600" cy="804672"/>
+          <p:cNvPr id="28" name="Shape 26"/>
+          <p:cNvSpPr/>
+          <p:nvPr/>
+        </p:nvSpPr>
+        <p:spPr>
+          <a:xfrm>
+            <a:off x="1874520" y="4096512"/>
+            <a:ext cx="6903720" cy="804672"/>
           </a:xfrm>
           <a:prstGeom prst="rect">
             <a:avLst>
@@ -29262,85 +30122,19 @@
             </a:avLst>
           </a:prstGeom>
           <a:solidFill>
-            <a:srgbClr val="E2E8F0"/>
+            <a:srgbClr val="F8FAFC"/>
           </a:solidFill>
           <a:ln w="12700">
             <a:solidFill>
               <a:srgbClr val="E2E8F0"/>
             </a:solidFill>
-            <a:prstDash val="solid"/>
-          </a:ln>
-        </p:spPr>
-      </p:sp>
-      <p:sp>
-        <p:nvSpPr>
-          <p:cNvPr id="30" name="Text 28"/>
-          <p:cNvSpPr/>
-          <p:nvPr/>
-        </p:nvSpPr>
-        <p:spPr>
-          <a:xfrm>
-            <a:off x="365760" y="4096512"/>
-            <a:ext cx="1371600" cy="804672"/>
-          </a:xfrm>
-          <a:prstGeom prst="rect">
-            <a:avLst/>
-          </a:prstGeom>
-          <a:noFill/>
-          <a:ln/>
-        </p:spPr>
-        <p:txBody>
-          <a:bodyPr wrap="square" lIns="0" tIns="0" rIns="0" bIns="0" rtlCol="0" anchor="ctr"/>
-          <a:lstStyle/>
-          <a:p>
-            <a:pPr algn="ctr" indent="0" marL="0">
-              <a:buNone/>
-            </a:pPr>
-            <a:r>
-              <a:rPr lang="en-US" sz="1100" b="1" dirty="0">
-                <a:solidFill>
-                  <a:srgbClr val="475569"/>
-                </a:solidFill>
-                <a:latin typeface="Trebuchet MS" pitchFamily="34" charset="0"/>
-                <a:ea typeface="Trebuchet MS" pitchFamily="34" charset="-122"/>
-                <a:cs typeface="Trebuchet MS" pitchFamily="34" charset="-120"/>
-              </a:rPr>
-              <a:t>Phonemes</a:t>
-            </a:r>
-            <a:endParaRPr lang="en-US" sz="1100" dirty="0"/>
-          </a:p>
-        </p:txBody>
-      </p:sp>
-      <p:sp>
-        <p:nvSpPr>
-          <p:cNvPr id="31" name="Shape 29"/>
-          <p:cNvSpPr/>
-          <p:nvPr/>
-        </p:nvSpPr>
-        <p:spPr>
-          <a:xfrm>
-            <a:off x="1874520" y="4096512"/>
-            <a:ext cx="6903720" cy="804672"/>
-          </a:xfrm>
-          <a:prstGeom prst="rect">
-            <a:avLst>
-              <a:gd name="adj" fmla="val 6818"/>
-            </a:avLst>
-          </a:prstGeom>
-          <a:solidFill>
-            <a:srgbClr val="F8FAFC"/>
-          </a:solidFill>
-          <a:ln w="12700">
-            <a:solidFill>
-              <a:srgbClr val="E2E8F0"/>
-            </a:solidFill>
             <a:prstDash val="dash"/>
           </a:ln>
         </p:spPr>
       </p:sp>
       <p:sp>
         <p:nvSpPr>
-          <p:cNvPr id="32" name="Text 30"/>
+          <p:cNvPr id="29" name="Text 27"/>
           <p:cNvSpPr/>
           <p:nvPr/>
         </p:nvSpPr>
@@ -29802,7 +30596,7 @@
                 <a:ea typeface="Trebuchet MS" pitchFamily="34" charset="-122"/>
                 <a:cs typeface="Trebuchet MS" pitchFamily="34" charset="-120"/>
               </a:rPr>
-              <a:t>runners</a:t>
+              <a:t>rerun</a:t>
             </a:r>
             <a:endParaRPr lang="en-US" sz="2800" dirty="0"/>
           </a:p>
@@ -29882,7 +30676,7 @@
         </p:nvSpPr>
         <p:spPr>
           <a:xfrm>
-            <a:off x="2221992" y="2258568"/>
+            <a:off x="2938272" y="2258568"/>
             <a:ext cx="1828800" cy="292608"/>
           </a:xfrm>
           <a:prstGeom prst="rect">
@@ -29891,11 +30685,11 @@
             </a:avLst>
           </a:prstGeom>
           <a:solidFill>
-            <a:srgbClr val="CCFBF1"/>
+            <a:srgbClr val="DDD6FE"/>
           </a:solidFill>
           <a:ln w="19050">
             <a:solidFill>
-              <a:srgbClr val="0D9488"/>
+              <a:srgbClr val="7C3AED"/>
             </a:solidFill>
             <a:prstDash val="solid"/>
           </a:ln>
@@ -29916,7 +30710,7 @@
         </p:nvSpPr>
         <p:spPr>
           <a:xfrm>
-            <a:off x="2221992" y="2258568"/>
+            <a:off x="2938272" y="2258568"/>
             <a:ext cx="1828800" cy="292608"/>
           </a:xfrm>
           <a:prstGeom prst="rect">
@@ -29935,13 +30729,13 @@
             <a:r>
               <a:rPr lang="en-US" sz="1300" b="1" dirty="0">
                 <a:solidFill>
-                  <a:srgbClr val="0F766E"/>
+                  <a:srgbClr val="4C1D95"/>
                 </a:solidFill>
                 <a:latin typeface="Trebuchet MS" pitchFamily="34" charset="0"/>
                 <a:ea typeface="Trebuchet MS" pitchFamily="34" charset="-122"/>
                 <a:cs typeface="Trebuchet MS" pitchFamily="34" charset="-120"/>
               </a:rPr>
-              <a:t>run</a:t>
+              <a:t>re</a:t>
             </a:r>
             <a:endParaRPr lang="en-US" sz="1300" dirty="0"/>
           </a:p>
@@ -29955,7 +30749,7 @@
         </p:nvSpPr>
         <p:spPr>
           <a:xfrm>
-            <a:off x="2221992" y="2569464"/>
+            <a:off x="2938272" y="2569464"/>
             <a:ext cx="1828800" cy="201168"/>
           </a:xfrm>
           <a:prstGeom prst="rect">
@@ -29980,7 +30774,7 @@
                 <a:ea typeface="Calibri" pitchFamily="34" charset="-122"/>
                 <a:cs typeface="Calibri" pitchFamily="34" charset="-120"/>
               </a:rPr>
-              <a:t>to move quickly on foot</a:t>
+              <a:t>again</a:t>
             </a:r>
             <a:endParaRPr lang="en-US" sz="850" dirty="0"/>
           </a:p>
@@ -29994,7 +30788,7 @@
         </p:nvSpPr>
         <p:spPr>
           <a:xfrm>
-            <a:off x="4370832" y="2258568"/>
+            <a:off x="5803392" y="2258568"/>
             <a:ext cx="1828800" cy="292608"/>
           </a:xfrm>
           <a:prstGeom prst="rect">
@@ -30003,11 +30797,11 @@
             </a:avLst>
           </a:prstGeom>
           <a:solidFill>
-            <a:srgbClr val="FCE7F3"/>
+            <a:srgbClr val="CCFBF1"/>
           </a:solidFill>
           <a:ln w="19050">
             <a:solidFill>
-              <a:srgbClr val="DB2777"/>
+              <a:srgbClr val="0D9488"/>
             </a:solidFill>
             <a:prstDash val="solid"/>
           </a:ln>
@@ -30028,7 +30822,7 @@
         </p:nvSpPr>
         <p:spPr>
           <a:xfrm>
-            <a:off x="4370832" y="2258568"/>
+            <a:off x="5803392" y="2258568"/>
             <a:ext cx="1828800" cy="292608"/>
           </a:xfrm>
           <a:prstGeom prst="rect">
@@ -30047,13 +30841,13 @@
             <a:r>
               <a:rPr lang="en-US" sz="1300" b="1" dirty="0">
                 <a:solidFill>
-                  <a:srgbClr val="9D174D"/>
+                  <a:srgbClr val="0F766E"/>
                 </a:solidFill>
                 <a:latin typeface="Trebuchet MS" pitchFamily="34" charset="0"/>
                 <a:ea typeface="Trebuchet MS" pitchFamily="34" charset="-122"/>
                 <a:cs typeface="Trebuchet MS" pitchFamily="34" charset="-120"/>
               </a:rPr>
-              <a:t>er</a:t>
+              <a:t>run</a:t>
             </a:r>
             <a:endParaRPr lang="en-US" sz="1300" dirty="0"/>
           </a:p>
@@ -30067,7 +30861,7 @@
         </p:nvSpPr>
         <p:spPr>
           <a:xfrm>
-            <a:off x="4370832" y="2569464"/>
+            <a:off x="5803392" y="2569464"/>
             <a:ext cx="1828800" cy="201168"/>
           </a:xfrm>
           <a:prstGeom prst="rect">
@@ -30092,7 +30886,7 @@
                 <a:ea typeface="Calibri" pitchFamily="34" charset="-122"/>
                 <a:cs typeface="Calibri" pitchFamily="34" charset="-120"/>
               </a:rPr>
-              <a:t>a person who does something</a:t>
+              <a:t>to move quickly on foot</a:t>
             </a:r>
             <a:endParaRPr lang="en-US" sz="850" dirty="0"/>
           </a:p>
@@ -30106,30 +30900,23 @@
         </p:nvSpPr>
         <p:spPr>
           <a:xfrm>
-            <a:off x="6519672" y="2258568"/>
-            <a:ext cx="1828800" cy="292608"/>
+            <a:off x="365760" y="3273552"/>
+            <a:ext cx="1371600" cy="658368"/>
           </a:xfrm>
           <a:prstGeom prst="rect">
             <a:avLst>
-              <a:gd name="adj" fmla="val 25000"/>
+              <a:gd name="adj" fmla="val 8333"/>
             </a:avLst>
           </a:prstGeom>
           <a:solidFill>
-            <a:srgbClr val="FCE7F3"/>
-          </a:solidFill>
-          <a:ln w="19050">
-            <a:solidFill>
-              <a:srgbClr val="DB2777"/>
-            </a:solidFill>
-            <a:prstDash val="solid"/>
-          </a:ln>
-          <a:effectLst>
-            <a:outerShdw sx="100000" sy="100000" kx="0" ky="0" algn="bl" rotWithShape="0" blurRad="101600" dist="38100" dir="8100000">
-              <a:srgbClr val="000000">
-                <a:alpha val="12000"/>
-              </a:srgbClr>
-            </a:outerShdw>
-          </a:effectLst>
+            <a:srgbClr val="E2E8F0"/>
+          </a:solidFill>
+          <a:ln w="12700">
+            <a:solidFill>
+              <a:srgbClr val="E2E8F0"/>
+            </a:solidFill>
+            <a:prstDash val="solid"/>
+          </a:ln>
         </p:spPr>
       </p:sp>
       <p:sp>
@@ -30140,8 +30927,8 @@
         </p:nvSpPr>
         <p:spPr>
           <a:xfrm>
-            <a:off x="6519672" y="2258568"/>
-            <a:ext cx="1828800" cy="292608"/>
+            <a:off x="365760" y="3273552"/>
+            <a:ext cx="1371600" cy="658368"/>
           </a:xfrm>
           <a:prstGeom prst="rect">
             <a:avLst/>
@@ -30157,69 +30944,30 @@
               <a:buNone/>
             </a:pPr>
             <a:r>
-              <a:rPr lang="en-US" sz="1300" b="1" dirty="0">
-                <a:solidFill>
-                  <a:srgbClr val="9D174D"/>
+              <a:rPr lang="en-US" sz="1100" b="1" dirty="0">
+                <a:solidFill>
+                  <a:srgbClr val="475569"/>
                 </a:solidFill>
                 <a:latin typeface="Trebuchet MS" pitchFamily="34" charset="0"/>
                 <a:ea typeface="Trebuchet MS" pitchFamily="34" charset="-122"/>
                 <a:cs typeface="Trebuchet MS" pitchFamily="34" charset="-120"/>
               </a:rPr>
-              <a:t>s</a:t>
-            </a:r>
-            <a:endParaRPr lang="en-US" sz="1300" dirty="0"/>
-          </a:p>
-        </p:txBody>
-      </p:sp>
-      <p:sp>
-        <p:nvSpPr>
-          <p:cNvPr id="24" name="Text 22"/>
-          <p:cNvSpPr/>
-          <p:nvPr/>
-        </p:nvSpPr>
-        <p:spPr>
-          <a:xfrm>
-            <a:off x="6519672" y="2569464"/>
-            <a:ext cx="1828800" cy="201168"/>
-          </a:xfrm>
-          <a:prstGeom prst="rect">
-            <a:avLst/>
-          </a:prstGeom>
-          <a:noFill/>
-          <a:ln/>
-        </p:spPr>
-        <p:txBody>
-          <a:bodyPr wrap="square" lIns="0" tIns="0" rIns="0" bIns="0" rtlCol="0" anchor="t"/>
-          <a:lstStyle/>
-          <a:p>
-            <a:pPr algn="ctr" indent="0" marL="0">
-              <a:buNone/>
-            </a:pPr>
-            <a:r>
-              <a:rPr lang="en-US" sz="850" dirty="0">
-                <a:solidFill>
-                  <a:srgbClr val="475569"/>
-                </a:solidFill>
-                <a:latin typeface="Calibri" pitchFamily="34" charset="0"/>
-                <a:ea typeface="Calibri" pitchFamily="34" charset="-122"/>
-                <a:cs typeface="Calibri" pitchFamily="34" charset="-120"/>
-              </a:rPr>
-              <a:t>more than one</a:t>
-            </a:r>
-            <a:endParaRPr lang="en-US" sz="850" dirty="0"/>
-          </a:p>
-        </p:txBody>
-      </p:sp>
-      <p:sp>
-        <p:nvSpPr>
-          <p:cNvPr id="25" name="Shape 23"/>
-          <p:cNvSpPr/>
-          <p:nvPr/>
-        </p:nvSpPr>
-        <p:spPr>
-          <a:xfrm>
-            <a:off x="365760" y="3273552"/>
-            <a:ext cx="1371600" cy="658368"/>
+              <a:t>Syllables</a:t>
+            </a:r>
+            <a:endParaRPr lang="en-US" sz="1100" dirty="0"/>
+          </a:p>
+        </p:txBody>
+      </p:sp>
+      <p:sp>
+        <p:nvSpPr>
+          <p:cNvPr id="24" name="Shape 22"/>
+          <p:cNvSpPr/>
+          <p:nvPr/>
+        </p:nvSpPr>
+        <p:spPr>
+          <a:xfrm>
+            <a:off x="1874520" y="3273552"/>
+            <a:ext cx="6903720" cy="658368"/>
           </a:xfrm>
           <a:prstGeom prst="rect">
             <a:avLst>
@@ -30227,11 +30975,38 @@
             </a:avLst>
           </a:prstGeom>
           <a:solidFill>
-            <a:srgbClr val="E2E8F0"/>
-          </a:solidFill>
-          <a:ln w="12700">
-            <a:solidFill>
-              <a:srgbClr val="E2E8F0"/>
+            <a:srgbClr val="CCFBF1"/>
+          </a:solidFill>
+          <a:ln w="12700">
+            <a:solidFill>
+              <a:srgbClr val="0D9488"/>
+            </a:solidFill>
+            <a:prstDash val="solid"/>
+          </a:ln>
+        </p:spPr>
+      </p:sp>
+      <p:sp>
+        <p:nvSpPr>
+          <p:cNvPr id="25" name="Shape 23"/>
+          <p:cNvSpPr/>
+          <p:nvPr/>
+        </p:nvSpPr>
+        <p:spPr>
+          <a:xfrm>
+            <a:off x="2999232" y="3364992"/>
+            <a:ext cx="1645920" cy="475488"/>
+          </a:xfrm>
+          <a:prstGeom prst="rect">
+            <a:avLst>
+              <a:gd name="adj" fmla="val 9615"/>
+            </a:avLst>
+          </a:prstGeom>
+          <a:solidFill>
+            <a:srgbClr val="FFFFFF"/>
+          </a:solidFill>
+          <a:ln w="12700">
+            <a:solidFill>
+              <a:srgbClr val="0D9488"/>
             </a:solidFill>
             <a:prstDash val="solid"/>
           </a:ln>
@@ -30245,8 +31020,8 @@
         </p:nvSpPr>
         <p:spPr>
           <a:xfrm>
-            <a:off x="365760" y="3273552"/>
-            <a:ext cx="1371600" cy="658368"/>
+            <a:off x="2999232" y="3364992"/>
+            <a:ext cx="1645920" cy="475488"/>
           </a:xfrm>
           <a:prstGeom prst="rect">
             <a:avLst/>
@@ -30262,46 +31037,58 @@
               <a:buNone/>
             </a:pPr>
             <a:r>
-              <a:rPr lang="en-US" sz="1100" b="1" dirty="0">
-                <a:solidFill>
-                  <a:srgbClr val="475569"/>
+              <a:rPr lang="en-US" sz="1400" b="1" dirty="0">
+                <a:solidFill>
+                  <a:srgbClr val="0D9488"/>
                 </a:solidFill>
                 <a:latin typeface="Trebuchet MS" pitchFamily="34" charset="0"/>
                 <a:ea typeface="Trebuchet MS" pitchFamily="34" charset="-122"/>
                 <a:cs typeface="Trebuchet MS" pitchFamily="34" charset="-120"/>
               </a:rPr>
-              <a:t>Syllables</a:t>
-            </a:r>
-            <a:endParaRPr lang="en-US" sz="1100" dirty="0"/>
-          </a:p>
-        </p:txBody>
-      </p:sp>
-      <p:sp>
-        <p:nvSpPr>
-          <p:cNvPr id="27" name="Shape 25"/>
-          <p:cNvSpPr/>
-          <p:nvPr/>
-        </p:nvSpPr>
-        <p:spPr>
-          <a:xfrm>
-            <a:off x="1874520" y="3273552"/>
-            <a:ext cx="6903720" cy="658368"/>
-          </a:xfrm>
-          <a:prstGeom prst="rect">
-            <a:avLst>
-              <a:gd name="adj" fmla="val 8333"/>
-            </a:avLst>
-          </a:prstGeom>
-          <a:solidFill>
-            <a:srgbClr val="CCFBF1"/>
-          </a:solidFill>
-          <a:ln w="12700">
-            <a:solidFill>
-              <a:srgbClr val="0D9488"/>
-            </a:solidFill>
-            <a:prstDash val="solid"/>
-          </a:ln>
-        </p:spPr>
+              <a:t>re</a:t>
+            </a:r>
+            <a:endParaRPr lang="en-US" sz="1400" dirty="0"/>
+          </a:p>
+        </p:txBody>
+      </p:sp>
+      <p:sp>
+        <p:nvSpPr>
+          <p:cNvPr id="27" name="Text 25"/>
+          <p:cNvSpPr/>
+          <p:nvPr/>
+        </p:nvSpPr>
+        <p:spPr>
+          <a:xfrm>
+            <a:off x="4645152" y="3364992"/>
+            <a:ext cx="1097280" cy="475488"/>
+          </a:xfrm>
+          <a:prstGeom prst="rect">
+            <a:avLst/>
+          </a:prstGeom>
+          <a:noFill/>
+          <a:ln/>
+        </p:spPr>
+        <p:txBody>
+          <a:bodyPr wrap="square" lIns="0" tIns="0" rIns="0" bIns="0" rtlCol="0" anchor="ctr"/>
+          <a:lstStyle/>
+          <a:p>
+            <a:pPr algn="ctr" indent="0" marL="0">
+              <a:buNone/>
+            </a:pPr>
+            <a:r>
+              <a:rPr lang="en-US" sz="1600" b="1" dirty="0">
+                <a:solidFill>
+                  <a:srgbClr val="0D9488"/>
+                </a:solidFill>
+                <a:latin typeface="Trebuchet MS" pitchFamily="34" charset="0"/>
+                <a:ea typeface="Trebuchet MS" pitchFamily="34" charset="-122"/>
+                <a:cs typeface="Trebuchet MS" pitchFamily="34" charset="-120"/>
+              </a:rPr>
+              <a:t>·</a:t>
+            </a:r>
+            <a:endParaRPr lang="en-US" sz="1600" dirty="0"/>
+          </a:p>
+        </p:txBody>
       </p:sp>
       <p:sp>
         <p:nvSpPr>
@@ -30311,7 +31098,7 @@
         </p:nvSpPr>
         <p:spPr>
           <a:xfrm>
-            <a:off x="2999232" y="3364992"/>
+            <a:off x="5742432" y="3364992"/>
             <a:ext cx="1645920" cy="475488"/>
           </a:xfrm>
           <a:prstGeom prst="rect">
@@ -30338,7 +31125,7 @@
         </p:nvSpPr>
         <p:spPr>
           <a:xfrm>
-            <a:off x="2999232" y="3364992"/>
+            <a:off x="5742432" y="3364992"/>
             <a:ext cx="1645920" cy="475488"/>
           </a:xfrm>
           <a:prstGeom prst="rect">
@@ -30371,14 +31158,41 @@
       </p:sp>
       <p:sp>
         <p:nvSpPr>
-          <p:cNvPr id="30" name="Text 28"/>
-          <p:cNvSpPr/>
-          <p:nvPr/>
-        </p:nvSpPr>
-        <p:spPr>
-          <a:xfrm>
-            <a:off x="4645152" y="3364992"/>
-            <a:ext cx="1097280" cy="475488"/>
+          <p:cNvPr id="30" name="Shape 28"/>
+          <p:cNvSpPr/>
+          <p:nvPr/>
+        </p:nvSpPr>
+        <p:spPr>
+          <a:xfrm>
+            <a:off x="365760" y="4096512"/>
+            <a:ext cx="1371600" cy="804672"/>
+          </a:xfrm>
+          <a:prstGeom prst="rect">
+            <a:avLst>
+              <a:gd name="adj" fmla="val 6818"/>
+            </a:avLst>
+          </a:prstGeom>
+          <a:solidFill>
+            <a:srgbClr val="E2E8F0"/>
+          </a:solidFill>
+          <a:ln w="12700">
+            <a:solidFill>
+              <a:srgbClr val="E2E8F0"/>
+            </a:solidFill>
+            <a:prstDash val="solid"/>
+          </a:ln>
+        </p:spPr>
+      </p:sp>
+      <p:sp>
+        <p:nvSpPr>
+          <p:cNvPr id="31" name="Text 29"/>
+          <p:cNvSpPr/>
+          <p:nvPr/>
+        </p:nvSpPr>
+        <p:spPr>
+          <a:xfrm>
+            <a:off x="365760" y="4096512"/>
+            <a:ext cx="1371600" cy="804672"/>
           </a:xfrm>
           <a:prstGeom prst="rect">
             <a:avLst/>
@@ -30394,96 +31208,30 @@
               <a:buNone/>
             </a:pPr>
             <a:r>
-              <a:rPr lang="en-US" sz="1600" b="1" dirty="0">
-                <a:solidFill>
-                  <a:srgbClr val="0D9488"/>
+              <a:rPr lang="en-US" sz="1100" b="1" dirty="0">
+                <a:solidFill>
+                  <a:srgbClr val="475569"/>
                 </a:solidFill>
                 <a:latin typeface="Trebuchet MS" pitchFamily="34" charset="0"/>
                 <a:ea typeface="Trebuchet MS" pitchFamily="34" charset="-122"/>
                 <a:cs typeface="Trebuchet MS" pitchFamily="34" charset="-120"/>
               </a:rPr>
-              <a:t>·</a:t>
-            </a:r>
-            <a:endParaRPr lang="en-US" sz="1600" dirty="0"/>
-          </a:p>
-        </p:txBody>
-      </p:sp>
-      <p:sp>
-        <p:nvSpPr>
-          <p:cNvPr id="31" name="Shape 29"/>
-          <p:cNvSpPr/>
-          <p:nvPr/>
-        </p:nvSpPr>
-        <p:spPr>
-          <a:xfrm>
-            <a:off x="5742432" y="3364992"/>
-            <a:ext cx="1645920" cy="475488"/>
-          </a:xfrm>
-          <a:prstGeom prst="rect">
-            <a:avLst>
-              <a:gd name="adj" fmla="val 9615"/>
-            </a:avLst>
-          </a:prstGeom>
-          <a:solidFill>
-            <a:srgbClr val="FFFFFF"/>
-          </a:solidFill>
-          <a:ln w="12700">
-            <a:solidFill>
-              <a:srgbClr val="0D9488"/>
-            </a:solidFill>
-            <a:prstDash val="solid"/>
-          </a:ln>
-        </p:spPr>
-      </p:sp>
-      <p:sp>
-        <p:nvSpPr>
-          <p:cNvPr id="32" name="Text 30"/>
-          <p:cNvSpPr/>
-          <p:nvPr/>
-        </p:nvSpPr>
-        <p:spPr>
-          <a:xfrm>
-            <a:off x="5742432" y="3364992"/>
-            <a:ext cx="1645920" cy="475488"/>
-          </a:xfrm>
-          <a:prstGeom prst="rect">
-            <a:avLst/>
-          </a:prstGeom>
-          <a:noFill/>
-          <a:ln/>
-        </p:spPr>
-        <p:txBody>
-          <a:bodyPr wrap="square" lIns="0" tIns="0" rIns="0" bIns="0" rtlCol="0" anchor="ctr"/>
-          <a:lstStyle/>
-          <a:p>
-            <a:pPr algn="ctr" indent="0" marL="0">
-              <a:buNone/>
-            </a:pPr>
-            <a:r>
-              <a:rPr lang="en-US" sz="1400" b="1" dirty="0">
-                <a:solidFill>
-                  <a:srgbClr val="0D9488"/>
-                </a:solidFill>
-                <a:latin typeface="Trebuchet MS" pitchFamily="34" charset="0"/>
-                <a:ea typeface="Trebuchet MS" pitchFamily="34" charset="-122"/>
-                <a:cs typeface="Trebuchet MS" pitchFamily="34" charset="-120"/>
-              </a:rPr>
-              <a:t>ners</a:t>
-            </a:r>
-            <a:endParaRPr lang="en-US" sz="1400" dirty="0"/>
-          </a:p>
-        </p:txBody>
-      </p:sp>
-      <p:sp>
-        <p:nvSpPr>
-          <p:cNvPr id="33" name="Shape 31"/>
-          <p:cNvSpPr/>
-          <p:nvPr/>
-        </p:nvSpPr>
-        <p:spPr>
-          <a:xfrm>
-            <a:off x="365760" y="4096512"/>
-            <a:ext cx="1371600" cy="804672"/>
+              <a:t>Phonemes</a:t>
+            </a:r>
+            <a:endParaRPr lang="en-US" sz="1100" dirty="0"/>
+          </a:p>
+        </p:txBody>
+      </p:sp>
+      <p:sp>
+        <p:nvSpPr>
+          <p:cNvPr id="32" name="Shape 30"/>
+          <p:cNvSpPr/>
+          <p:nvPr/>
+        </p:nvSpPr>
+        <p:spPr>
+          <a:xfrm>
+            <a:off x="1874520" y="4096512"/>
+            <a:ext cx="6903720" cy="804672"/>
           </a:xfrm>
           <a:prstGeom prst="rect">
             <a:avLst>
@@ -30491,85 +31239,19 @@
             </a:avLst>
           </a:prstGeom>
           <a:solidFill>
-            <a:srgbClr val="E2E8F0"/>
+            <a:srgbClr val="F8FAFC"/>
           </a:solidFill>
           <a:ln w="12700">
             <a:solidFill>
               <a:srgbClr val="E2E8F0"/>
             </a:solidFill>
-            <a:prstDash val="solid"/>
-          </a:ln>
-        </p:spPr>
-      </p:sp>
-      <p:sp>
-        <p:nvSpPr>
-          <p:cNvPr id="34" name="Text 32"/>
-          <p:cNvSpPr/>
-          <p:nvPr/>
-        </p:nvSpPr>
-        <p:spPr>
-          <a:xfrm>
-            <a:off x="365760" y="4096512"/>
-            <a:ext cx="1371600" cy="804672"/>
-          </a:xfrm>
-          <a:prstGeom prst="rect">
-            <a:avLst/>
-          </a:prstGeom>
-          <a:noFill/>
-          <a:ln/>
-        </p:spPr>
-        <p:txBody>
-          <a:bodyPr wrap="square" lIns="0" tIns="0" rIns="0" bIns="0" rtlCol="0" anchor="ctr"/>
-          <a:lstStyle/>
-          <a:p>
-            <a:pPr algn="ctr" indent="0" marL="0">
-              <a:buNone/>
-            </a:pPr>
-            <a:r>
-              <a:rPr lang="en-US" sz="1100" b="1" dirty="0">
-                <a:solidFill>
-                  <a:srgbClr val="475569"/>
-                </a:solidFill>
-                <a:latin typeface="Trebuchet MS" pitchFamily="34" charset="0"/>
-                <a:ea typeface="Trebuchet MS" pitchFamily="34" charset="-122"/>
-                <a:cs typeface="Trebuchet MS" pitchFamily="34" charset="-120"/>
-              </a:rPr>
-              <a:t>Phonemes</a:t>
-            </a:r>
-            <a:endParaRPr lang="en-US" sz="1100" dirty="0"/>
-          </a:p>
-        </p:txBody>
-      </p:sp>
-      <p:sp>
-        <p:nvSpPr>
-          <p:cNvPr id="35" name="Shape 33"/>
-          <p:cNvSpPr/>
-          <p:nvPr/>
-        </p:nvSpPr>
-        <p:spPr>
-          <a:xfrm>
-            <a:off x="1874520" y="4096512"/>
-            <a:ext cx="6903720" cy="804672"/>
-          </a:xfrm>
-          <a:prstGeom prst="rect">
-            <a:avLst>
-              <a:gd name="adj" fmla="val 6818"/>
-            </a:avLst>
-          </a:prstGeom>
-          <a:solidFill>
-            <a:srgbClr val="F8FAFC"/>
-          </a:solidFill>
-          <a:ln w="12700">
-            <a:solidFill>
-              <a:srgbClr val="E2E8F0"/>
-            </a:solidFill>
             <a:prstDash val="dash"/>
           </a:ln>
         </p:spPr>
       </p:sp>
       <p:sp>
         <p:nvSpPr>
-          <p:cNvPr id="36" name="Text 34"/>
+          <p:cNvPr id="33" name="Text 31"/>
           <p:cNvSpPr/>
           <p:nvPr/>
         </p:nvSpPr>
@@ -31031,7 +31713,7 @@
                 <a:ea typeface="Trebuchet MS" pitchFamily="34" charset="-122"/>
                 <a:cs typeface="Trebuchet MS" pitchFamily="34" charset="-120"/>
               </a:rPr>
-              <a:t>runners</a:t>
+              <a:t>rerun</a:t>
             </a:r>
             <a:endParaRPr lang="en-US" sz="2800" dirty="0"/>
           </a:p>
@@ -31111,7 +31793,7 @@
         </p:nvSpPr>
         <p:spPr>
           <a:xfrm>
-            <a:off x="2221992" y="2258568"/>
+            <a:off x="2938272" y="2258568"/>
             <a:ext cx="1828800" cy="292608"/>
           </a:xfrm>
           <a:prstGeom prst="rect">
@@ -31120,11 +31802,11 @@
             </a:avLst>
           </a:prstGeom>
           <a:solidFill>
-            <a:srgbClr val="CCFBF1"/>
+            <a:srgbClr val="DDD6FE"/>
           </a:solidFill>
           <a:ln w="19050">
             <a:solidFill>
-              <a:srgbClr val="0D9488"/>
+              <a:srgbClr val="7C3AED"/>
             </a:solidFill>
             <a:prstDash val="solid"/>
           </a:ln>
@@ -31145,7 +31827,7 @@
         </p:nvSpPr>
         <p:spPr>
           <a:xfrm>
-            <a:off x="2221992" y="2258568"/>
+            <a:off x="2938272" y="2258568"/>
             <a:ext cx="1828800" cy="292608"/>
           </a:xfrm>
           <a:prstGeom prst="rect">
@@ -31164,13 +31846,13 @@
             <a:r>
               <a:rPr lang="en-US" sz="1300" b="1" dirty="0">
                 <a:solidFill>
-                  <a:srgbClr val="0F766E"/>
+                  <a:srgbClr val="4C1D95"/>
                 </a:solidFill>
                 <a:latin typeface="Trebuchet MS" pitchFamily="34" charset="0"/>
                 <a:ea typeface="Trebuchet MS" pitchFamily="34" charset="-122"/>
                 <a:cs typeface="Trebuchet MS" pitchFamily="34" charset="-120"/>
               </a:rPr>
-              <a:t>run</a:t>
+              <a:t>re</a:t>
             </a:r>
             <a:endParaRPr lang="en-US" sz="1300" dirty="0"/>
           </a:p>
@@ -31184,7 +31866,7 @@
         </p:nvSpPr>
         <p:spPr>
           <a:xfrm>
-            <a:off x="2221992" y="2569464"/>
+            <a:off x="2938272" y="2569464"/>
             <a:ext cx="1828800" cy="201168"/>
           </a:xfrm>
           <a:prstGeom prst="rect">
@@ -31209,7 +31891,7 @@
                 <a:ea typeface="Calibri" pitchFamily="34" charset="-122"/>
                 <a:cs typeface="Calibri" pitchFamily="34" charset="-120"/>
               </a:rPr>
-              <a:t>to move quickly on foot</a:t>
+              <a:t>again</a:t>
             </a:r>
             <a:endParaRPr lang="en-US" sz="850" dirty="0"/>
           </a:p>
@@ -31223,7 +31905,7 @@
         </p:nvSpPr>
         <p:spPr>
           <a:xfrm>
-            <a:off x="4370832" y="2258568"/>
+            <a:off x="5803392" y="2258568"/>
             <a:ext cx="1828800" cy="292608"/>
           </a:xfrm>
           <a:prstGeom prst="rect">
@@ -31232,11 +31914,11 @@
             </a:avLst>
           </a:prstGeom>
           <a:solidFill>
-            <a:srgbClr val="FCE7F3"/>
+            <a:srgbClr val="CCFBF1"/>
           </a:solidFill>
           <a:ln w="19050">
             <a:solidFill>
-              <a:srgbClr val="DB2777"/>
+              <a:srgbClr val="0D9488"/>
             </a:solidFill>
             <a:prstDash val="solid"/>
           </a:ln>
@@ -31257,7 +31939,7 @@
         </p:nvSpPr>
         <p:spPr>
           <a:xfrm>
-            <a:off x="4370832" y="2258568"/>
+            <a:off x="5803392" y="2258568"/>
             <a:ext cx="1828800" cy="292608"/>
           </a:xfrm>
           <a:prstGeom prst="rect">
@@ -31276,13 +31958,13 @@
             <a:r>
               <a:rPr lang="en-US" sz="1300" b="1" dirty="0">
                 <a:solidFill>
-                  <a:srgbClr val="9D174D"/>
+                  <a:srgbClr val="0F766E"/>
                 </a:solidFill>
                 <a:latin typeface="Trebuchet MS" pitchFamily="34" charset="0"/>
                 <a:ea typeface="Trebuchet MS" pitchFamily="34" charset="-122"/>
                 <a:cs typeface="Trebuchet MS" pitchFamily="34" charset="-120"/>
               </a:rPr>
-              <a:t>er</a:t>
+              <a:t>run</a:t>
             </a:r>
             <a:endParaRPr lang="en-US" sz="1300" dirty="0"/>
           </a:p>
@@ -31296,7 +31978,7 @@
         </p:nvSpPr>
         <p:spPr>
           <a:xfrm>
-            <a:off x="4370832" y="2569464"/>
+            <a:off x="5803392" y="2569464"/>
             <a:ext cx="1828800" cy="201168"/>
           </a:xfrm>
           <a:prstGeom prst="rect">
@@ -31321,7 +32003,7 @@
                 <a:ea typeface="Calibri" pitchFamily="34" charset="-122"/>
                 <a:cs typeface="Calibri" pitchFamily="34" charset="-120"/>
               </a:rPr>
-              <a:t>a person who does something</a:t>
+              <a:t>to move quickly on foot</a:t>
             </a:r>
             <a:endParaRPr lang="en-US" sz="850" dirty="0"/>
           </a:p>
@@ -31335,30 +32017,23 @@
         </p:nvSpPr>
         <p:spPr>
           <a:xfrm>
-            <a:off x="6519672" y="2258568"/>
-            <a:ext cx="1828800" cy="292608"/>
+            <a:off x="365760" y="3273552"/>
+            <a:ext cx="1371600" cy="658368"/>
           </a:xfrm>
           <a:prstGeom prst="rect">
             <a:avLst>
-              <a:gd name="adj" fmla="val 25000"/>
+              <a:gd name="adj" fmla="val 8333"/>
             </a:avLst>
           </a:prstGeom>
           <a:solidFill>
-            <a:srgbClr val="FCE7F3"/>
-          </a:solidFill>
-          <a:ln w="19050">
-            <a:solidFill>
-              <a:srgbClr val="DB2777"/>
-            </a:solidFill>
-            <a:prstDash val="solid"/>
-          </a:ln>
-          <a:effectLst>
-            <a:outerShdw sx="100000" sy="100000" kx="0" ky="0" algn="bl" rotWithShape="0" blurRad="101600" dist="38100" dir="8100000">
-              <a:srgbClr val="000000">
-                <a:alpha val="12000"/>
-              </a:srgbClr>
-            </a:outerShdw>
-          </a:effectLst>
+            <a:srgbClr val="E2E8F0"/>
+          </a:solidFill>
+          <a:ln w="12700">
+            <a:solidFill>
+              <a:srgbClr val="E2E8F0"/>
+            </a:solidFill>
+            <a:prstDash val="solid"/>
+          </a:ln>
         </p:spPr>
       </p:sp>
       <p:sp>
@@ -31369,8 +32044,8 @@
         </p:nvSpPr>
         <p:spPr>
           <a:xfrm>
-            <a:off x="6519672" y="2258568"/>
-            <a:ext cx="1828800" cy="292608"/>
+            <a:off x="365760" y="3273552"/>
+            <a:ext cx="1371600" cy="658368"/>
           </a:xfrm>
           <a:prstGeom prst="rect">
             <a:avLst/>
@@ -31386,69 +32061,30 @@
               <a:buNone/>
             </a:pPr>
             <a:r>
-              <a:rPr lang="en-US" sz="1300" b="1" dirty="0">
-                <a:solidFill>
-                  <a:srgbClr val="9D174D"/>
+              <a:rPr lang="en-US" sz="1100" b="1" dirty="0">
+                <a:solidFill>
+                  <a:srgbClr val="475569"/>
                 </a:solidFill>
                 <a:latin typeface="Trebuchet MS" pitchFamily="34" charset="0"/>
                 <a:ea typeface="Trebuchet MS" pitchFamily="34" charset="-122"/>
                 <a:cs typeface="Trebuchet MS" pitchFamily="34" charset="-120"/>
               </a:rPr>
-              <a:t>s</a:t>
-            </a:r>
-            <a:endParaRPr lang="en-US" sz="1300" dirty="0"/>
-          </a:p>
-        </p:txBody>
-      </p:sp>
-      <p:sp>
-        <p:nvSpPr>
-          <p:cNvPr id="24" name="Text 22"/>
-          <p:cNvSpPr/>
-          <p:nvPr/>
-        </p:nvSpPr>
-        <p:spPr>
-          <a:xfrm>
-            <a:off x="6519672" y="2569464"/>
-            <a:ext cx="1828800" cy="201168"/>
-          </a:xfrm>
-          <a:prstGeom prst="rect">
-            <a:avLst/>
-          </a:prstGeom>
-          <a:noFill/>
-          <a:ln/>
-        </p:spPr>
-        <p:txBody>
-          <a:bodyPr wrap="square" lIns="0" tIns="0" rIns="0" bIns="0" rtlCol="0" anchor="t"/>
-          <a:lstStyle/>
-          <a:p>
-            <a:pPr algn="ctr" indent="0" marL="0">
-              <a:buNone/>
-            </a:pPr>
-            <a:r>
-              <a:rPr lang="en-US" sz="850" dirty="0">
-                <a:solidFill>
-                  <a:srgbClr val="475569"/>
-                </a:solidFill>
-                <a:latin typeface="Calibri" pitchFamily="34" charset="0"/>
-                <a:ea typeface="Calibri" pitchFamily="34" charset="-122"/>
-                <a:cs typeface="Calibri" pitchFamily="34" charset="-120"/>
-              </a:rPr>
-              <a:t>more than one</a:t>
-            </a:r>
-            <a:endParaRPr lang="en-US" sz="850" dirty="0"/>
-          </a:p>
-        </p:txBody>
-      </p:sp>
-      <p:sp>
-        <p:nvSpPr>
-          <p:cNvPr id="25" name="Shape 23"/>
-          <p:cNvSpPr/>
-          <p:nvPr/>
-        </p:nvSpPr>
-        <p:spPr>
-          <a:xfrm>
-            <a:off x="365760" y="3273552"/>
-            <a:ext cx="1371600" cy="658368"/>
+              <a:t>Syllables</a:t>
+            </a:r>
+            <a:endParaRPr lang="en-US" sz="1100" dirty="0"/>
+          </a:p>
+        </p:txBody>
+      </p:sp>
+      <p:sp>
+        <p:nvSpPr>
+          <p:cNvPr id="24" name="Shape 22"/>
+          <p:cNvSpPr/>
+          <p:nvPr/>
+        </p:nvSpPr>
+        <p:spPr>
+          <a:xfrm>
+            <a:off x="1874520" y="3273552"/>
+            <a:ext cx="6903720" cy="658368"/>
           </a:xfrm>
           <a:prstGeom prst="rect">
             <a:avLst>
@@ -31456,11 +32092,38 @@
             </a:avLst>
           </a:prstGeom>
           <a:solidFill>
-            <a:srgbClr val="E2E8F0"/>
-          </a:solidFill>
-          <a:ln w="12700">
-            <a:solidFill>
-              <a:srgbClr val="E2E8F0"/>
+            <a:srgbClr val="CCFBF1"/>
+          </a:solidFill>
+          <a:ln w="12700">
+            <a:solidFill>
+              <a:srgbClr val="0D9488"/>
+            </a:solidFill>
+            <a:prstDash val="solid"/>
+          </a:ln>
+        </p:spPr>
+      </p:sp>
+      <p:sp>
+        <p:nvSpPr>
+          <p:cNvPr id="25" name="Shape 23"/>
+          <p:cNvSpPr/>
+          <p:nvPr/>
+        </p:nvSpPr>
+        <p:spPr>
+          <a:xfrm>
+            <a:off x="2999232" y="3364992"/>
+            <a:ext cx="1645920" cy="475488"/>
+          </a:xfrm>
+          <a:prstGeom prst="rect">
+            <a:avLst>
+              <a:gd name="adj" fmla="val 9615"/>
+            </a:avLst>
+          </a:prstGeom>
+          <a:solidFill>
+            <a:srgbClr val="FFFFFF"/>
+          </a:solidFill>
+          <a:ln w="12700">
+            <a:solidFill>
+              <a:srgbClr val="0D9488"/>
             </a:solidFill>
             <a:prstDash val="solid"/>
           </a:ln>
@@ -31474,8 +32137,8 @@
         </p:nvSpPr>
         <p:spPr>
           <a:xfrm>
-            <a:off x="365760" y="3273552"/>
-            <a:ext cx="1371600" cy="658368"/>
+            <a:off x="2999232" y="3364992"/>
+            <a:ext cx="1645920" cy="475488"/>
           </a:xfrm>
           <a:prstGeom prst="rect">
             <a:avLst/>
@@ -31491,15 +32154,186 @@
               <a:buNone/>
             </a:pPr>
             <a:r>
-              <a:rPr lang="en-US" sz="1100" b="1" dirty="0">
-                <a:solidFill>
-                  <a:srgbClr val="475569"/>
+              <a:rPr lang="en-US" sz="1400" b="1" dirty="0">
+                <a:solidFill>
+                  <a:srgbClr val="0D9488"/>
                 </a:solidFill>
                 <a:latin typeface="Trebuchet MS" pitchFamily="34" charset="0"/>
                 <a:ea typeface="Trebuchet MS" pitchFamily="34" charset="-122"/>
                 <a:cs typeface="Trebuchet MS" pitchFamily="34" charset="-120"/>
               </a:rPr>
-              <a:t>Syllables</a:t>
+              <a:t>re</a:t>
+            </a:r>
+            <a:endParaRPr lang="en-US" sz="1400" dirty="0"/>
+          </a:p>
+        </p:txBody>
+      </p:sp>
+      <p:sp>
+        <p:nvSpPr>
+          <p:cNvPr id="27" name="Text 25"/>
+          <p:cNvSpPr/>
+          <p:nvPr/>
+        </p:nvSpPr>
+        <p:spPr>
+          <a:xfrm>
+            <a:off x="4645152" y="3364992"/>
+            <a:ext cx="1097280" cy="475488"/>
+          </a:xfrm>
+          <a:prstGeom prst="rect">
+            <a:avLst/>
+          </a:prstGeom>
+          <a:noFill/>
+          <a:ln/>
+        </p:spPr>
+        <p:txBody>
+          <a:bodyPr wrap="square" lIns="0" tIns="0" rIns="0" bIns="0" rtlCol="0" anchor="ctr"/>
+          <a:lstStyle/>
+          <a:p>
+            <a:pPr algn="ctr" indent="0" marL="0">
+              <a:buNone/>
+            </a:pPr>
+            <a:r>
+              <a:rPr lang="en-US" sz="1600" b="1" dirty="0">
+                <a:solidFill>
+                  <a:srgbClr val="0D9488"/>
+                </a:solidFill>
+                <a:latin typeface="Trebuchet MS" pitchFamily="34" charset="0"/>
+                <a:ea typeface="Trebuchet MS" pitchFamily="34" charset="-122"/>
+                <a:cs typeface="Trebuchet MS" pitchFamily="34" charset="-120"/>
+              </a:rPr>
+              <a:t>·</a:t>
+            </a:r>
+            <a:endParaRPr lang="en-US" sz="1600" dirty="0"/>
+          </a:p>
+        </p:txBody>
+      </p:sp>
+      <p:sp>
+        <p:nvSpPr>
+          <p:cNvPr id="28" name="Shape 26"/>
+          <p:cNvSpPr/>
+          <p:nvPr/>
+        </p:nvSpPr>
+        <p:spPr>
+          <a:xfrm>
+            <a:off x="5742432" y="3364992"/>
+            <a:ext cx="1645920" cy="475488"/>
+          </a:xfrm>
+          <a:prstGeom prst="rect">
+            <a:avLst>
+              <a:gd name="adj" fmla="val 9615"/>
+            </a:avLst>
+          </a:prstGeom>
+          <a:solidFill>
+            <a:srgbClr val="FFFFFF"/>
+          </a:solidFill>
+          <a:ln w="12700">
+            <a:solidFill>
+              <a:srgbClr val="0D9488"/>
+            </a:solidFill>
+            <a:prstDash val="solid"/>
+          </a:ln>
+        </p:spPr>
+      </p:sp>
+      <p:sp>
+        <p:nvSpPr>
+          <p:cNvPr id="29" name="Text 27"/>
+          <p:cNvSpPr/>
+          <p:nvPr/>
+        </p:nvSpPr>
+        <p:spPr>
+          <a:xfrm>
+            <a:off x="5742432" y="3364992"/>
+            <a:ext cx="1645920" cy="475488"/>
+          </a:xfrm>
+          <a:prstGeom prst="rect">
+            <a:avLst/>
+          </a:prstGeom>
+          <a:noFill/>
+          <a:ln/>
+        </p:spPr>
+        <p:txBody>
+          <a:bodyPr wrap="square" lIns="0" tIns="0" rIns="0" bIns="0" rtlCol="0" anchor="ctr"/>
+          <a:lstStyle/>
+          <a:p>
+            <a:pPr algn="ctr" indent="0" marL="0">
+              <a:buNone/>
+            </a:pPr>
+            <a:r>
+              <a:rPr lang="en-US" sz="1400" b="1" dirty="0">
+                <a:solidFill>
+                  <a:srgbClr val="0D9488"/>
+                </a:solidFill>
+                <a:latin typeface="Trebuchet MS" pitchFamily="34" charset="0"/>
+                <a:ea typeface="Trebuchet MS" pitchFamily="34" charset="-122"/>
+                <a:cs typeface="Trebuchet MS" pitchFamily="34" charset="-120"/>
+              </a:rPr>
+              <a:t>run</a:t>
+            </a:r>
+            <a:endParaRPr lang="en-US" sz="1400" dirty="0"/>
+          </a:p>
+        </p:txBody>
+      </p:sp>
+      <p:sp>
+        <p:nvSpPr>
+          <p:cNvPr id="30" name="Shape 28"/>
+          <p:cNvSpPr/>
+          <p:nvPr/>
+        </p:nvSpPr>
+        <p:spPr>
+          <a:xfrm>
+            <a:off x="365760" y="4096512"/>
+            <a:ext cx="1371600" cy="804672"/>
+          </a:xfrm>
+          <a:prstGeom prst="rect">
+            <a:avLst>
+              <a:gd name="adj" fmla="val 6818"/>
+            </a:avLst>
+          </a:prstGeom>
+          <a:solidFill>
+            <a:srgbClr val="E2E8F0"/>
+          </a:solidFill>
+          <a:ln w="12700">
+            <a:solidFill>
+              <a:srgbClr val="E2E8F0"/>
+            </a:solidFill>
+            <a:prstDash val="solid"/>
+          </a:ln>
+        </p:spPr>
+      </p:sp>
+      <p:sp>
+        <p:nvSpPr>
+          <p:cNvPr id="31" name="Text 29"/>
+          <p:cNvSpPr/>
+          <p:nvPr/>
+        </p:nvSpPr>
+        <p:spPr>
+          <a:xfrm>
+            <a:off x="365760" y="4096512"/>
+            <a:ext cx="1371600" cy="804672"/>
+          </a:xfrm>
+          <a:prstGeom prst="rect">
+            <a:avLst/>
+          </a:prstGeom>
+          <a:noFill/>
+          <a:ln/>
+        </p:spPr>
+        <p:txBody>
+          <a:bodyPr wrap="square" lIns="0" tIns="0" rIns="0" bIns="0" rtlCol="0" anchor="ctr"/>
+          <a:lstStyle/>
+          <a:p>
+            <a:pPr algn="ctr" indent="0" marL="0">
+              <a:buNone/>
+            </a:pPr>
+            <a:r>
+              <a:rPr lang="en-US" sz="1100" b="1" dirty="0">
+                <a:solidFill>
+                  <a:srgbClr val="475569"/>
+                </a:solidFill>
+                <a:latin typeface="Trebuchet MS" pitchFamily="34" charset="0"/>
+                <a:ea typeface="Trebuchet MS" pitchFamily="34" charset="-122"/>
+                <a:cs typeface="Trebuchet MS" pitchFamily="34" charset="-120"/>
+              </a:rPr>
+              <a:t>Phonemes</a:t>
             </a:r>
             <a:endParaRPr lang="en-US" sz="1100" dirty="0"/>
           </a:p>
@@ -31507,13 +32341,13 @@
       </p:sp>
       <p:sp>
         <p:nvSpPr>
-          <p:cNvPr id="27" name="Shape 25"/>
-          <p:cNvSpPr/>
-          <p:nvPr/>
-        </p:nvSpPr>
-        <p:spPr>
-          <a:xfrm>
-            <a:off x="1874520" y="3273552"/>
+          <p:cNvPr id="32" name="Shape 30"/>
+          <p:cNvSpPr/>
+          <p:nvPr/>
+        </p:nvSpPr>
+        <p:spPr>
+          <a:xfrm>
+            <a:off x="1874520" y="4096512"/>
             <a:ext cx="6903720" cy="658368"/>
           </a:xfrm>
           <a:prstGeom prst="rect">
@@ -31522,30 +32356,30 @@
             </a:avLst>
           </a:prstGeom>
           <a:solidFill>
-            <a:srgbClr val="CCFBF1"/>
-          </a:solidFill>
-          <a:ln w="12700">
-            <a:solidFill>
-              <a:srgbClr val="0D9488"/>
-            </a:solidFill>
-            <a:prstDash val="solid"/>
-          </a:ln>
-        </p:spPr>
-      </p:sp>
-      <p:sp>
-        <p:nvSpPr>
-          <p:cNvPr id="28" name="Shape 26"/>
-          <p:cNvSpPr/>
-          <p:nvPr/>
-        </p:nvSpPr>
-        <p:spPr>
-          <a:xfrm>
-            <a:off x="2999232" y="3364992"/>
-            <a:ext cx="1645920" cy="475488"/>
+            <a:srgbClr val="FCE7F3"/>
+          </a:solidFill>
+          <a:ln w="12700">
+            <a:solidFill>
+              <a:srgbClr val="DB2777"/>
+            </a:solidFill>
+            <a:prstDash val="solid"/>
+          </a:ln>
+        </p:spPr>
+      </p:sp>
+      <p:sp>
+        <p:nvSpPr>
+          <p:cNvPr id="33" name="Shape 31"/>
+          <p:cNvSpPr/>
+          <p:nvPr/>
+        </p:nvSpPr>
+        <p:spPr>
+          <a:xfrm>
+            <a:off x="2427732" y="4169664"/>
+            <a:ext cx="685800" cy="475488"/>
           </a:xfrm>
           <a:prstGeom prst="rect">
             <a:avLst>
-              <a:gd name="adj" fmla="val 9615"/>
+              <a:gd name="adj" fmla="val 7692"/>
             </a:avLst>
           </a:prstGeom>
           <a:solidFill>
@@ -31553,22 +32387,22 @@
           </a:solidFill>
           <a:ln w="12700">
             <a:solidFill>
-              <a:srgbClr val="0D9488"/>
-            </a:solidFill>
-            <a:prstDash val="solid"/>
-          </a:ln>
-        </p:spPr>
-      </p:sp>
-      <p:sp>
-        <p:nvSpPr>
-          <p:cNvPr id="29" name="Text 27"/>
-          <p:cNvSpPr/>
-          <p:nvPr/>
-        </p:nvSpPr>
-        <p:spPr>
-          <a:xfrm>
-            <a:off x="2999232" y="3364992"/>
-            <a:ext cx="1645920" cy="475488"/>
+              <a:srgbClr val="DB2777"/>
+            </a:solidFill>
+            <a:prstDash val="solid"/>
+          </a:ln>
+        </p:spPr>
+      </p:sp>
+      <p:sp>
+        <p:nvSpPr>
+          <p:cNvPr id="34" name="Text 32"/>
+          <p:cNvSpPr/>
+          <p:nvPr/>
+        </p:nvSpPr>
+        <p:spPr>
+          <a:xfrm>
+            <a:off x="2427732" y="4169664"/>
+            <a:ext cx="685800" cy="475488"/>
           </a:xfrm>
           <a:prstGeom prst="rect">
             <a:avLst/>
@@ -31584,30 +32418,57 @@
               <a:buNone/>
             </a:pPr>
             <a:r>
-              <a:rPr lang="en-US" sz="1400" b="1" dirty="0">
-                <a:solidFill>
-                  <a:srgbClr val="0D9488"/>
+              <a:rPr lang="en-US" sz="900" b="1" dirty="0">
+                <a:solidFill>
+                  <a:srgbClr val="9D174D"/>
                 </a:solidFill>
                 <a:latin typeface="Trebuchet MS" pitchFamily="34" charset="0"/>
                 <a:ea typeface="Trebuchet MS" pitchFamily="34" charset="-122"/>
                 <a:cs typeface="Trebuchet MS" pitchFamily="34" charset="-120"/>
               </a:rPr>
-              <a:t>run</a:t>
-            </a:r>
-            <a:endParaRPr lang="en-US" sz="1400" dirty="0"/>
-          </a:p>
-        </p:txBody>
-      </p:sp>
-      <p:sp>
-        <p:nvSpPr>
-          <p:cNvPr id="30" name="Text 28"/>
-          <p:cNvSpPr/>
-          <p:nvPr/>
-        </p:nvSpPr>
-        <p:spPr>
-          <a:xfrm>
-            <a:off x="4645152" y="3364992"/>
-            <a:ext cx="1097280" cy="475488"/>
+              <a:t>r</a:t>
+            </a:r>
+            <a:endParaRPr lang="en-US" sz="900" dirty="0"/>
+          </a:p>
+        </p:txBody>
+      </p:sp>
+      <p:sp>
+        <p:nvSpPr>
+          <p:cNvPr id="35" name="Shape 33"/>
+          <p:cNvSpPr/>
+          <p:nvPr/>
+        </p:nvSpPr>
+        <p:spPr>
+          <a:xfrm>
+            <a:off x="3639312" y="4169664"/>
+            <a:ext cx="685800" cy="475488"/>
+          </a:xfrm>
+          <a:prstGeom prst="rect">
+            <a:avLst>
+              <a:gd name="adj" fmla="val 7692"/>
+            </a:avLst>
+          </a:prstGeom>
+          <a:solidFill>
+            <a:srgbClr val="FFFFFF"/>
+          </a:solidFill>
+          <a:ln w="12700">
+            <a:solidFill>
+              <a:srgbClr val="DB2777"/>
+            </a:solidFill>
+            <a:prstDash val="solid"/>
+          </a:ln>
+        </p:spPr>
+      </p:sp>
+      <p:sp>
+        <p:nvSpPr>
+          <p:cNvPr id="36" name="Text 34"/>
+          <p:cNvSpPr/>
+          <p:nvPr/>
+        </p:nvSpPr>
+        <p:spPr>
+          <a:xfrm>
+            <a:off x="3639312" y="4169664"/>
+            <a:ext cx="685800" cy="475488"/>
           </a:xfrm>
           <a:prstGeom prst="rect">
             <a:avLst/>
@@ -31623,34 +32484,34 @@
               <a:buNone/>
             </a:pPr>
             <a:r>
-              <a:rPr lang="en-US" sz="1600" b="1" dirty="0">
-                <a:solidFill>
-                  <a:srgbClr val="0D9488"/>
+              <a:rPr lang="en-US" sz="900" b="1" dirty="0">
+                <a:solidFill>
+                  <a:srgbClr val="9D174D"/>
                 </a:solidFill>
                 <a:latin typeface="Trebuchet MS" pitchFamily="34" charset="0"/>
                 <a:ea typeface="Trebuchet MS" pitchFamily="34" charset="-122"/>
                 <a:cs typeface="Trebuchet MS" pitchFamily="34" charset="-120"/>
               </a:rPr>
-              <a:t>·</a:t>
-            </a:r>
-            <a:endParaRPr lang="en-US" sz="1600" dirty="0"/>
-          </a:p>
-        </p:txBody>
-      </p:sp>
-      <p:sp>
-        <p:nvSpPr>
-          <p:cNvPr id="31" name="Shape 29"/>
-          <p:cNvSpPr/>
-          <p:nvPr/>
-        </p:nvSpPr>
-        <p:spPr>
-          <a:xfrm>
-            <a:off x="5742432" y="3364992"/>
-            <a:ext cx="1645920" cy="475488"/>
+              <a:t>e</a:t>
+            </a:r>
+            <a:endParaRPr lang="en-US" sz="900" dirty="0"/>
+          </a:p>
+        </p:txBody>
+      </p:sp>
+      <p:sp>
+        <p:nvSpPr>
+          <p:cNvPr id="37" name="Shape 35"/>
+          <p:cNvSpPr/>
+          <p:nvPr/>
+        </p:nvSpPr>
+        <p:spPr>
+          <a:xfrm>
+            <a:off x="4850892" y="4169664"/>
+            <a:ext cx="685800" cy="475488"/>
           </a:xfrm>
           <a:prstGeom prst="rect">
             <a:avLst>
-              <a:gd name="adj" fmla="val 9615"/>
+              <a:gd name="adj" fmla="val 7692"/>
             </a:avLst>
           </a:prstGeom>
           <a:solidFill>
@@ -31658,22 +32519,22 @@
           </a:solidFill>
           <a:ln w="12700">
             <a:solidFill>
-              <a:srgbClr val="0D9488"/>
-            </a:solidFill>
-            <a:prstDash val="solid"/>
-          </a:ln>
-        </p:spPr>
-      </p:sp>
-      <p:sp>
-        <p:nvSpPr>
-          <p:cNvPr id="32" name="Text 30"/>
-          <p:cNvSpPr/>
-          <p:nvPr/>
-        </p:nvSpPr>
-        <p:spPr>
-          <a:xfrm>
-            <a:off x="5742432" y="3364992"/>
-            <a:ext cx="1645920" cy="475488"/>
+              <a:srgbClr val="DB2777"/>
+            </a:solidFill>
+            <a:prstDash val="solid"/>
+          </a:ln>
+        </p:spPr>
+      </p:sp>
+      <p:sp>
+        <p:nvSpPr>
+          <p:cNvPr id="38" name="Text 36"/>
+          <p:cNvSpPr/>
+          <p:nvPr/>
+        </p:nvSpPr>
+        <p:spPr>
+          <a:xfrm>
+            <a:off x="4850892" y="4169664"/>
+            <a:ext cx="685800" cy="475488"/>
           </a:xfrm>
           <a:prstGeom prst="rect">
             <a:avLst/>
@@ -31689,57 +32550,57 @@
               <a:buNone/>
             </a:pPr>
             <a:r>
-              <a:rPr lang="en-US" sz="1400" b="1" dirty="0">
-                <a:solidFill>
-                  <a:srgbClr val="0D9488"/>
+              <a:rPr lang="en-US" sz="900" b="1" dirty="0">
+                <a:solidFill>
+                  <a:srgbClr val="9D174D"/>
                 </a:solidFill>
                 <a:latin typeface="Trebuchet MS" pitchFamily="34" charset="0"/>
                 <a:ea typeface="Trebuchet MS" pitchFamily="34" charset="-122"/>
                 <a:cs typeface="Trebuchet MS" pitchFamily="34" charset="-120"/>
               </a:rPr>
-              <a:t>ners</a:t>
-            </a:r>
-            <a:endParaRPr lang="en-US" sz="1400" dirty="0"/>
-          </a:p>
-        </p:txBody>
-      </p:sp>
-      <p:sp>
-        <p:nvSpPr>
-          <p:cNvPr id="33" name="Shape 31"/>
-          <p:cNvSpPr/>
-          <p:nvPr/>
-        </p:nvSpPr>
-        <p:spPr>
-          <a:xfrm>
-            <a:off x="365760" y="4096512"/>
-            <a:ext cx="1371600" cy="804672"/>
+              <a:t>r</a:t>
+            </a:r>
+            <a:endParaRPr lang="en-US" sz="900" dirty="0"/>
+          </a:p>
+        </p:txBody>
+      </p:sp>
+      <p:sp>
+        <p:nvSpPr>
+          <p:cNvPr id="39" name="Shape 37"/>
+          <p:cNvSpPr/>
+          <p:nvPr/>
+        </p:nvSpPr>
+        <p:spPr>
+          <a:xfrm>
+            <a:off x="6062472" y="4169664"/>
+            <a:ext cx="685800" cy="475488"/>
           </a:xfrm>
           <a:prstGeom prst="rect">
             <a:avLst>
-              <a:gd name="adj" fmla="val 6818"/>
+              <a:gd name="adj" fmla="val 7692"/>
             </a:avLst>
           </a:prstGeom>
           <a:solidFill>
-            <a:srgbClr val="E2E8F0"/>
-          </a:solidFill>
-          <a:ln w="12700">
-            <a:solidFill>
-              <a:srgbClr val="E2E8F0"/>
-            </a:solidFill>
-            <a:prstDash val="solid"/>
-          </a:ln>
-        </p:spPr>
-      </p:sp>
-      <p:sp>
-        <p:nvSpPr>
-          <p:cNvPr id="34" name="Text 32"/>
-          <p:cNvSpPr/>
-          <p:nvPr/>
-        </p:nvSpPr>
-        <p:spPr>
-          <a:xfrm>
-            <a:off x="365760" y="4096512"/>
-            <a:ext cx="1371600" cy="804672"/>
+            <a:srgbClr val="FFFFFF"/>
+          </a:solidFill>
+          <a:ln w="12700">
+            <a:solidFill>
+              <a:srgbClr val="DB2777"/>
+            </a:solidFill>
+            <a:prstDash val="solid"/>
+          </a:ln>
+        </p:spPr>
+      </p:sp>
+      <p:sp>
+        <p:nvSpPr>
+          <p:cNvPr id="40" name="Text 38"/>
+          <p:cNvSpPr/>
+          <p:nvPr/>
+        </p:nvSpPr>
+        <p:spPr>
+          <a:xfrm>
+            <a:off x="6062472" y="4169664"/>
+            <a:ext cx="685800" cy="475488"/>
           </a:xfrm>
           <a:prstGeom prst="rect">
             <a:avLst/>
@@ -31755,56 +32616,29 @@
               <a:buNone/>
             </a:pPr>
             <a:r>
-              <a:rPr lang="en-US" sz="1100" b="1" dirty="0">
-                <a:solidFill>
-                  <a:srgbClr val="475569"/>
+              <a:rPr lang="en-US" sz="900" b="1" dirty="0">
+                <a:solidFill>
+                  <a:srgbClr val="9D174D"/>
                 </a:solidFill>
                 <a:latin typeface="Trebuchet MS" pitchFamily="34" charset="0"/>
                 <a:ea typeface="Trebuchet MS" pitchFamily="34" charset="-122"/>
                 <a:cs typeface="Trebuchet MS" pitchFamily="34" charset="-120"/>
               </a:rPr>
-              <a:t>Phonemes</a:t>
-            </a:r>
-            <a:endParaRPr lang="en-US" sz="1100" dirty="0"/>
-          </a:p>
-        </p:txBody>
-      </p:sp>
-      <p:sp>
-        <p:nvSpPr>
-          <p:cNvPr id="35" name="Shape 33"/>
-          <p:cNvSpPr/>
-          <p:nvPr/>
-        </p:nvSpPr>
-        <p:spPr>
-          <a:xfrm>
-            <a:off x="1874520" y="4096512"/>
-            <a:ext cx="6903720" cy="658368"/>
-          </a:xfrm>
-          <a:prstGeom prst="rect">
-            <a:avLst>
-              <a:gd name="adj" fmla="val 8333"/>
-            </a:avLst>
-          </a:prstGeom>
-          <a:solidFill>
-            <a:srgbClr val="FCE7F3"/>
-          </a:solidFill>
-          <a:ln w="12700">
-            <a:solidFill>
-              <a:srgbClr val="DB2777"/>
-            </a:solidFill>
-            <a:prstDash val="solid"/>
-          </a:ln>
-        </p:spPr>
-      </p:sp>
-      <p:sp>
-        <p:nvSpPr>
-          <p:cNvPr id="36" name="Shape 34"/>
-          <p:cNvSpPr/>
-          <p:nvPr/>
-        </p:nvSpPr>
-        <p:spPr>
-          <a:xfrm>
-            <a:off x="2427732" y="4169664"/>
+              <a:t>u</a:t>
+            </a:r>
+            <a:endParaRPr lang="en-US" sz="900" dirty="0"/>
+          </a:p>
+        </p:txBody>
+      </p:sp>
+      <p:sp>
+        <p:nvSpPr>
+          <p:cNvPr id="41" name="Shape 39"/>
+          <p:cNvSpPr/>
+          <p:nvPr/>
+        </p:nvSpPr>
+        <p:spPr>
+          <a:xfrm>
+            <a:off x="7274052" y="4169664"/>
             <a:ext cx="685800" cy="475488"/>
           </a:xfrm>
           <a:prstGeom prst="rect">
@@ -31825,13 +32659,13 @@
       </p:sp>
       <p:sp>
         <p:nvSpPr>
-          <p:cNvPr id="37" name="Text 35"/>
-          <p:cNvSpPr/>
-          <p:nvPr/>
-        </p:nvSpPr>
-        <p:spPr>
-          <a:xfrm>
-            <a:off x="2427732" y="4169664"/>
+          <p:cNvPr id="42" name="Text 40"/>
+          <p:cNvSpPr/>
+          <p:nvPr/>
+        </p:nvSpPr>
+        <p:spPr>
+          <a:xfrm>
+            <a:off x="7274052" y="4169664"/>
             <a:ext cx="685800" cy="475488"/>
           </a:xfrm>
           <a:prstGeom prst="rect">
@@ -31856,271 +32690,7 @@
                 <a:ea typeface="Trebuchet MS" pitchFamily="34" charset="-122"/>
                 <a:cs typeface="Trebuchet MS" pitchFamily="34" charset="-120"/>
               </a:rPr>
-              <a:t>r</a:t>
-            </a:r>
-            <a:endParaRPr lang="en-US" sz="900" dirty="0"/>
-          </a:p>
-        </p:txBody>
-      </p:sp>
-      <p:sp>
-        <p:nvSpPr>
-          <p:cNvPr id="38" name="Shape 36"/>
-          <p:cNvSpPr/>
-          <p:nvPr/>
-        </p:nvSpPr>
-        <p:spPr>
-          <a:xfrm>
-            <a:off x="3639312" y="4169664"/>
-            <a:ext cx="685800" cy="475488"/>
-          </a:xfrm>
-          <a:prstGeom prst="rect">
-            <a:avLst>
-              <a:gd name="adj" fmla="val 7692"/>
-            </a:avLst>
-          </a:prstGeom>
-          <a:solidFill>
-            <a:srgbClr val="FFFFFF"/>
-          </a:solidFill>
-          <a:ln w="12700">
-            <a:solidFill>
-              <a:srgbClr val="DB2777"/>
-            </a:solidFill>
-            <a:prstDash val="solid"/>
-          </a:ln>
-        </p:spPr>
-      </p:sp>
-      <p:sp>
-        <p:nvSpPr>
-          <p:cNvPr id="39" name="Text 37"/>
-          <p:cNvSpPr/>
-          <p:nvPr/>
-        </p:nvSpPr>
-        <p:spPr>
-          <a:xfrm>
-            <a:off x="3639312" y="4169664"/>
-            <a:ext cx="685800" cy="475488"/>
-          </a:xfrm>
-          <a:prstGeom prst="rect">
-            <a:avLst/>
-          </a:prstGeom>
-          <a:noFill/>
-          <a:ln/>
-        </p:spPr>
-        <p:txBody>
-          <a:bodyPr wrap="square" lIns="0" tIns="0" rIns="0" bIns="0" rtlCol="0" anchor="ctr"/>
-          <a:lstStyle/>
-          <a:p>
-            <a:pPr algn="ctr" indent="0" marL="0">
-              <a:buNone/>
-            </a:pPr>
-            <a:r>
-              <a:rPr lang="en-US" sz="900" b="1" dirty="0">
-                <a:solidFill>
-                  <a:srgbClr val="9D174D"/>
-                </a:solidFill>
-                <a:latin typeface="Trebuchet MS" pitchFamily="34" charset="0"/>
-                <a:ea typeface="Trebuchet MS" pitchFamily="34" charset="-122"/>
-                <a:cs typeface="Trebuchet MS" pitchFamily="34" charset="-120"/>
-              </a:rPr>
-              <a:t>u</a:t>
-            </a:r>
-            <a:endParaRPr lang="en-US" sz="900" dirty="0"/>
-          </a:p>
-        </p:txBody>
-      </p:sp>
-      <p:sp>
-        <p:nvSpPr>
-          <p:cNvPr id="40" name="Shape 38"/>
-          <p:cNvSpPr/>
-          <p:nvPr/>
-        </p:nvSpPr>
-        <p:spPr>
-          <a:xfrm>
-            <a:off x="4850892" y="4169664"/>
-            <a:ext cx="685800" cy="475488"/>
-          </a:xfrm>
-          <a:prstGeom prst="rect">
-            <a:avLst>
-              <a:gd name="adj" fmla="val 7692"/>
-            </a:avLst>
-          </a:prstGeom>
-          <a:solidFill>
-            <a:srgbClr val="FFFFFF"/>
-          </a:solidFill>
-          <a:ln w="12700">
-            <a:solidFill>
-              <a:srgbClr val="DB2777"/>
-            </a:solidFill>
-            <a:prstDash val="solid"/>
-          </a:ln>
-        </p:spPr>
-      </p:sp>
-      <p:sp>
-        <p:nvSpPr>
-          <p:cNvPr id="41" name="Text 39"/>
-          <p:cNvSpPr/>
-          <p:nvPr/>
-        </p:nvSpPr>
-        <p:spPr>
-          <a:xfrm>
-            <a:off x="4850892" y="4169664"/>
-            <a:ext cx="685800" cy="475488"/>
-          </a:xfrm>
-          <a:prstGeom prst="rect">
-            <a:avLst/>
-          </a:prstGeom>
-          <a:noFill/>
-          <a:ln/>
-        </p:spPr>
-        <p:txBody>
-          <a:bodyPr wrap="square" lIns="0" tIns="0" rIns="0" bIns="0" rtlCol="0" anchor="ctr"/>
-          <a:lstStyle/>
-          <a:p>
-            <a:pPr algn="ctr" indent="0" marL="0">
-              <a:buNone/>
-            </a:pPr>
-            <a:r>
-              <a:rPr lang="en-US" sz="900" b="1" dirty="0">
-                <a:solidFill>
-                  <a:srgbClr val="9D174D"/>
-                </a:solidFill>
-                <a:latin typeface="Trebuchet MS" pitchFamily="34" charset="0"/>
-                <a:ea typeface="Trebuchet MS" pitchFamily="34" charset="-122"/>
-                <a:cs typeface="Trebuchet MS" pitchFamily="34" charset="-120"/>
-              </a:rPr>
-              <a:t>nn</a:t>
-            </a:r>
-            <a:endParaRPr lang="en-US" sz="900" dirty="0"/>
-          </a:p>
-        </p:txBody>
-      </p:sp>
-      <p:sp>
-        <p:nvSpPr>
-          <p:cNvPr id="42" name="Shape 40"/>
-          <p:cNvSpPr/>
-          <p:nvPr/>
-        </p:nvSpPr>
-        <p:spPr>
-          <a:xfrm>
-            <a:off x="6062472" y="4169664"/>
-            <a:ext cx="685800" cy="475488"/>
-          </a:xfrm>
-          <a:prstGeom prst="rect">
-            <a:avLst>
-              <a:gd name="adj" fmla="val 7692"/>
-            </a:avLst>
-          </a:prstGeom>
-          <a:solidFill>
-            <a:srgbClr val="FFFFFF"/>
-          </a:solidFill>
-          <a:ln w="12700">
-            <a:solidFill>
-              <a:srgbClr val="DB2777"/>
-            </a:solidFill>
-            <a:prstDash val="solid"/>
-          </a:ln>
-        </p:spPr>
-      </p:sp>
-      <p:sp>
-        <p:nvSpPr>
-          <p:cNvPr id="43" name="Text 41"/>
-          <p:cNvSpPr/>
-          <p:nvPr/>
-        </p:nvSpPr>
-        <p:spPr>
-          <a:xfrm>
-            <a:off x="6062472" y="4169664"/>
-            <a:ext cx="685800" cy="475488"/>
-          </a:xfrm>
-          <a:prstGeom prst="rect">
-            <a:avLst/>
-          </a:prstGeom>
-          <a:noFill/>
-          <a:ln/>
-        </p:spPr>
-        <p:txBody>
-          <a:bodyPr wrap="square" lIns="0" tIns="0" rIns="0" bIns="0" rtlCol="0" anchor="ctr"/>
-          <a:lstStyle/>
-          <a:p>
-            <a:pPr algn="ctr" indent="0" marL="0">
-              <a:buNone/>
-            </a:pPr>
-            <a:r>
-              <a:rPr lang="en-US" sz="900" b="1" dirty="0">
-                <a:solidFill>
-                  <a:srgbClr val="9D174D"/>
-                </a:solidFill>
-                <a:latin typeface="Trebuchet MS" pitchFamily="34" charset="0"/>
-                <a:ea typeface="Trebuchet MS" pitchFamily="34" charset="-122"/>
-                <a:cs typeface="Trebuchet MS" pitchFamily="34" charset="-120"/>
-              </a:rPr>
-              <a:t>er</a:t>
-            </a:r>
-            <a:endParaRPr lang="en-US" sz="900" dirty="0"/>
-          </a:p>
-        </p:txBody>
-      </p:sp>
-      <p:sp>
-        <p:nvSpPr>
-          <p:cNvPr id="44" name="Shape 42"/>
-          <p:cNvSpPr/>
-          <p:nvPr/>
-        </p:nvSpPr>
-        <p:spPr>
-          <a:xfrm>
-            <a:off x="7274052" y="4169664"/>
-            <a:ext cx="685800" cy="475488"/>
-          </a:xfrm>
-          <a:prstGeom prst="rect">
-            <a:avLst>
-              <a:gd name="adj" fmla="val 7692"/>
-            </a:avLst>
-          </a:prstGeom>
-          <a:solidFill>
-            <a:srgbClr val="FFFFFF"/>
-          </a:solidFill>
-          <a:ln w="12700">
-            <a:solidFill>
-              <a:srgbClr val="DB2777"/>
-            </a:solidFill>
-            <a:prstDash val="solid"/>
-          </a:ln>
-        </p:spPr>
-      </p:sp>
-      <p:sp>
-        <p:nvSpPr>
-          <p:cNvPr id="45" name="Text 43"/>
-          <p:cNvSpPr/>
-          <p:nvPr/>
-        </p:nvSpPr>
-        <p:spPr>
-          <a:xfrm>
-            <a:off x="7274052" y="4169664"/>
-            <a:ext cx="685800" cy="475488"/>
-          </a:xfrm>
-          <a:prstGeom prst="rect">
-            <a:avLst/>
-          </a:prstGeom>
-          <a:noFill/>
-          <a:ln/>
-        </p:spPr>
-        <p:txBody>
-          <a:bodyPr wrap="square" lIns="0" tIns="0" rIns="0" bIns="0" rtlCol="0" anchor="ctr"/>
-          <a:lstStyle/>
-          <a:p>
-            <a:pPr algn="ctr" indent="0" marL="0">
-              <a:buNone/>
-            </a:pPr>
-            <a:r>
-              <a:rPr lang="en-US" sz="900" b="1" dirty="0">
-                <a:solidFill>
-                  <a:srgbClr val="9D174D"/>
-                </a:solidFill>
-                <a:latin typeface="Trebuchet MS" pitchFamily="34" charset="0"/>
-                <a:ea typeface="Trebuchet MS" pitchFamily="34" charset="-122"/>
-                <a:cs typeface="Trebuchet MS" pitchFamily="34" charset="-120"/>
-              </a:rPr>
-              <a:t>s</a:t>
+              <a:t>n</a:t>
             </a:r>
             <a:endParaRPr lang="en-US" sz="900" dirty="0"/>
           </a:p>
@@ -34316,7 +34886,7 @@
                 <a:ea typeface="Trebuchet MS" pitchFamily="34" charset="-122"/>
                 <a:cs typeface="Trebuchet MS" pitchFamily="34" charset="-120"/>
               </a:rPr>
-              <a:t>-s</a:t>
+              <a:t>-ner</a:t>
             </a:r>
             <a:endParaRPr lang="en-US" sz="1300" dirty="0"/>
           </a:p>
@@ -34380,7 +34950,7 @@
                 <a:ea typeface="Trebuchet MS" pitchFamily="34" charset="-122"/>
                 <a:cs typeface="Trebuchet MS" pitchFamily="34" charset="-120"/>
               </a:rPr>
-              <a:t>un-</a:t>
+              <a:t>fore-</a:t>
             </a:r>
             <a:endParaRPr lang="en-US" sz="1300" dirty="0"/>
           </a:p>
@@ -34533,7 +35103,7 @@
                 <a:ea typeface="Trebuchet MS" pitchFamily="34" charset="-122"/>
                 <a:cs typeface="Trebuchet MS" pitchFamily="34" charset="-120"/>
               </a:rPr>
-              <a:t>fore-</a:t>
+              <a:t>un-</a:t>
             </a:r>
             <a:endParaRPr lang="en-US" sz="1300" dirty="0"/>
           </a:p>
@@ -36377,7 +36947,7 @@
                 <a:ea typeface="Calibri" pitchFamily="34" charset="-122"/>
                 <a:cs typeface="Calibri" pitchFamily="34" charset="-120"/>
               </a:rPr>
-              <a:t>1.  The word 'runner' contains the root 'run' and the suffix '-er' meaning a person who does something.</a:t>
+              <a:t>1.  The word 'overrun' can describe weeds taking over a garden.</a:t>
             </a:r>
             <a:endParaRPr lang="en-US" sz="1300" dirty="0"/>
           </a:p>
@@ -36516,7 +37086,7 @@
                 <a:ea typeface="Calibri" pitchFamily="34" charset="-122"/>
                 <a:cs typeface="Calibri" pitchFamily="34" charset="-120"/>
               </a:rPr>
-              <a:t>2.  The prefix 'out-' in 'outrun' means 'under' or 'below'.</a:t>
+              <a:t>2.  The root 'run' comes from the Greek word for swimming.</a:t>
             </a:r>
             <a:endParaRPr lang="en-US" sz="1300" dirty="0"/>
           </a:p>
@@ -36655,7 +37225,7 @@
                 <a:ea typeface="Calibri" pitchFamily="34" charset="-122"/>
                 <a:cs typeface="Calibri" pitchFamily="34" charset="-120"/>
               </a:rPr>
-              <a:t>3.  A 'runaway' is someone or something that has fled or escaped.</a:t>
+              <a:t>3.  The prefix 'out' in 'outrun' means to go slower than someone else.</a:t>
             </a:r>
             <a:endParaRPr lang="en-US" sz="1300" dirty="0"/>
           </a:p>
@@ -36678,11 +37248,11 @@
             </a:avLst>
           </a:prstGeom>
           <a:solidFill>
-            <a:srgbClr val="DCFCE7"/>
-          </a:solidFill>
-          <a:ln w="12700">
-            <a:solidFill>
-              <a:srgbClr val="16A34A"/>
+            <a:srgbClr val="FEE2E2"/>
+          </a:solidFill>
+          <a:ln w="12700">
+            <a:solidFill>
+              <a:srgbClr val="DC2626"/>
             </a:solidFill>
             <a:prstDash val="solid"/>
           </a:ln>
@@ -36715,13 +37285,13 @@
             <a:r>
               <a:rPr lang="en-US" sz="1100" b="1" dirty="0">
                 <a:solidFill>
-                  <a:srgbClr val="16A34A"/>
+                  <a:srgbClr val="DC2626"/>
                 </a:solidFill>
                 <a:latin typeface="Trebuchet MS" pitchFamily="34" charset="0"/>
                 <a:ea typeface="Trebuchet MS" pitchFamily="34" charset="-122"/>
                 <a:cs typeface="Trebuchet MS" pitchFamily="34" charset="-120"/>
               </a:rPr>
-              <a:t>TRUE</a:t>
+              <a:t>FALSE</a:t>
             </a:r>
             <a:endParaRPr lang="en-US" sz="1100" dirty="0"/>
           </a:p>
@@ -36794,7 +37364,7 @@
                 <a:ea typeface="Calibri" pitchFamily="34" charset="-122"/>
                 <a:cs typeface="Calibri" pitchFamily="34" charset="-120"/>
               </a:rPr>
-              <a:t>4.  The root 'run' can be combined with both prefixes and suffixes to make new words.</a:t>
+              <a:t>4.  The word 'runner' contains the root 'run' plus a suffix meaning 'one who'.</a:t>
             </a:r>
             <a:endParaRPr lang="en-US" sz="1300" dirty="0"/>
           </a:p>
@@ -36933,7 +37503,7 @@
                 <a:ea typeface="Calibri" pitchFamily="34" charset="-122"/>
                 <a:cs typeface="Calibri" pitchFamily="34" charset="-120"/>
               </a:rPr>
-              <a:t>5.  The word 'rerun' means to run something for the very first time.</a:t>
+              <a:t>5.  A 'rerun' of a television show means you are watching it again.</a:t>
             </a:r>
             <a:endParaRPr lang="en-US" sz="1300" dirty="0"/>
           </a:p>
@@ -36956,11 +37526,11 @@
             </a:avLst>
           </a:prstGeom>
           <a:solidFill>
-            <a:srgbClr val="FEE2E2"/>
-          </a:solidFill>
-          <a:ln w="12700">
-            <a:solidFill>
-              <a:srgbClr val="DC2626"/>
+            <a:srgbClr val="DCFCE7"/>
+          </a:solidFill>
+          <a:ln w="12700">
+            <a:solidFill>
+              <a:srgbClr val="16A34A"/>
             </a:solidFill>
             <a:prstDash val="solid"/>
           </a:ln>
@@ -36993,13 +37563,13 @@
             <a:r>
               <a:rPr lang="en-US" sz="1100" b="1" dirty="0">
                 <a:solidFill>
-                  <a:srgbClr val="DC2626"/>
+                  <a:srgbClr val="16A34A"/>
                 </a:solidFill>
                 <a:latin typeface="Trebuchet MS" pitchFamily="34" charset="0"/>
                 <a:ea typeface="Trebuchet MS" pitchFamily="34" charset="-122"/>
                 <a:cs typeface="Trebuchet MS" pitchFamily="34" charset="-120"/>
               </a:rPr>
-              <a:t>FALSE</a:t>
+              <a:t>TRUE</a:t>
             </a:r>
             <a:endParaRPr lang="en-US" sz="1100" dirty="0"/>
           </a:p>
@@ -38995,7 +39565,7 @@
                 <a:ea typeface="Trebuchet MS" pitchFamily="34" charset="-122"/>
                 <a:cs typeface="Trebuchet MS" pitchFamily="34" charset="-120"/>
               </a:rPr>
-              <a:t>-s</a:t>
+              <a:t>-ner</a:t>
             </a:r>
             <a:endParaRPr lang="en-US" sz="1300" dirty="0"/>
           </a:p>
@@ -39059,7 +39629,7 @@
                 <a:ea typeface="Trebuchet MS" pitchFamily="34" charset="-122"/>
                 <a:cs typeface="Trebuchet MS" pitchFamily="34" charset="-120"/>
               </a:rPr>
-              <a:t>un-</a:t>
+              <a:t>fore-</a:t>
             </a:r>
             <a:endParaRPr lang="en-US" sz="1300" dirty="0"/>
           </a:p>
@@ -39212,7 +39782,7 @@
                 <a:ea typeface="Trebuchet MS" pitchFamily="34" charset="-122"/>
                 <a:cs typeface="Trebuchet MS" pitchFamily="34" charset="-120"/>
               </a:rPr>
-              <a:t>fore-</a:t>
+              <a:t>un-</a:t>
             </a:r>
             <a:endParaRPr lang="en-US" sz="1300" dirty="0"/>
           </a:p>
@@ -40212,7 +40782,7 @@
                 <a:ea typeface="Calibri" pitchFamily="34" charset="-122"/>
                 <a:cs typeface="Calibri" pitchFamily="34" charset="-120"/>
               </a:rPr>
-              <a:t>To show or do something again, like when a TV show plays a second time.</a:t>
+              <a:t>To show or do something again, like watching a rerun of your favourite TV show.</a:t>
             </a:r>
             <a:endParaRPr lang="en-US" sz="1200" dirty="0"/>
           </a:p>
@@ -40351,7 +40921,7 @@
                 <a:ea typeface="Calibri" pitchFamily="34" charset="-122"/>
                 <a:cs typeface="Calibri" pitchFamily="34" charset="-120"/>
               </a:rPr>
-              <a:t>When something spreads too far or goes beyond its limits, like weeds overrunning a garden.</a:t>
+              <a:t>When something spreads or takes over more than it should, like weeds overrunning a garden.</a:t>
             </a:r>
             <a:endParaRPr lang="en-US" sz="1200" dirty="0"/>
           </a:p>
@@ -40490,7 +41060,7 @@
                 <a:ea typeface="Calibri" pitchFamily="34" charset="-122"/>
                 <a:cs typeface="Calibri" pitchFamily="34" charset="-120"/>
               </a:rPr>
-              <a:t>To run faster than someone else and leave them behind.</a:t>
+              <a:t>To run faster than someone else so you get ahead of them.</a:t>
             </a:r>
             <a:endParaRPr lang="en-US" sz="1200" dirty="0"/>
           </a:p>
@@ -40629,7 +41199,7 @@
                 <a:ea typeface="Calibri" pitchFamily="34" charset="-122"/>
                 <a:cs typeface="Calibri" pitchFamily="34" charset="-120"/>
               </a:rPr>
-              <a:t>Something or someone that comes before another and prepares the way.</a:t>
+              <a:t>Something or someone that came before and helped lead the way to something newer.</a:t>
             </a:r>
             <a:endParaRPr lang="en-US" sz="1200" dirty="0"/>
           </a:p>
@@ -40907,7 +41477,7 @@
                 <a:ea typeface="Calibri" pitchFamily="34" charset="-122"/>
                 <a:cs typeface="Calibri" pitchFamily="34" charset="-120"/>
               </a:rPr>
-              <a:t>Someone or something that has escaped or run off on its own.</a:t>
+              <a:t>Someone or something that has run off and escaped, or something moving out of control.</a:t>
             </a:r>
             <a:endParaRPr lang="en-US" sz="1200" dirty="0"/>
           </a:p>
@@ -41046,7 +41616,7 @@
                 <a:ea typeface="Calibri" pitchFamily="34" charset="-122"/>
                 <a:cs typeface="Calibri" pitchFamily="34" charset="-120"/>
               </a:rPr>
-              <a:t>The action of moving quickly on your feet.</a:t>
+              <a:t>The action of moving quickly on foot.</a:t>
             </a:r>
             <a:endParaRPr lang="en-US" sz="1200" dirty="0"/>
           </a:p>
@@ -41541,7 +42111,7 @@
                 <a:ea typeface="Calibri" pitchFamily="34" charset="-122"/>
                 <a:cs typeface="Calibri" pitchFamily="34" charset="-120"/>
               </a:rPr>
-              <a:t>The fastest runner in our school will compete in the regional athletics carnival next week.</a:t>
+              <a:t>The fastest runner in our school won three medals at the athletics carnival.</a:t>
             </a:r>
             <a:endParaRPr lang="en-US" sz="1500" dirty="0"/>
           </a:p>
@@ -41705,7 +42275,7 @@
                 <a:ea typeface="Calibri" pitchFamily="34" charset="-122"/>
                 <a:cs typeface="Calibri" pitchFamily="34" charset="-120"/>
               </a:rPr>
-              <a:t>Heavy rainfall caused a runoff of muddy water across the oval and into the drains.</a:t>
+              <a:t>Heavy rainfall caused a runoff that flooded the oval and washed mud onto the footpath.</a:t>
             </a:r>
             <a:endParaRPr lang="en-US" sz="1500" dirty="0"/>
           </a:p>
@@ -41869,7 +42439,7 @@
                 <a:ea typeface="Calibri" pitchFamily="34" charset="-122"/>
                 <a:cs typeface="Calibri" pitchFamily="34" charset="-120"/>
               </a:rPr>
-              <a:t>She managed to outrun all the other competitors and crossed the finish line first.</a:t>
+              <a:t>The teacher decided to outrun her students in the fun run, much to everyone's surprise.</a:t>
             </a:r>
             <a:endParaRPr lang="en-US" sz="1500" dirty="0"/>
           </a:p>
